--- a/2025/LEC/07-3 Transformers.pptx
+++ b/2025/LEC/07-3 Transformers.pptx
@@ -5,7 +5,7 @@
     <p:sldMasterId id="2147483648" r:id="rId1"/>
   </p:sldMasterIdLst>
   <p:notesMasterIdLst>
-    <p:notesMasterId r:id="rId24"/>
+    <p:notesMasterId r:id="rId26"/>
   </p:notesMasterIdLst>
   <p:sldIdLst>
     <p:sldId id="256" r:id="rId2"/>
@@ -24,12 +24,14 @@
     <p:sldId id="452" r:id="rId15"/>
     <p:sldId id="458" r:id="rId16"/>
     <p:sldId id="456" r:id="rId17"/>
-    <p:sldId id="459" r:id="rId18"/>
+    <p:sldId id="465" r:id="rId18"/>
     <p:sldId id="461" r:id="rId19"/>
-    <p:sldId id="463" r:id="rId20"/>
-    <p:sldId id="460" r:id="rId21"/>
-    <p:sldId id="457" r:id="rId22"/>
-    <p:sldId id="464" r:id="rId23"/>
+    <p:sldId id="466" r:id="rId20"/>
+    <p:sldId id="459" r:id="rId21"/>
+    <p:sldId id="463" r:id="rId22"/>
+    <p:sldId id="460" r:id="rId23"/>
+    <p:sldId id="457" r:id="rId24"/>
+    <p:sldId id="464" r:id="rId25"/>
   </p:sldIdLst>
   <p:sldSz cx="12192000" cy="6858000"/>
   <p:notesSz cx="6858000" cy="9144000"/>
@@ -1325,7 +1327,7 @@
             <a:spLocks noGrp="1"/>
           </p:cNvSpPr>
           <p:nvPr>
-            <p:ph type="sldNum" sz="quarter" idx="10"/>
+            <p:ph type="sldNum" sz="quarter" idx="5"/>
           </p:nvPr>
         </p:nvSpPr>
         <p:spPr/>
@@ -1344,7 +1346,7 @@
     </p:spTree>
     <p:extLst>
       <p:ext uri="{BB962C8B-B14F-4D97-AF65-F5344CB8AC3E}">
-        <p14:creationId xmlns:p14="http://schemas.microsoft.com/office/powerpoint/2010/main" val="3664885722"/>
+        <p14:creationId xmlns:p14="http://schemas.microsoft.com/office/powerpoint/2010/main" val="587437706"/>
       </p:ext>
     </p:extLst>
   </p:cSld>
@@ -1508,6 +1510,90 @@
             <a:fld id="{E6180E86-9708-4F42-A49B-C22D9D956F16}" type="slidenum">
               <a:rPr lang="ru-RU" smtClean="0"/>
               <a:t>20</a:t>
+            </a:fld>
+            <a:endParaRPr lang="ru-RU"/>
+          </a:p>
+        </p:txBody>
+      </p:sp>
+    </p:spTree>
+    <p:extLst>
+      <p:ext uri="{BB962C8B-B14F-4D97-AF65-F5344CB8AC3E}">
+        <p14:creationId xmlns:p14="http://schemas.microsoft.com/office/powerpoint/2010/main" val="3664885722"/>
+      </p:ext>
+    </p:extLst>
+  </p:cSld>
+  <p:clrMapOvr>
+    <a:masterClrMapping/>
+  </p:clrMapOvr>
+</p:notes>
+</file>
+
+<file path=ppt/notesSlides/notesSlide18.xml><?xml version="1.0" encoding="utf-8"?>
+<p:notes xmlns:a="http://schemas.openxmlformats.org/drawingml/2006/main" xmlns:r="http://schemas.openxmlformats.org/officeDocument/2006/relationships" xmlns:p="http://schemas.openxmlformats.org/presentationml/2006/main">
+  <p:cSld>
+    <p:spTree>
+      <p:nvGrpSpPr>
+        <p:cNvPr id="1" name=""/>
+        <p:cNvGrpSpPr/>
+        <p:nvPr/>
+      </p:nvGrpSpPr>
+      <p:grpSpPr>
+        <a:xfrm>
+          <a:off x="0" y="0"/>
+          <a:ext cx="0" cy="0"/>
+          <a:chOff x="0" y="0"/>
+          <a:chExt cx="0" cy="0"/>
+        </a:xfrm>
+      </p:grpSpPr>
+      <p:sp>
+        <p:nvSpPr>
+          <p:cNvPr id="2" name="Образ слайда 1"/>
+          <p:cNvSpPr>
+            <a:spLocks noGrp="1" noRot="1" noChangeAspect="1"/>
+          </p:cNvSpPr>
+          <p:nvPr>
+            <p:ph type="sldImg"/>
+          </p:nvPr>
+        </p:nvSpPr>
+        <p:spPr/>
+      </p:sp>
+      <p:sp>
+        <p:nvSpPr>
+          <p:cNvPr id="3" name="Заметки 2"/>
+          <p:cNvSpPr>
+            <a:spLocks noGrp="1"/>
+          </p:cNvSpPr>
+          <p:nvPr>
+            <p:ph type="body" idx="1"/>
+          </p:nvPr>
+        </p:nvSpPr>
+        <p:spPr/>
+        <p:txBody>
+          <a:bodyPr/>
+          <a:lstStyle/>
+          <a:p>
+            <a:endParaRPr lang="ru-RU" dirty="0"/>
+          </a:p>
+        </p:txBody>
+      </p:sp>
+      <p:sp>
+        <p:nvSpPr>
+          <p:cNvPr id="4" name="Номер слайда 3"/>
+          <p:cNvSpPr>
+            <a:spLocks noGrp="1"/>
+          </p:cNvSpPr>
+          <p:nvPr>
+            <p:ph type="sldNum" sz="quarter" idx="10"/>
+          </p:nvPr>
+        </p:nvSpPr>
+        <p:spPr/>
+        <p:txBody>
+          <a:bodyPr/>
+          <a:lstStyle/>
+          <a:p>
+            <a:fld id="{E6180E86-9708-4F42-A49B-C22D9D956F16}" type="slidenum">
+              <a:rPr lang="ru-RU" smtClean="0"/>
+              <a:t>22</a:t>
             </a:fld>
             <a:endParaRPr lang="ru-RU"/>
           </a:p>
@@ -13059,6 +13145,3167 @@
       </p:grpSpPr>
       <p:sp>
         <p:nvSpPr>
+          <p:cNvPr id="2" name="Заголовок 1">
+            <a:extLst>
+              <a:ext uri="{FF2B5EF4-FFF2-40B4-BE49-F238E27FC236}">
+                <a16:creationId xmlns:a16="http://schemas.microsoft.com/office/drawing/2014/main" id="{477A6ACE-02E7-DB7E-C222-A0FFC0C62B93}"/>
+              </a:ext>
+            </a:extLst>
+          </p:cNvPr>
+          <p:cNvSpPr>
+            <a:spLocks noGrp="1"/>
+          </p:cNvSpPr>
+          <p:nvPr>
+            <p:ph type="title"/>
+          </p:nvPr>
+        </p:nvSpPr>
+        <p:spPr>
+          <a:xfrm>
+            <a:off x="600727" y="231733"/>
+            <a:ext cx="10990545" cy="315912"/>
+          </a:xfrm>
+        </p:spPr>
+        <p:txBody>
+          <a:bodyPr>
+            <a:normAutofit fontScale="90000"/>
+          </a:bodyPr>
+          <a:lstStyle/>
+          <a:p>
+            <a:pPr algn="ctr"/>
+            <a:r>
+              <a:rPr lang="ru-RU" dirty="0"/>
+              <a:t>Модели трансформеры </a:t>
+            </a:r>
+          </a:p>
+        </p:txBody>
+      </p:sp>
+      <p:sp>
+        <p:nvSpPr>
+          <p:cNvPr id="3" name="Объект 2">
+            <a:extLst>
+              <a:ext uri="{FF2B5EF4-FFF2-40B4-BE49-F238E27FC236}">
+                <a16:creationId xmlns:a16="http://schemas.microsoft.com/office/drawing/2014/main" id="{5CF320CA-A7E7-C277-770A-06D8195EC5ED}"/>
+              </a:ext>
+            </a:extLst>
+          </p:cNvPr>
+          <p:cNvSpPr>
+            <a:spLocks noGrp="1"/>
+          </p:cNvSpPr>
+          <p:nvPr>
+            <p:ph idx="1"/>
+          </p:nvPr>
+        </p:nvSpPr>
+        <p:spPr>
+          <a:xfrm>
+            <a:off x="241160" y="681038"/>
+            <a:ext cx="5558391" cy="6045439"/>
+          </a:xfrm>
+        </p:spPr>
+        <p:txBody>
+          <a:bodyPr>
+            <a:normAutofit fontScale="92500"/>
+          </a:bodyPr>
+          <a:lstStyle/>
+          <a:p>
+            <a:pPr marL="0" indent="0" algn="just">
+              <a:buNone/>
+            </a:pPr>
+            <a:r>
+              <a:rPr lang="ru-RU" sz="2200" b="1" dirty="0"/>
+              <a:t>Достоинства:</a:t>
+            </a:r>
+          </a:p>
+          <a:p>
+            <a:pPr algn="just"/>
+            <a:r>
+              <a:rPr lang="ru-RU" sz="2200" b="1" dirty="0"/>
+              <a:t>Параллелизм</a:t>
+            </a:r>
+            <a:r>
+              <a:rPr lang="ru-RU" sz="2200" dirty="0"/>
+              <a:t>: возможность обучаться на больших объемах данных без ограничений </a:t>
+            </a:r>
+            <a:r>
+              <a:rPr lang="en-US" sz="2200" dirty="0"/>
+              <a:t>RNN</a:t>
+            </a:r>
+          </a:p>
+          <a:p>
+            <a:pPr algn="just"/>
+            <a:r>
+              <a:rPr lang="en-US" sz="2200" b="1" dirty="0" err="1"/>
+              <a:t>М</a:t>
+            </a:r>
+            <a:r>
+              <a:rPr lang="ru-RU" sz="2200" b="1" dirty="0" err="1"/>
+              <a:t>оделирование</a:t>
+            </a:r>
+            <a:r>
+              <a:rPr lang="ru-RU" sz="2200" b="1" dirty="0"/>
+              <a:t> долгосрочных зависимостей</a:t>
+            </a:r>
+          </a:p>
+          <a:p>
+            <a:pPr lvl="1" algn="just"/>
+            <a:r>
+              <a:rPr lang="ru-RU" sz="1700" dirty="0"/>
+              <a:t>SOTA</a:t>
+            </a:r>
+            <a:r>
+              <a:rPr lang="en-US" sz="1700" dirty="0"/>
+              <a:t> </a:t>
+            </a:r>
+            <a:r>
+              <a:rPr lang="en" sz="1700" dirty="0"/>
+              <a:t>Informer, </a:t>
+            </a:r>
+            <a:r>
+              <a:rPr lang="en" sz="1700" dirty="0" err="1"/>
+              <a:t>FEDformer</a:t>
+            </a:r>
+            <a:r>
+              <a:rPr lang="en" sz="1700" dirty="0"/>
+              <a:t>, </a:t>
+            </a:r>
+            <a:r>
+              <a:rPr lang="en" sz="1700" dirty="0" err="1"/>
+              <a:t>iTransformer</a:t>
+            </a:r>
+            <a:endParaRPr lang="ru-RU" sz="1300" dirty="0"/>
+          </a:p>
+          <a:p>
+            <a:pPr algn="just"/>
+            <a:r>
+              <a:rPr lang="ru-RU" sz="2200" dirty="0"/>
+              <a:t>Выявление глобальных связей (особенно в МВР)</a:t>
+            </a:r>
+          </a:p>
+          <a:p>
+            <a:pPr algn="just"/>
+            <a:r>
+              <a:rPr lang="ru-RU" sz="2200" b="1" dirty="0"/>
+              <a:t>Интерпретируемость </a:t>
+            </a:r>
+            <a:r>
+              <a:rPr lang="ru-RU" sz="2200" dirty="0"/>
+              <a:t>Матрицы внимания (</a:t>
+            </a:r>
+            <a:r>
+              <a:rPr lang="en" sz="2200" dirty="0"/>
+              <a:t>Attention Maps) — </a:t>
+            </a:r>
+            <a:r>
+              <a:rPr lang="ru-RU" sz="2200" dirty="0"/>
+              <a:t>это, по сути, цифровое воплощение ваших автокорреляционных и кросс-корреляционных функций. Мы можем </a:t>
+            </a:r>
+            <a:r>
+              <a:rPr lang="ru-RU" sz="2200" i="1" dirty="0"/>
+              <a:t>посмотреть</a:t>
+            </a:r>
+            <a:r>
+              <a:rPr lang="ru-RU" sz="2200" dirty="0"/>
+              <a:t>, на какие предыдущие моменты времени модель обращает внимание для прогноза в точке </a:t>
+            </a:r>
+            <a:r>
+              <a:rPr lang="en" sz="2200" dirty="0"/>
+              <a:t>t. </a:t>
+            </a:r>
+            <a:endParaRPr lang="ru-RU" sz="2200" dirty="0"/>
+          </a:p>
+          <a:p>
+            <a:pPr algn="just"/>
+            <a:r>
+              <a:rPr lang="ru-RU" sz="2200" dirty="0"/>
+              <a:t>Архитектуры, адаптированные к структуре ВР</a:t>
+            </a:r>
+            <a:endParaRPr lang="en-US" sz="2200" dirty="0"/>
+          </a:p>
+          <a:p>
+            <a:pPr algn="just"/>
+            <a:r>
+              <a:rPr lang="en-US" sz="2200" b="1" dirty="0"/>
+              <a:t>Representation learning </a:t>
+            </a:r>
+            <a:r>
+              <a:rPr lang="en-US" sz="2200" dirty="0" err="1"/>
+              <a:t>пар</a:t>
+            </a:r>
+            <a:r>
+              <a:rPr lang="ru-RU" sz="2200" dirty="0" err="1"/>
+              <a:t>адигма</a:t>
+            </a:r>
+            <a:r>
+              <a:rPr lang="ru-RU" sz="2200" dirty="0"/>
+              <a:t> ( напр. доступно Самообучение)</a:t>
+            </a:r>
+          </a:p>
+          <a:p>
+            <a:pPr algn="just"/>
+            <a:endParaRPr lang="ru-RU" sz="2200" dirty="0"/>
+          </a:p>
+        </p:txBody>
+      </p:sp>
+      <p:sp>
+        <p:nvSpPr>
+          <p:cNvPr id="4" name="Объект 2">
+            <a:extLst>
+              <a:ext uri="{FF2B5EF4-FFF2-40B4-BE49-F238E27FC236}">
+                <a16:creationId xmlns:a16="http://schemas.microsoft.com/office/drawing/2014/main" id="{C4D4BD83-AF06-56E3-BE66-EDEB459E4F1C}"/>
+              </a:ext>
+            </a:extLst>
+          </p:cNvPr>
+          <p:cNvSpPr txBox="1">
+            <a:spLocks/>
+          </p:cNvSpPr>
+          <p:nvPr/>
+        </p:nvSpPr>
+        <p:spPr>
+          <a:xfrm>
+            <a:off x="5917503" y="681038"/>
+            <a:ext cx="5911241" cy="5945229"/>
+          </a:xfrm>
+          <a:prstGeom prst="rect">
+            <a:avLst/>
+          </a:prstGeom>
+        </p:spPr>
+        <p:txBody>
+          <a:bodyPr vert="horz" lIns="91440" tIns="45720" rIns="91440" bIns="45720" rtlCol="0">
+            <a:normAutofit/>
+          </a:bodyPr>
+          <a:lstStyle>
+            <a:lvl1pPr marL="228600" indent="-228600" algn="l" defTabSz="914400" rtl="0" eaLnBrk="1" latinLnBrk="0" hangingPunct="1">
+              <a:lnSpc>
+                <a:spcPct val="90000"/>
+              </a:lnSpc>
+              <a:spcBef>
+                <a:spcPts val="1000"/>
+              </a:spcBef>
+              <a:buFont typeface="Arial" panose="020B0604020202020204" pitchFamily="34" charset="0"/>
+              <a:buChar char="•"/>
+              <a:defRPr sz="2800" kern="1200">
+                <a:solidFill>
+                  <a:schemeClr val="tx1"/>
+                </a:solidFill>
+                <a:latin typeface="+mn-lt"/>
+                <a:ea typeface="+mn-ea"/>
+                <a:cs typeface="+mn-cs"/>
+              </a:defRPr>
+            </a:lvl1pPr>
+            <a:lvl2pPr marL="685800" indent="-228600" algn="l" defTabSz="914400" rtl="0" eaLnBrk="1" latinLnBrk="0" hangingPunct="1">
+              <a:lnSpc>
+                <a:spcPct val="90000"/>
+              </a:lnSpc>
+              <a:spcBef>
+                <a:spcPts val="500"/>
+              </a:spcBef>
+              <a:buFont typeface="Arial" panose="020B0604020202020204" pitchFamily="34" charset="0"/>
+              <a:buChar char="•"/>
+              <a:defRPr sz="2400" kern="1200">
+                <a:solidFill>
+                  <a:schemeClr val="tx1"/>
+                </a:solidFill>
+                <a:latin typeface="+mn-lt"/>
+                <a:ea typeface="+mn-ea"/>
+                <a:cs typeface="+mn-cs"/>
+              </a:defRPr>
+            </a:lvl2pPr>
+            <a:lvl3pPr marL="1143000" indent="-228600" algn="l" defTabSz="914400" rtl="0" eaLnBrk="1" latinLnBrk="0" hangingPunct="1">
+              <a:lnSpc>
+                <a:spcPct val="90000"/>
+              </a:lnSpc>
+              <a:spcBef>
+                <a:spcPts val="500"/>
+              </a:spcBef>
+              <a:buFont typeface="Arial" panose="020B0604020202020204" pitchFamily="34" charset="0"/>
+              <a:buChar char="•"/>
+              <a:defRPr sz="2000" kern="1200">
+                <a:solidFill>
+                  <a:schemeClr val="tx1"/>
+                </a:solidFill>
+                <a:latin typeface="+mn-lt"/>
+                <a:ea typeface="+mn-ea"/>
+                <a:cs typeface="+mn-cs"/>
+              </a:defRPr>
+            </a:lvl3pPr>
+            <a:lvl4pPr marL="1600200" indent="-228600" algn="l" defTabSz="914400" rtl="0" eaLnBrk="1" latinLnBrk="0" hangingPunct="1">
+              <a:lnSpc>
+                <a:spcPct val="90000"/>
+              </a:lnSpc>
+              <a:spcBef>
+                <a:spcPts val="500"/>
+              </a:spcBef>
+              <a:buFont typeface="Arial" panose="020B0604020202020204" pitchFamily="34" charset="0"/>
+              <a:buChar char="•"/>
+              <a:defRPr sz="1800" kern="1200">
+                <a:solidFill>
+                  <a:schemeClr val="tx1"/>
+                </a:solidFill>
+                <a:latin typeface="+mn-lt"/>
+                <a:ea typeface="+mn-ea"/>
+                <a:cs typeface="+mn-cs"/>
+              </a:defRPr>
+            </a:lvl4pPr>
+            <a:lvl5pPr marL="2057400" indent="-228600" algn="l" defTabSz="914400" rtl="0" eaLnBrk="1" latinLnBrk="0" hangingPunct="1">
+              <a:lnSpc>
+                <a:spcPct val="90000"/>
+              </a:lnSpc>
+              <a:spcBef>
+                <a:spcPts val="500"/>
+              </a:spcBef>
+              <a:buFont typeface="Arial" panose="020B0604020202020204" pitchFamily="34" charset="0"/>
+              <a:buChar char="•"/>
+              <a:defRPr sz="1800" kern="1200">
+                <a:solidFill>
+                  <a:schemeClr val="tx1"/>
+                </a:solidFill>
+                <a:latin typeface="+mn-lt"/>
+                <a:ea typeface="+mn-ea"/>
+                <a:cs typeface="+mn-cs"/>
+              </a:defRPr>
+            </a:lvl5pPr>
+            <a:lvl6pPr marL="2514600" indent="-228600" algn="l" defTabSz="914400" rtl="0" eaLnBrk="1" latinLnBrk="0" hangingPunct="1">
+              <a:lnSpc>
+                <a:spcPct val="90000"/>
+              </a:lnSpc>
+              <a:spcBef>
+                <a:spcPts val="500"/>
+              </a:spcBef>
+              <a:buFont typeface="Arial" panose="020B0604020202020204" pitchFamily="34" charset="0"/>
+              <a:buChar char="•"/>
+              <a:defRPr sz="1800" kern="1200">
+                <a:solidFill>
+                  <a:schemeClr val="tx1"/>
+                </a:solidFill>
+                <a:latin typeface="+mn-lt"/>
+                <a:ea typeface="+mn-ea"/>
+                <a:cs typeface="+mn-cs"/>
+              </a:defRPr>
+            </a:lvl6pPr>
+            <a:lvl7pPr marL="2971800" indent="-228600" algn="l" defTabSz="914400" rtl="0" eaLnBrk="1" latinLnBrk="0" hangingPunct="1">
+              <a:lnSpc>
+                <a:spcPct val="90000"/>
+              </a:lnSpc>
+              <a:spcBef>
+                <a:spcPts val="500"/>
+              </a:spcBef>
+              <a:buFont typeface="Arial" panose="020B0604020202020204" pitchFamily="34" charset="0"/>
+              <a:buChar char="•"/>
+              <a:defRPr sz="1800" kern="1200">
+                <a:solidFill>
+                  <a:schemeClr val="tx1"/>
+                </a:solidFill>
+                <a:latin typeface="+mn-lt"/>
+                <a:ea typeface="+mn-ea"/>
+                <a:cs typeface="+mn-cs"/>
+              </a:defRPr>
+            </a:lvl7pPr>
+            <a:lvl8pPr marL="3429000" indent="-228600" algn="l" defTabSz="914400" rtl="0" eaLnBrk="1" latinLnBrk="0" hangingPunct="1">
+              <a:lnSpc>
+                <a:spcPct val="90000"/>
+              </a:lnSpc>
+              <a:spcBef>
+                <a:spcPts val="500"/>
+              </a:spcBef>
+              <a:buFont typeface="Arial" panose="020B0604020202020204" pitchFamily="34" charset="0"/>
+              <a:buChar char="•"/>
+              <a:defRPr sz="1800" kern="1200">
+                <a:solidFill>
+                  <a:schemeClr val="tx1"/>
+                </a:solidFill>
+                <a:latin typeface="+mn-lt"/>
+                <a:ea typeface="+mn-ea"/>
+                <a:cs typeface="+mn-cs"/>
+              </a:defRPr>
+            </a:lvl8pPr>
+            <a:lvl9pPr marL="3886200" indent="-228600" algn="l" defTabSz="914400" rtl="0" eaLnBrk="1" latinLnBrk="0" hangingPunct="1">
+              <a:lnSpc>
+                <a:spcPct val="90000"/>
+              </a:lnSpc>
+              <a:spcBef>
+                <a:spcPts val="500"/>
+              </a:spcBef>
+              <a:buFont typeface="Arial" panose="020B0604020202020204" pitchFamily="34" charset="0"/>
+              <a:buChar char="•"/>
+              <a:defRPr sz="1800" kern="1200">
+                <a:solidFill>
+                  <a:schemeClr val="tx1"/>
+                </a:solidFill>
+                <a:latin typeface="+mn-lt"/>
+                <a:ea typeface="+mn-ea"/>
+                <a:cs typeface="+mn-cs"/>
+              </a:defRPr>
+            </a:lvl9pPr>
+          </a:lstStyle>
+          <a:p>
+            <a:pPr marL="0" indent="0" algn="just">
+              <a:buFont typeface="Arial" panose="020B0604020202020204" pitchFamily="34" charset="0"/>
+              <a:buNone/>
+            </a:pPr>
+            <a:r>
+              <a:rPr lang="ru-RU" sz="2200" b="1" dirty="0"/>
+              <a:t>Недостатки:</a:t>
+            </a:r>
+          </a:p>
+          <a:p>
+            <a:pPr algn="just"/>
+            <a:r>
+              <a:rPr lang="ru-RU" sz="2200" dirty="0"/>
+              <a:t>Т</a:t>
+            </a:r>
+            <a:r>
+              <a:rPr lang="en-US" sz="2200" dirty="0" err="1"/>
+              <a:t>ре</a:t>
+            </a:r>
+            <a:r>
+              <a:rPr lang="ru-RU" sz="2200" dirty="0" err="1"/>
+              <a:t>бует</a:t>
+            </a:r>
+            <a:r>
+              <a:rPr lang="ru-RU" sz="2200" dirty="0"/>
+              <a:t> много данных особенно для выучивания локальных связей. Дообучение под задачу обязательно</a:t>
+            </a:r>
+          </a:p>
+          <a:p>
+            <a:pPr algn="just"/>
+            <a:r>
+              <a:rPr lang="ru-RU" sz="2200" dirty="0"/>
+              <a:t>Избыточная сложность для коротких горизонтов и сравнительно простых ВР</a:t>
+            </a:r>
+          </a:p>
+          <a:p>
+            <a:pPr algn="just"/>
+            <a:r>
+              <a:rPr lang="ru-RU" sz="2200" dirty="0"/>
+              <a:t>Требуется опты настройки (патчи и </a:t>
+            </a:r>
+            <a:r>
+              <a:rPr lang="ru-RU" sz="2200" dirty="0" err="1"/>
+              <a:t>тд</a:t>
+            </a:r>
+            <a:r>
+              <a:rPr lang="ru-RU" sz="2200" dirty="0"/>
+              <a:t> особенно на очень больших объемах данных)</a:t>
+            </a:r>
+          </a:p>
+          <a:p>
+            <a:pPr algn="just"/>
+            <a:r>
+              <a:rPr lang="ru-RU" sz="2200" dirty="0"/>
+              <a:t>Внимание может дать артефакты особенно на коротких ВР</a:t>
+            </a:r>
+          </a:p>
+          <a:p>
+            <a:pPr algn="just"/>
+            <a:r>
+              <a:rPr lang="ru-RU" sz="2200" dirty="0"/>
+              <a:t>Требуется регулярность ВР. На ВР с явным трендом могут дать смещенную оценку</a:t>
+            </a:r>
+          </a:p>
+          <a:p>
+            <a:pPr algn="just"/>
+            <a:endParaRPr lang="ru-RU" sz="2200" dirty="0"/>
+          </a:p>
+          <a:p>
+            <a:pPr algn="just"/>
+            <a:endParaRPr lang="ru-RU" sz="2200" dirty="0"/>
+          </a:p>
+        </p:txBody>
+      </p:sp>
+      <p:sp>
+        <p:nvSpPr>
+          <p:cNvPr id="5" name="TextBox 4">
+            <a:extLst>
+              <a:ext uri="{FF2B5EF4-FFF2-40B4-BE49-F238E27FC236}">
+                <a16:creationId xmlns:a16="http://schemas.microsoft.com/office/drawing/2014/main" id="{0B4B01CE-81B0-6AC1-B1D5-77137FA6002E}"/>
+              </a:ext>
+            </a:extLst>
+          </p:cNvPr>
+          <p:cNvSpPr txBox="1"/>
+          <p:nvPr/>
+        </p:nvSpPr>
+        <p:spPr>
+          <a:xfrm>
+            <a:off x="5917503" y="6441601"/>
+            <a:ext cx="6093912" cy="369332"/>
+          </a:xfrm>
+          <a:prstGeom prst="rect">
+            <a:avLst/>
+          </a:prstGeom>
+          <a:noFill/>
+        </p:spPr>
+        <p:txBody>
+          <a:bodyPr wrap="square">
+            <a:spAutoFit/>
+          </a:bodyPr>
+          <a:lstStyle/>
+          <a:p>
+            <a:r>
+              <a:rPr lang="ru-RU" dirty="0" err="1"/>
+              <a:t>https</a:t>
+            </a:r>
+            <a:r>
+              <a:rPr lang="ru-RU" dirty="0"/>
+              <a:t>://</a:t>
+            </a:r>
+            <a:r>
+              <a:rPr lang="ru-RU" dirty="0" err="1"/>
+              <a:t>otexts.com</a:t>
+            </a:r>
+            <a:r>
+              <a:rPr lang="ru-RU" dirty="0"/>
+              <a:t>/</a:t>
+            </a:r>
+            <a:r>
+              <a:rPr lang="ru-RU" dirty="0" err="1"/>
+              <a:t>fpppy</a:t>
+            </a:r>
+            <a:r>
+              <a:rPr lang="ru-RU" dirty="0"/>
+              <a:t>/</a:t>
+            </a:r>
+            <a:r>
+              <a:rPr lang="ru-RU" dirty="0" err="1"/>
+              <a:t>nbs</a:t>
+            </a:r>
+            <a:r>
+              <a:rPr lang="ru-RU" dirty="0"/>
+              <a:t>/15-foundation-models.html</a:t>
+            </a:r>
+          </a:p>
+        </p:txBody>
+      </p:sp>
+    </p:spTree>
+    <p:extLst>
+      <p:ext uri="{BB962C8B-B14F-4D97-AF65-F5344CB8AC3E}">
+        <p14:creationId xmlns:p14="http://schemas.microsoft.com/office/powerpoint/2010/main" val="3906170084"/>
+      </p:ext>
+    </p:extLst>
+  </p:cSld>
+  <p:clrMapOvr>
+    <a:masterClrMapping/>
+  </p:clrMapOvr>
+  <p:timing>
+    <p:tnLst>
+      <p:par>
+        <p:cTn id="1" dur="indefinite" restart="never" nodeType="tmRoot"/>
+      </p:par>
+    </p:tnLst>
+  </p:timing>
+</p:sld>
+</file>
+
+<file path=ppt/slides/slide18.xml><?xml version="1.0" encoding="utf-8"?>
+<p:sld xmlns:a="http://schemas.openxmlformats.org/drawingml/2006/main" xmlns:r="http://schemas.openxmlformats.org/officeDocument/2006/relationships" xmlns:p="http://schemas.openxmlformats.org/presentationml/2006/main">
+  <p:cSld>
+    <p:spTree>
+      <p:nvGrpSpPr>
+        <p:cNvPr id="1" name=""/>
+        <p:cNvGrpSpPr/>
+        <p:nvPr/>
+      </p:nvGrpSpPr>
+      <p:grpSpPr>
+        <a:xfrm>
+          <a:off x="0" y="0"/>
+          <a:ext cx="0" cy="0"/>
+          <a:chOff x="0" y="0"/>
+          <a:chExt cx="0" cy="0"/>
+        </a:xfrm>
+      </p:grpSpPr>
+      <p:sp>
+        <p:nvSpPr>
+          <p:cNvPr id="2" name="Заголовок 1"/>
+          <p:cNvSpPr>
+            <a:spLocks noGrp="1"/>
+          </p:cNvSpPr>
+          <p:nvPr>
+            <p:ph type="title"/>
+          </p:nvPr>
+        </p:nvSpPr>
+        <p:spPr>
+          <a:xfrm>
+            <a:off x="189571" y="168752"/>
+            <a:ext cx="11164229" cy="749997"/>
+          </a:xfrm>
+        </p:spPr>
+        <p:txBody>
+          <a:bodyPr/>
+          <a:lstStyle/>
+          <a:p>
+            <a:r>
+              <a:rPr lang="ru-RU" dirty="0" smtClean="0"/>
+              <a:t>Некоторые модели </a:t>
+            </a:r>
+            <a:r>
+              <a:rPr lang="ru-RU" dirty="0" err="1" smtClean="0"/>
+              <a:t>трансформеры</a:t>
+            </a:r>
+            <a:endParaRPr lang="ru-RU" dirty="0"/>
+          </a:p>
+        </p:txBody>
+      </p:sp>
+      <p:graphicFrame>
+        <p:nvGraphicFramePr>
+          <p:cNvPr id="4" name="Объект 3"/>
+          <p:cNvGraphicFramePr>
+            <a:graphicFrameLocks noGrp="1"/>
+          </p:cNvGraphicFramePr>
+          <p:nvPr>
+            <p:ph idx="1"/>
+            <p:extLst>
+              <p:ext uri="{D42A27DB-BD31-4B8C-83A1-F6EECF244321}">
+                <p14:modId xmlns:p14="http://schemas.microsoft.com/office/powerpoint/2010/main" val="295142805"/>
+              </p:ext>
+            </p:extLst>
+          </p:nvPr>
+        </p:nvGraphicFramePr>
+        <p:xfrm>
+          <a:off x="189571" y="918749"/>
+          <a:ext cx="11654419" cy="5408962"/>
+        </p:xfrm>
+        <a:graphic>
+          <a:graphicData uri="http://schemas.openxmlformats.org/drawingml/2006/table">
+            <a:tbl>
+              <a:tblPr>
+                <a:tableStyleId>{5940675A-B579-460E-94D1-54222C63F5DA}</a:tableStyleId>
+              </a:tblPr>
+              <a:tblGrid>
+                <a:gridCol w="1474129">
+                  <a:extLst>
+                    <a:ext uri="{9D8B030D-6E8A-4147-A177-3AD203B41FA5}">
+                      <a16:colId xmlns:a16="http://schemas.microsoft.com/office/drawing/2014/main" val="3249311741"/>
+                    </a:ext>
+                  </a:extLst>
+                </a:gridCol>
+                <a:gridCol w="976838">
+                  <a:extLst>
+                    <a:ext uri="{9D8B030D-6E8A-4147-A177-3AD203B41FA5}">
+                      <a16:colId xmlns:a16="http://schemas.microsoft.com/office/drawing/2014/main" val="3305048369"/>
+                    </a:ext>
+                  </a:extLst>
+                </a:gridCol>
+                <a:gridCol w="1321862">
+                  <a:extLst>
+                    <a:ext uri="{9D8B030D-6E8A-4147-A177-3AD203B41FA5}">
+                      <a16:colId xmlns:a16="http://schemas.microsoft.com/office/drawing/2014/main" val="1989492488"/>
+                    </a:ext>
+                  </a:extLst>
+                </a:gridCol>
+                <a:gridCol w="4032506">
+                  <a:extLst>
+                    <a:ext uri="{9D8B030D-6E8A-4147-A177-3AD203B41FA5}">
+                      <a16:colId xmlns:a16="http://schemas.microsoft.com/office/drawing/2014/main" val="4075952491"/>
+                    </a:ext>
+                  </a:extLst>
+                </a:gridCol>
+                <a:gridCol w="3081262">
+                  <a:extLst>
+                    <a:ext uri="{9D8B030D-6E8A-4147-A177-3AD203B41FA5}">
+                      <a16:colId xmlns:a16="http://schemas.microsoft.com/office/drawing/2014/main" val="1485279407"/>
+                    </a:ext>
+                  </a:extLst>
+                </a:gridCol>
+                <a:gridCol w="767822">
+                  <a:extLst>
+                    <a:ext uri="{9D8B030D-6E8A-4147-A177-3AD203B41FA5}">
+                      <a16:colId xmlns:a16="http://schemas.microsoft.com/office/drawing/2014/main" val="1073697996"/>
+                    </a:ext>
+                  </a:extLst>
+                </a:gridCol>
+              </a:tblGrid>
+              <a:tr h="148576">
+                <a:tc>
+                  <a:txBody>
+                    <a:bodyPr/>
+                    <a:lstStyle/>
+                    <a:p>
+                      <a:r>
+                        <a:rPr lang="ru-RU" sz="2000" dirty="0"/>
+                        <a:t>Модель</a:t>
+                      </a:r>
+                    </a:p>
+                  </a:txBody>
+                  <a:tcPr marL="39201" marR="39201" marT="19601" marB="19601" anchor="ctr"/>
+                </a:tc>
+                <a:tc>
+                  <a:txBody>
+                    <a:bodyPr/>
+                    <a:lstStyle/>
+                    <a:p>
+                      <a:endParaRPr lang="ru-RU" sz="2000" dirty="0"/>
+                    </a:p>
+                  </a:txBody>
+                  <a:tcPr marL="39201" marR="39201" marT="19601" marB="19601" anchor="ctr"/>
+                </a:tc>
+                <a:tc>
+                  <a:txBody>
+                    <a:bodyPr/>
+                    <a:lstStyle/>
+                    <a:p>
+                      <a:r>
+                        <a:rPr lang="ru-RU" sz="2000" dirty="0" smtClean="0"/>
+                        <a:t>сложность</a:t>
+                      </a:r>
+                      <a:endParaRPr lang="ru-RU" sz="2000" dirty="0"/>
+                    </a:p>
+                  </a:txBody>
+                  <a:tcPr marL="39201" marR="39201" marT="19601" marB="19601" anchor="ctr"/>
+                </a:tc>
+                <a:tc>
+                  <a:txBody>
+                    <a:bodyPr/>
+                    <a:lstStyle/>
+                    <a:p>
+                      <a:r>
+                        <a:rPr lang="ru-RU" sz="2000" dirty="0"/>
+                        <a:t>Ключевые особенности</a:t>
+                      </a:r>
+                    </a:p>
+                  </a:txBody>
+                  <a:tcPr marL="39201" marR="39201" marT="19601" marB="19601" anchor="ctr"/>
+                </a:tc>
+                <a:tc>
+                  <a:txBody>
+                    <a:bodyPr/>
+                    <a:lstStyle/>
+                    <a:p>
+                      <a:r>
+                        <a:rPr lang="ru-RU" sz="2000" dirty="0"/>
+                        <a:t>Применение</a:t>
+                      </a:r>
+                    </a:p>
+                  </a:txBody>
+                  <a:tcPr marL="39201" marR="39201" marT="19601" marB="19601" anchor="ctr"/>
+                </a:tc>
+                <a:tc>
+                  <a:txBody>
+                    <a:bodyPr/>
+                    <a:lstStyle/>
+                    <a:p>
+                      <a:r>
+                        <a:rPr lang="ru-RU" sz="2000" dirty="0"/>
+                        <a:t>Год</a:t>
+                      </a:r>
+                    </a:p>
+                  </a:txBody>
+                  <a:tcPr marL="39201" marR="39201" marT="19601" marB="19601" anchor="ctr"/>
+                </a:tc>
+                <a:extLst>
+                  <a:ext uri="{0D108BD9-81ED-4DB2-BD59-A6C34878D82A}">
+                    <a16:rowId xmlns:a16="http://schemas.microsoft.com/office/drawing/2014/main" val="1286795480"/>
+                  </a:ext>
+                </a:extLst>
+              </a:tr>
+              <a:tr h="144612">
+                <a:tc>
+                  <a:txBody>
+                    <a:bodyPr/>
+                    <a:lstStyle/>
+                    <a:p>
+                      <a:r>
+                        <a:rPr lang="en-US" sz="2000" b="1" dirty="0"/>
+                        <a:t>Vanilla Transformer</a:t>
+                      </a:r>
+                      <a:endParaRPr lang="en-US" sz="2000" dirty="0"/>
+                    </a:p>
+                  </a:txBody>
+                  <a:tcPr marL="23521" marR="23521" marT="11760" marB="11760" anchor="ctr"/>
+                </a:tc>
+                <a:tc>
+                  <a:txBody>
+                    <a:bodyPr/>
+                    <a:lstStyle/>
+                    <a:p>
+                      <a:r>
+                        <a:rPr lang="en-US" sz="2000" dirty="0" smtClean="0"/>
+                        <a:t>Encoder-decoder</a:t>
+                      </a:r>
+                      <a:endParaRPr lang="en-US" sz="2000" dirty="0"/>
+                    </a:p>
+                  </a:txBody>
+                  <a:tcPr marL="23521" marR="23521" marT="11760" marB="11760" anchor="ctr"/>
+                </a:tc>
+                <a:tc>
+                  <a:txBody>
+                    <a:bodyPr/>
+                    <a:lstStyle/>
+                    <a:p>
+                      <a:r>
+                        <a:rPr lang="en-US" sz="2000" dirty="0"/>
+                        <a:t>O(N²)</a:t>
+                      </a:r>
+                    </a:p>
+                  </a:txBody>
+                  <a:tcPr marL="23521" marR="23521" marT="11760" marB="11760" anchor="ctr"/>
+                </a:tc>
+                <a:tc>
+                  <a:txBody>
+                    <a:bodyPr/>
+                    <a:lstStyle/>
+                    <a:p>
+                      <a:r>
+                        <a:rPr lang="ru-RU" sz="2000" dirty="0"/>
+                        <a:t>Стандартная архитектура </a:t>
+                      </a:r>
+                      <a:r>
+                        <a:rPr lang="ru-RU" sz="2000" dirty="0" err="1"/>
+                        <a:t>трансформера</a:t>
+                      </a:r>
+                      <a:endParaRPr lang="ru-RU" sz="2000" dirty="0"/>
+                    </a:p>
+                  </a:txBody>
+                  <a:tcPr marL="23521" marR="23521" marT="11760" marB="11760" anchor="ctr"/>
+                </a:tc>
+                <a:tc>
+                  <a:txBody>
+                    <a:bodyPr/>
+                    <a:lstStyle/>
+                    <a:p>
+                      <a:r>
+                        <a:rPr lang="en-US" sz="2000" dirty="0" smtClean="0"/>
+                        <a:t>Base</a:t>
+                      </a:r>
+                      <a:r>
+                        <a:rPr lang="en-US" sz="2000" baseline="0" dirty="0" smtClean="0"/>
+                        <a:t> line</a:t>
+                      </a:r>
+                      <a:endParaRPr lang="ru-RU" sz="2000" dirty="0"/>
+                    </a:p>
+                  </a:txBody>
+                  <a:tcPr marL="23521" marR="23521" marT="11760" marB="11760" anchor="ctr"/>
+                </a:tc>
+                <a:tc>
+                  <a:txBody>
+                    <a:bodyPr/>
+                    <a:lstStyle/>
+                    <a:p>
+                      <a:r>
+                        <a:rPr lang="ru-RU" sz="2000" dirty="0"/>
+                        <a:t>2017</a:t>
+                      </a:r>
+                    </a:p>
+                  </a:txBody>
+                  <a:tcPr marL="23521" marR="23521" marT="11760" marB="11760" anchor="ctr"/>
+                </a:tc>
+                <a:extLst>
+                  <a:ext uri="{0D108BD9-81ED-4DB2-BD59-A6C34878D82A}">
+                    <a16:rowId xmlns:a16="http://schemas.microsoft.com/office/drawing/2014/main" val="520311545"/>
+                  </a:ext>
+                </a:extLst>
+              </a:tr>
+              <a:tr h="75278">
+                <a:tc>
+                  <a:txBody>
+                    <a:bodyPr/>
+                    <a:lstStyle/>
+                    <a:p>
+                      <a:r>
+                        <a:rPr lang="en-US" sz="2000" b="1" dirty="0" smtClean="0"/>
+                        <a:t>TFT</a:t>
+                      </a:r>
+                      <a:endParaRPr lang="en-US" sz="2000" b="1" dirty="0"/>
+                    </a:p>
+                  </a:txBody>
+                  <a:tcPr marL="23521" marR="23521" marT="11760" marB="11760" anchor="ctr"/>
+                </a:tc>
+                <a:tc>
+                  <a:txBody>
+                    <a:bodyPr/>
+                    <a:lstStyle/>
+                    <a:p>
+                      <a:pPr marL="0" marR="0" indent="0" algn="l" defTabSz="914400" rtl="0" eaLnBrk="1" fontAlgn="auto" latinLnBrk="0" hangingPunct="1">
+                        <a:lnSpc>
+                          <a:spcPct val="100000"/>
+                        </a:lnSpc>
+                        <a:spcBef>
+                          <a:spcPts val="0"/>
+                        </a:spcBef>
+                        <a:spcAft>
+                          <a:spcPts val="0"/>
+                        </a:spcAft>
+                        <a:buClrTx/>
+                        <a:buSzTx/>
+                        <a:buFontTx/>
+                        <a:buNone/>
+                        <a:tabLst/>
+                        <a:defRPr/>
+                      </a:pPr>
+                      <a:r>
+                        <a:rPr lang="en-US" sz="2000" dirty="0" smtClean="0"/>
+                        <a:t>Encoder-decoder</a:t>
+                      </a:r>
+                    </a:p>
+                  </a:txBody>
+                  <a:tcPr marL="23521" marR="23521" marT="11760" marB="11760" anchor="ctr"/>
+                </a:tc>
+                <a:tc>
+                  <a:txBody>
+                    <a:bodyPr/>
+                    <a:lstStyle/>
+                    <a:p>
+                      <a:pPr marL="0" marR="0" indent="0" algn="l" defTabSz="914400" rtl="0" eaLnBrk="1" fontAlgn="auto" latinLnBrk="0" hangingPunct="1">
+                        <a:lnSpc>
+                          <a:spcPct val="100000"/>
+                        </a:lnSpc>
+                        <a:spcBef>
+                          <a:spcPts val="0"/>
+                        </a:spcBef>
+                        <a:spcAft>
+                          <a:spcPts val="0"/>
+                        </a:spcAft>
+                        <a:buClrTx/>
+                        <a:buSzTx/>
+                        <a:buFontTx/>
+                        <a:buNone/>
+                        <a:tabLst/>
+                        <a:defRPr/>
+                      </a:pPr>
+                      <a:r>
+                        <a:rPr lang="en-US" sz="2000" dirty="0" smtClean="0"/>
+                        <a:t>O(N²)</a:t>
+                      </a:r>
+                    </a:p>
+                  </a:txBody>
+                  <a:tcPr marL="23521" marR="23521" marT="11760" marB="11760" anchor="ctr"/>
+                </a:tc>
+                <a:tc>
+                  <a:txBody>
+                    <a:bodyPr/>
+                    <a:lstStyle/>
+                    <a:p>
+                      <a:r>
+                        <a:rPr lang="ru-RU" sz="2000" b="0" i="0" kern="1200" dirty="0" smtClean="0">
+                          <a:solidFill>
+                            <a:schemeClr val="tx1"/>
+                          </a:solidFill>
+                          <a:effectLst/>
+                          <a:latin typeface="+mn-lt"/>
+                          <a:ea typeface="+mn-ea"/>
+                          <a:cs typeface="+mn-cs"/>
+                        </a:rPr>
+                        <a:t>рекуррентные сети + </a:t>
+                      </a:r>
+                      <a:r>
+                        <a:rPr lang="ru-RU" sz="2000" b="0" i="0" kern="1200" dirty="0" err="1" smtClean="0">
+                          <a:solidFill>
+                            <a:schemeClr val="tx1"/>
+                          </a:solidFill>
+                          <a:effectLst/>
+                          <a:latin typeface="+mn-lt"/>
+                          <a:ea typeface="+mn-ea"/>
+                          <a:cs typeface="+mn-cs"/>
+                        </a:rPr>
+                        <a:t>трансформер</a:t>
+                      </a:r>
+                      <a:r>
+                        <a:rPr lang="en-US" sz="2000" b="0" i="0" kern="1200" dirty="0" smtClean="0">
+                          <a:solidFill>
+                            <a:schemeClr val="tx1"/>
+                          </a:solidFill>
+                          <a:effectLst/>
+                          <a:latin typeface="+mn-lt"/>
+                          <a:ea typeface="+mn-ea"/>
+                          <a:cs typeface="+mn-cs"/>
+                        </a:rPr>
+                        <a:t>,</a:t>
+                      </a:r>
+                      <a:r>
+                        <a:rPr lang="en-US" sz="2000" b="0" i="0" kern="1200" baseline="0" dirty="0" smtClean="0">
+                          <a:solidFill>
+                            <a:schemeClr val="tx1"/>
+                          </a:solidFill>
+                          <a:effectLst/>
+                          <a:latin typeface="+mn-lt"/>
+                          <a:ea typeface="+mn-ea"/>
+                          <a:cs typeface="+mn-cs"/>
+                        </a:rPr>
+                        <a:t> </a:t>
+                      </a:r>
+                      <a:r>
+                        <a:rPr lang="ru-RU" sz="2000" b="0" i="0" kern="1200" baseline="0" dirty="0" smtClean="0">
+                          <a:solidFill>
+                            <a:schemeClr val="tx1"/>
+                          </a:solidFill>
+                          <a:effectLst/>
+                          <a:latin typeface="+mn-lt"/>
+                          <a:ea typeface="+mn-ea"/>
+                          <a:cs typeface="+mn-cs"/>
+                        </a:rPr>
+                        <a:t>интерпретация</a:t>
+                      </a:r>
+                      <a:endParaRPr lang="ru-RU" sz="2000" dirty="0"/>
+                    </a:p>
+                  </a:txBody>
+                  <a:tcPr marL="23521" marR="23521" marT="11760" marB="11760" anchor="ctr"/>
+                </a:tc>
+                <a:tc>
+                  <a:txBody>
+                    <a:bodyPr/>
+                    <a:lstStyle/>
+                    <a:p>
+                      <a:pPr marL="0" marR="0" indent="0" algn="l" defTabSz="914400" rtl="0" eaLnBrk="1" fontAlgn="auto" latinLnBrk="0" hangingPunct="1">
+                        <a:lnSpc>
+                          <a:spcPct val="100000"/>
+                        </a:lnSpc>
+                        <a:spcBef>
+                          <a:spcPts val="0"/>
+                        </a:spcBef>
+                        <a:spcAft>
+                          <a:spcPts val="0"/>
+                        </a:spcAft>
+                        <a:buClrTx/>
+                        <a:buSzTx/>
+                        <a:buFontTx/>
+                        <a:buNone/>
+                        <a:tabLst/>
+                        <a:defRPr/>
+                      </a:pPr>
+                      <a:r>
+                        <a:rPr lang="en-US" sz="2000" dirty="0" err="1" smtClean="0"/>
+                        <a:t>Heterogen</a:t>
+                      </a:r>
+                      <a:r>
+                        <a:rPr lang="en-US" sz="2000" dirty="0" smtClean="0"/>
+                        <a:t> data</a:t>
+                      </a:r>
+                      <a:r>
+                        <a:rPr lang="en-US" sz="2000" baseline="0" dirty="0" smtClean="0"/>
+                        <a:t>, </a:t>
+                      </a:r>
+                      <a:r>
+                        <a:rPr lang="en-US" sz="2000" baseline="0" dirty="0" err="1" smtClean="0"/>
+                        <a:t>exogen</a:t>
+                      </a:r>
+                      <a:endParaRPr lang="ru-RU" sz="2000" dirty="0" smtClean="0"/>
+                    </a:p>
+                  </a:txBody>
+                  <a:tcPr marL="23521" marR="23521" marT="11760" marB="11760" anchor="ctr"/>
+                </a:tc>
+                <a:tc>
+                  <a:txBody>
+                    <a:bodyPr/>
+                    <a:lstStyle/>
+                    <a:p>
+                      <a:r>
+                        <a:rPr lang="en-US" sz="2000" dirty="0" smtClean="0"/>
+                        <a:t>2022</a:t>
+                      </a:r>
+                      <a:endParaRPr lang="ru-RU" sz="2000" dirty="0"/>
+                    </a:p>
+                  </a:txBody>
+                  <a:tcPr marL="23521" marR="23521" marT="11760" marB="11760" anchor="ctr"/>
+                </a:tc>
+                <a:extLst>
+                  <a:ext uri="{0D108BD9-81ED-4DB2-BD59-A6C34878D82A}">
+                    <a16:rowId xmlns:a16="http://schemas.microsoft.com/office/drawing/2014/main" val="1960122855"/>
+                  </a:ext>
+                </a:extLst>
+              </a:tr>
+              <a:tr h="75278">
+                <a:tc>
+                  <a:txBody>
+                    <a:bodyPr/>
+                    <a:lstStyle/>
+                    <a:p>
+                      <a:r>
+                        <a:rPr lang="en-US" sz="2000" b="1" dirty="0"/>
+                        <a:t>Informer</a:t>
+                      </a:r>
+                      <a:endParaRPr lang="en-US" sz="2000" dirty="0"/>
+                    </a:p>
+                  </a:txBody>
+                  <a:tcPr marL="23521" marR="23521" marT="11760" marB="11760" anchor="ctr"/>
+                </a:tc>
+                <a:tc>
+                  <a:txBody>
+                    <a:bodyPr/>
+                    <a:lstStyle/>
+                    <a:p>
+                      <a:pPr marL="0" marR="0" indent="0" algn="l" defTabSz="914400" rtl="0" eaLnBrk="1" fontAlgn="auto" latinLnBrk="0" hangingPunct="1">
+                        <a:lnSpc>
+                          <a:spcPct val="100000"/>
+                        </a:lnSpc>
+                        <a:spcBef>
+                          <a:spcPts val="0"/>
+                        </a:spcBef>
+                        <a:spcAft>
+                          <a:spcPts val="0"/>
+                        </a:spcAft>
+                        <a:buClrTx/>
+                        <a:buSzTx/>
+                        <a:buFontTx/>
+                        <a:buNone/>
+                        <a:tabLst/>
+                        <a:defRPr/>
+                      </a:pPr>
+                      <a:r>
+                        <a:rPr lang="en-US" sz="2000" dirty="0" smtClean="0"/>
+                        <a:t>Encoder-decoder</a:t>
+                      </a:r>
+                    </a:p>
+                  </a:txBody>
+                  <a:tcPr marL="23521" marR="23521" marT="11760" marB="11760" anchor="ctr"/>
+                </a:tc>
+                <a:tc>
+                  <a:txBody>
+                    <a:bodyPr/>
+                    <a:lstStyle/>
+                    <a:p>
+                      <a:r>
+                        <a:rPr lang="en-US" sz="2000" dirty="0"/>
+                        <a:t>O(N log N)</a:t>
+                      </a:r>
+                    </a:p>
+                  </a:txBody>
+                  <a:tcPr marL="23521" marR="23521" marT="11760" marB="11760" anchor="ctr"/>
+                </a:tc>
+                <a:tc>
+                  <a:txBody>
+                    <a:bodyPr/>
+                    <a:lstStyle/>
+                    <a:p>
+                      <a:r>
+                        <a:rPr lang="en-US" sz="2000" dirty="0" err="1"/>
+                        <a:t>ProbSparse</a:t>
+                      </a:r>
+                      <a:r>
+                        <a:rPr lang="en-US" sz="2000" dirty="0"/>
+                        <a:t> </a:t>
+                      </a:r>
+                      <a:r>
+                        <a:rPr lang="ru-RU" sz="2000" dirty="0"/>
+                        <a:t>внимание, генеративный декодер</a:t>
+                      </a:r>
+                    </a:p>
+                  </a:txBody>
+                  <a:tcPr marL="23521" marR="23521" marT="11760" marB="11760" anchor="ctr"/>
+                </a:tc>
+                <a:tc>
+                  <a:txBody>
+                    <a:bodyPr/>
+                    <a:lstStyle/>
+                    <a:p>
+                      <a:pPr marL="0" marR="0" indent="0" algn="l" defTabSz="914400" rtl="0" eaLnBrk="1" fontAlgn="auto" latinLnBrk="0" hangingPunct="1">
+                        <a:lnSpc>
+                          <a:spcPct val="100000"/>
+                        </a:lnSpc>
+                        <a:spcBef>
+                          <a:spcPts val="0"/>
+                        </a:spcBef>
+                        <a:spcAft>
+                          <a:spcPts val="0"/>
+                        </a:spcAft>
+                        <a:buClrTx/>
+                        <a:buSzTx/>
+                        <a:buFontTx/>
+                        <a:buNone/>
+                        <a:tabLst/>
+                        <a:defRPr/>
+                      </a:pPr>
+                      <a:r>
+                        <a:rPr lang="en-US" sz="2000" dirty="0" smtClean="0"/>
+                        <a:t>Long</a:t>
+                      </a:r>
+                      <a:r>
+                        <a:rPr lang="en-US" sz="2000" baseline="0" dirty="0" smtClean="0"/>
+                        <a:t> horizon, low </a:t>
+                      </a:r>
+                      <a:r>
+                        <a:rPr lang="en-US" sz="2000" baseline="0" dirty="0" err="1" smtClean="0"/>
+                        <a:t>comput</a:t>
+                      </a:r>
+                      <a:r>
+                        <a:rPr lang="en-US" sz="2000" baseline="0" dirty="0" smtClean="0"/>
+                        <a:t>. require</a:t>
+                      </a:r>
+                      <a:endParaRPr lang="ru-RU" sz="2000" dirty="0" smtClean="0"/>
+                    </a:p>
+                  </a:txBody>
+                  <a:tcPr marL="23521" marR="23521" marT="11760" marB="11760" anchor="ctr"/>
+                </a:tc>
+                <a:tc>
+                  <a:txBody>
+                    <a:bodyPr/>
+                    <a:lstStyle/>
+                    <a:p>
+                      <a:r>
+                        <a:rPr lang="ru-RU" sz="2000" dirty="0"/>
+                        <a:t>2021</a:t>
+                      </a:r>
+                    </a:p>
+                  </a:txBody>
+                  <a:tcPr marL="23521" marR="23521" marT="11760" marB="11760" anchor="ctr"/>
+                </a:tc>
+                <a:extLst>
+                  <a:ext uri="{0D108BD9-81ED-4DB2-BD59-A6C34878D82A}">
+                    <a16:rowId xmlns:a16="http://schemas.microsoft.com/office/drawing/2014/main" val="308783238"/>
+                  </a:ext>
+                </a:extLst>
+              </a:tr>
+              <a:tr h="75278">
+                <a:tc>
+                  <a:txBody>
+                    <a:bodyPr/>
+                    <a:lstStyle/>
+                    <a:p>
+                      <a:r>
+                        <a:rPr lang="en-US" sz="2000" b="1" dirty="0" err="1"/>
+                        <a:t>Autoformer</a:t>
+                      </a:r>
+                      <a:endParaRPr lang="en-US" sz="2000" dirty="0"/>
+                    </a:p>
+                  </a:txBody>
+                  <a:tcPr marL="23521" marR="23521" marT="11760" marB="11760" anchor="ctr"/>
+                </a:tc>
+                <a:tc>
+                  <a:txBody>
+                    <a:bodyPr/>
+                    <a:lstStyle/>
+                    <a:p>
+                      <a:pPr marL="0" marR="0" indent="0" algn="l" defTabSz="914400" rtl="0" eaLnBrk="1" fontAlgn="auto" latinLnBrk="0" hangingPunct="1">
+                        <a:lnSpc>
+                          <a:spcPct val="100000"/>
+                        </a:lnSpc>
+                        <a:spcBef>
+                          <a:spcPts val="0"/>
+                        </a:spcBef>
+                        <a:spcAft>
+                          <a:spcPts val="0"/>
+                        </a:spcAft>
+                        <a:buClrTx/>
+                        <a:buSzTx/>
+                        <a:buFontTx/>
+                        <a:buNone/>
+                        <a:tabLst/>
+                        <a:defRPr/>
+                      </a:pPr>
+                      <a:r>
+                        <a:rPr lang="en-US" sz="2000" dirty="0" smtClean="0"/>
+                        <a:t>Encoder-decoder</a:t>
+                      </a:r>
+                    </a:p>
+                  </a:txBody>
+                  <a:tcPr marL="23521" marR="23521" marT="11760" marB="11760" anchor="ctr"/>
+                </a:tc>
+                <a:tc>
+                  <a:txBody>
+                    <a:bodyPr/>
+                    <a:lstStyle/>
+                    <a:p>
+                      <a:r>
+                        <a:rPr lang="en-US" sz="2000" dirty="0"/>
+                        <a:t>O(N log N)</a:t>
+                      </a:r>
+                    </a:p>
+                  </a:txBody>
+                  <a:tcPr marL="23521" marR="23521" marT="11760" marB="11760" anchor="ctr"/>
+                </a:tc>
+                <a:tc>
+                  <a:txBody>
+                    <a:bodyPr/>
+                    <a:lstStyle/>
+                    <a:p>
+                      <a:r>
+                        <a:rPr lang="ru-RU" sz="2000" dirty="0"/>
+                        <a:t>Авто-корреляция, декомпозиция сезон-тренд</a:t>
+                      </a:r>
+                    </a:p>
+                  </a:txBody>
+                  <a:tcPr marL="23521" marR="23521" marT="11760" marB="11760" anchor="ctr"/>
+                </a:tc>
+                <a:tc>
+                  <a:txBody>
+                    <a:bodyPr/>
+                    <a:lstStyle/>
+                    <a:p>
+                      <a:pPr marL="0" marR="0" indent="0" algn="l" defTabSz="914400" rtl="0" eaLnBrk="1" fontAlgn="auto" latinLnBrk="0" hangingPunct="1">
+                        <a:lnSpc>
+                          <a:spcPct val="100000"/>
+                        </a:lnSpc>
+                        <a:spcBef>
+                          <a:spcPts val="0"/>
+                        </a:spcBef>
+                        <a:spcAft>
+                          <a:spcPts val="0"/>
+                        </a:spcAft>
+                        <a:buClrTx/>
+                        <a:buSzTx/>
+                        <a:buFontTx/>
+                        <a:buNone/>
+                        <a:tabLst/>
+                        <a:defRPr/>
+                      </a:pPr>
+                      <a:r>
+                        <a:rPr lang="en-US" sz="2000" dirty="0" smtClean="0"/>
+                        <a:t>Long</a:t>
+                      </a:r>
+                      <a:r>
+                        <a:rPr lang="en-US" sz="2000" baseline="0" dirty="0" smtClean="0"/>
+                        <a:t> horizon, complex patterns</a:t>
+                      </a:r>
+                      <a:endParaRPr lang="ru-RU" sz="2000" dirty="0" smtClean="0"/>
+                    </a:p>
+                  </a:txBody>
+                  <a:tcPr marL="23521" marR="23521" marT="11760" marB="11760" anchor="ctr"/>
+                </a:tc>
+                <a:tc>
+                  <a:txBody>
+                    <a:bodyPr/>
+                    <a:lstStyle/>
+                    <a:p>
+                      <a:r>
+                        <a:rPr lang="ru-RU" sz="2000" dirty="0"/>
+                        <a:t>2021</a:t>
+                      </a:r>
+                    </a:p>
+                  </a:txBody>
+                  <a:tcPr marL="23521" marR="23521" marT="11760" marB="11760" anchor="ctr"/>
+                </a:tc>
+                <a:extLst>
+                  <a:ext uri="{0D108BD9-81ED-4DB2-BD59-A6C34878D82A}">
+                    <a16:rowId xmlns:a16="http://schemas.microsoft.com/office/drawing/2014/main" val="3704454812"/>
+                  </a:ext>
+                </a:extLst>
+              </a:tr>
+              <a:tr h="144612">
+                <a:tc>
+                  <a:txBody>
+                    <a:bodyPr/>
+                    <a:lstStyle/>
+                    <a:p>
+                      <a:r>
+                        <a:rPr lang="en-US" sz="2000" b="1" dirty="0" err="1"/>
+                        <a:t>PatchTST</a:t>
+                      </a:r>
+                      <a:endParaRPr lang="en-US" sz="2000" dirty="0"/>
+                    </a:p>
+                  </a:txBody>
+                  <a:tcPr marL="23521" marR="23521" marT="11760" marB="11760" anchor="ctr"/>
+                </a:tc>
+                <a:tc>
+                  <a:txBody>
+                    <a:bodyPr/>
+                    <a:lstStyle/>
+                    <a:p>
+                      <a:r>
+                        <a:rPr lang="en-US" sz="2000" dirty="0" smtClean="0"/>
+                        <a:t>Encoder</a:t>
+                      </a:r>
+                      <a:endParaRPr lang="en-US" sz="2000" dirty="0"/>
+                    </a:p>
+                  </a:txBody>
+                  <a:tcPr marL="23521" marR="23521" marT="11760" marB="11760" anchor="ctr"/>
+                </a:tc>
+                <a:tc>
+                  <a:txBody>
+                    <a:bodyPr/>
+                    <a:lstStyle/>
+                    <a:p>
+                      <a:r>
+                        <a:rPr lang="en-US" sz="2000" dirty="0"/>
+                        <a:t>O(N)</a:t>
+                      </a:r>
+                    </a:p>
+                  </a:txBody>
+                  <a:tcPr marL="23521" marR="23521" marT="11760" marB="11760" anchor="ctr"/>
+                </a:tc>
+                <a:tc>
+                  <a:txBody>
+                    <a:bodyPr/>
+                    <a:lstStyle/>
+                    <a:p>
+                      <a:r>
+                        <a:rPr lang="ru-RU" sz="2000" dirty="0" err="1"/>
+                        <a:t>Патч</a:t>
+                      </a:r>
+                      <a:r>
+                        <a:rPr lang="ru-RU" sz="2000" dirty="0"/>
+                        <a:t>-сегментация, канально-независимое обучение</a:t>
+                      </a:r>
+                    </a:p>
+                  </a:txBody>
+                  <a:tcPr marL="23521" marR="23521" marT="11760" marB="11760" anchor="ctr"/>
+                </a:tc>
+                <a:tc>
+                  <a:txBody>
+                    <a:bodyPr/>
+                    <a:lstStyle/>
+                    <a:p>
+                      <a:pPr marL="0" marR="0" indent="0" algn="l" defTabSz="914400" rtl="0" eaLnBrk="1" fontAlgn="auto" latinLnBrk="0" hangingPunct="1">
+                        <a:lnSpc>
+                          <a:spcPct val="100000"/>
+                        </a:lnSpc>
+                        <a:spcBef>
+                          <a:spcPts val="0"/>
+                        </a:spcBef>
+                        <a:spcAft>
+                          <a:spcPts val="0"/>
+                        </a:spcAft>
+                        <a:buClrTx/>
+                        <a:buSzTx/>
+                        <a:buFontTx/>
+                        <a:buNone/>
+                        <a:tabLst/>
+                        <a:defRPr/>
+                      </a:pPr>
+                      <a:r>
+                        <a:rPr lang="en-US" sz="2000" dirty="0" smtClean="0"/>
+                        <a:t>Long</a:t>
+                      </a:r>
+                      <a:r>
+                        <a:rPr lang="en-US" sz="2000" baseline="0" dirty="0" smtClean="0"/>
+                        <a:t> horizon, multivariate</a:t>
+                      </a:r>
+                      <a:endParaRPr lang="ru-RU" sz="2000" dirty="0" smtClean="0"/>
+                    </a:p>
+                  </a:txBody>
+                  <a:tcPr marL="23521" marR="23521" marT="11760" marB="11760" anchor="ctr"/>
+                </a:tc>
+                <a:tc>
+                  <a:txBody>
+                    <a:bodyPr/>
+                    <a:lstStyle/>
+                    <a:p>
+                      <a:r>
+                        <a:rPr lang="ru-RU" sz="2000" dirty="0"/>
+                        <a:t>2023</a:t>
+                      </a:r>
+                    </a:p>
+                  </a:txBody>
+                  <a:tcPr marL="23521" marR="23521" marT="11760" marB="11760" anchor="ctr"/>
+                </a:tc>
+                <a:extLst>
+                  <a:ext uri="{0D108BD9-81ED-4DB2-BD59-A6C34878D82A}">
+                    <a16:rowId xmlns:a16="http://schemas.microsoft.com/office/drawing/2014/main" val="3302619383"/>
+                  </a:ext>
+                </a:extLst>
+              </a:tr>
+              <a:tr h="144612">
+                <a:tc>
+                  <a:txBody>
+                    <a:bodyPr/>
+                    <a:lstStyle/>
+                    <a:p>
+                      <a:r>
+                        <a:rPr lang="en-US" sz="2000" b="1" dirty="0" err="1"/>
+                        <a:t>iTransformer</a:t>
+                      </a:r>
+                      <a:endParaRPr lang="en-US" sz="2000" dirty="0"/>
+                    </a:p>
+                  </a:txBody>
+                  <a:tcPr marL="23521" marR="23521" marT="11760" marB="11760" anchor="ctr"/>
+                </a:tc>
+                <a:tc>
+                  <a:txBody>
+                    <a:bodyPr/>
+                    <a:lstStyle/>
+                    <a:p>
+                      <a:r>
+                        <a:rPr lang="en-US" sz="2000" dirty="0" smtClean="0"/>
+                        <a:t>Encoder</a:t>
+                      </a:r>
+                      <a:endParaRPr lang="en-US" sz="2000" dirty="0"/>
+                    </a:p>
+                  </a:txBody>
+                  <a:tcPr marL="23521" marR="23521" marT="11760" marB="11760" anchor="ctr"/>
+                </a:tc>
+                <a:tc>
+                  <a:txBody>
+                    <a:bodyPr/>
+                    <a:lstStyle/>
+                    <a:p>
+                      <a:r>
+                        <a:rPr lang="en-US" sz="2000" dirty="0" smtClean="0"/>
+                        <a:t>O(N²)</a:t>
+                      </a:r>
+                      <a:endParaRPr lang="en-US" sz="2000" dirty="0"/>
+                    </a:p>
+                  </a:txBody>
+                  <a:tcPr marL="23521" marR="23521" marT="11760" marB="11760" anchor="ctr"/>
+                </a:tc>
+                <a:tc>
+                  <a:txBody>
+                    <a:bodyPr/>
+                    <a:lstStyle/>
+                    <a:p>
+                      <a:r>
+                        <a:rPr lang="ru-RU" sz="2000" dirty="0"/>
+                        <a:t>Инвертированная архитектура, переменные как </a:t>
+                      </a:r>
+                      <a:r>
+                        <a:rPr lang="ru-RU" sz="2000" dirty="0" err="1" smtClean="0"/>
+                        <a:t>патчи</a:t>
+                      </a:r>
+                      <a:endParaRPr lang="ru-RU" sz="2000" dirty="0"/>
+                    </a:p>
+                  </a:txBody>
+                  <a:tcPr marL="23521" marR="23521" marT="11760" marB="11760" anchor="ctr"/>
+                </a:tc>
+                <a:tc>
+                  <a:txBody>
+                    <a:bodyPr/>
+                    <a:lstStyle/>
+                    <a:p>
+                      <a:r>
+                        <a:rPr lang="ru-RU" sz="2000" dirty="0"/>
+                        <a:t>Многомерное прогнозирование</a:t>
+                      </a:r>
+                    </a:p>
+                  </a:txBody>
+                  <a:tcPr marL="23521" marR="23521" marT="11760" marB="11760" anchor="ctr"/>
+                </a:tc>
+                <a:tc>
+                  <a:txBody>
+                    <a:bodyPr/>
+                    <a:lstStyle/>
+                    <a:p>
+                      <a:r>
+                        <a:rPr lang="ru-RU" sz="2000" dirty="0"/>
+                        <a:t>2024</a:t>
+                      </a:r>
+                    </a:p>
+                  </a:txBody>
+                  <a:tcPr marL="23521" marR="23521" marT="11760" marB="11760" anchor="ctr"/>
+                </a:tc>
+                <a:extLst>
+                  <a:ext uri="{0D108BD9-81ED-4DB2-BD59-A6C34878D82A}">
+                    <a16:rowId xmlns:a16="http://schemas.microsoft.com/office/drawing/2014/main" val="3557155647"/>
+                  </a:ext>
+                </a:extLst>
+              </a:tr>
+              <a:tr h="144612">
+                <a:tc>
+                  <a:txBody>
+                    <a:bodyPr/>
+                    <a:lstStyle/>
+                    <a:p>
+                      <a:r>
+                        <a:rPr lang="en-US" sz="2000" b="1" dirty="0" err="1"/>
+                        <a:t>TimeMixer</a:t>
+                      </a:r>
+                      <a:endParaRPr lang="en-US" sz="2000" dirty="0"/>
+                    </a:p>
+                  </a:txBody>
+                  <a:tcPr marL="23521" marR="23521" marT="11760" marB="11760" anchor="ctr"/>
+                </a:tc>
+                <a:tc>
+                  <a:txBody>
+                    <a:bodyPr/>
+                    <a:lstStyle/>
+                    <a:p>
+                      <a:r>
+                        <a:rPr lang="en-US" sz="2000" dirty="0" smtClean="0"/>
+                        <a:t>Mixer Encoder</a:t>
+                      </a:r>
+                      <a:endParaRPr lang="en-US" sz="2000" dirty="0"/>
+                    </a:p>
+                  </a:txBody>
+                  <a:tcPr marL="23521" marR="23521" marT="11760" marB="11760" anchor="ctr"/>
+                </a:tc>
+                <a:tc>
+                  <a:txBody>
+                    <a:bodyPr/>
+                    <a:lstStyle/>
+                    <a:p>
+                      <a:r>
+                        <a:rPr lang="en-US" sz="2000" dirty="0"/>
+                        <a:t>O(N)</a:t>
+                      </a:r>
+                    </a:p>
+                  </a:txBody>
+                  <a:tcPr marL="23521" marR="23521" marT="11760" marB="11760" anchor="ctr"/>
+                </a:tc>
+                <a:tc>
+                  <a:txBody>
+                    <a:bodyPr/>
+                    <a:lstStyle/>
+                    <a:p>
+                      <a:r>
+                        <a:rPr lang="ru-RU" sz="2000" dirty="0"/>
+                        <a:t>Декомпозируемое многомасштабное </a:t>
+                      </a:r>
+                      <a:r>
+                        <a:rPr lang="ru-RU" sz="2000" dirty="0" smtClean="0"/>
+                        <a:t>смешивание</a:t>
+                      </a:r>
+                      <a:r>
+                        <a:rPr lang="en-US" sz="2000" dirty="0" smtClean="0"/>
+                        <a:t> (</a:t>
+                      </a:r>
+                      <a:r>
+                        <a:rPr lang="ru-RU" sz="2000" b="1" dirty="0" smtClean="0"/>
+                        <a:t>Миксер</a:t>
+                      </a:r>
+                      <a:r>
+                        <a:rPr lang="ru-RU" sz="2000" b="1" baseline="0" dirty="0" smtClean="0"/>
+                        <a:t>, не </a:t>
+                      </a:r>
+                      <a:r>
+                        <a:rPr lang="ru-RU" sz="2000" b="1" baseline="0" dirty="0" err="1" smtClean="0"/>
+                        <a:t>трансформер</a:t>
+                      </a:r>
+                      <a:r>
+                        <a:rPr lang="ru-RU" sz="2000" baseline="0" dirty="0" smtClean="0"/>
+                        <a:t>!)</a:t>
+                      </a:r>
+                      <a:endParaRPr lang="ru-RU" sz="2000" dirty="0"/>
+                    </a:p>
+                  </a:txBody>
+                  <a:tcPr marL="23521" marR="23521" marT="11760" marB="11760" anchor="ctr"/>
+                </a:tc>
+                <a:tc>
+                  <a:txBody>
+                    <a:bodyPr/>
+                    <a:lstStyle/>
+                    <a:p>
+                      <a:r>
+                        <a:rPr lang="ru-RU" sz="2000" dirty="0"/>
+                        <a:t>Универсальный анализ временных рядов</a:t>
+                      </a:r>
+                    </a:p>
+                  </a:txBody>
+                  <a:tcPr marL="23521" marR="23521" marT="11760" marB="11760" anchor="ctr"/>
+                </a:tc>
+                <a:tc>
+                  <a:txBody>
+                    <a:bodyPr/>
+                    <a:lstStyle/>
+                    <a:p>
+                      <a:r>
+                        <a:rPr lang="ru-RU" sz="2000" dirty="0"/>
+                        <a:t>2024</a:t>
+                      </a:r>
+                    </a:p>
+                  </a:txBody>
+                  <a:tcPr marL="23521" marR="23521" marT="11760" marB="11760" anchor="ctr"/>
+                </a:tc>
+                <a:extLst>
+                  <a:ext uri="{0D108BD9-81ED-4DB2-BD59-A6C34878D82A}">
+                    <a16:rowId xmlns:a16="http://schemas.microsoft.com/office/drawing/2014/main" val="2621592546"/>
+                  </a:ext>
+                </a:extLst>
+              </a:tr>
+              <a:tr h="144612">
+                <a:tc>
+                  <a:txBody>
+                    <a:bodyPr/>
+                    <a:lstStyle/>
+                    <a:p>
+                      <a:r>
+                        <a:rPr lang="en-US" sz="2000" b="1" dirty="0" err="1" smtClean="0"/>
+                        <a:t>Dlinear</a:t>
+                      </a:r>
+                      <a:endParaRPr lang="en-US" sz="2000" b="1" dirty="0"/>
+                    </a:p>
+                  </a:txBody>
+                  <a:tcPr marL="23521" marR="23521" marT="11760" marB="11760" anchor="ctr"/>
+                </a:tc>
+                <a:tc>
+                  <a:txBody>
+                    <a:bodyPr/>
+                    <a:lstStyle/>
+                    <a:p>
+                      <a:r>
+                        <a:rPr lang="en-US" sz="2000" dirty="0" smtClean="0"/>
+                        <a:t>Linear</a:t>
+                      </a:r>
+                      <a:endParaRPr lang="en-US" sz="2000" dirty="0"/>
+                    </a:p>
+                  </a:txBody>
+                  <a:tcPr marL="23521" marR="23521" marT="11760" marB="11760" anchor="ctr"/>
+                </a:tc>
+                <a:tc>
+                  <a:txBody>
+                    <a:bodyPr/>
+                    <a:lstStyle/>
+                    <a:p>
+                      <a:r>
+                        <a:rPr lang="en-US" sz="2000" dirty="0" smtClean="0"/>
+                        <a:t>-</a:t>
+                      </a:r>
+                      <a:endParaRPr lang="en-US" sz="2000" dirty="0"/>
+                    </a:p>
+                  </a:txBody>
+                  <a:tcPr marL="23521" marR="23521" marT="11760" marB="11760" anchor="ctr"/>
+                </a:tc>
+                <a:tc>
+                  <a:txBody>
+                    <a:bodyPr/>
+                    <a:lstStyle/>
+                    <a:p>
+                      <a:r>
+                        <a:rPr lang="ru-RU" sz="2000" dirty="0" smtClean="0"/>
+                        <a:t>Не</a:t>
+                      </a:r>
+                      <a:r>
+                        <a:rPr lang="ru-RU" sz="2000" baseline="0" dirty="0" smtClean="0"/>
+                        <a:t> </a:t>
+                      </a:r>
+                      <a:r>
+                        <a:rPr lang="ru-RU" sz="2000" baseline="0" dirty="0" err="1" smtClean="0"/>
+                        <a:t>трансформер</a:t>
+                      </a:r>
+                      <a:endParaRPr lang="ru-RU" sz="2000" dirty="0"/>
+                    </a:p>
+                  </a:txBody>
+                  <a:tcPr marL="23521" marR="23521" marT="11760" marB="11760" anchor="ctr"/>
+                </a:tc>
+                <a:tc>
+                  <a:txBody>
+                    <a:bodyPr/>
+                    <a:lstStyle/>
+                    <a:p>
+                      <a:pPr marL="0" marR="0" indent="0" algn="l" defTabSz="914400" rtl="0" eaLnBrk="1" fontAlgn="auto" latinLnBrk="0" hangingPunct="1">
+                        <a:lnSpc>
+                          <a:spcPct val="100000"/>
+                        </a:lnSpc>
+                        <a:spcBef>
+                          <a:spcPts val="0"/>
+                        </a:spcBef>
+                        <a:spcAft>
+                          <a:spcPts val="0"/>
+                        </a:spcAft>
+                        <a:buClrTx/>
+                        <a:buSzTx/>
+                        <a:buFontTx/>
+                        <a:buNone/>
+                        <a:tabLst/>
+                        <a:defRPr/>
+                      </a:pPr>
+                      <a:r>
+                        <a:rPr lang="en-US" sz="2000" dirty="0" smtClean="0"/>
+                        <a:t>Base</a:t>
+                      </a:r>
+                      <a:r>
+                        <a:rPr lang="en-US" sz="2000" baseline="0" dirty="0" smtClean="0"/>
+                        <a:t> line</a:t>
+                      </a:r>
+                      <a:r>
+                        <a:rPr lang="ru-RU" sz="2000" baseline="0" dirty="0" smtClean="0"/>
+                        <a:t> </a:t>
+                      </a:r>
+                      <a:r>
+                        <a:rPr lang="en-US" sz="2000" baseline="0" dirty="0" smtClean="0"/>
+                        <a:t>for </a:t>
+                      </a:r>
+                      <a:r>
+                        <a:rPr lang="en-US" sz="2000" dirty="0" smtClean="0"/>
+                        <a:t>Long</a:t>
+                      </a:r>
+                      <a:r>
+                        <a:rPr lang="en-US" sz="2000" baseline="0" dirty="0" smtClean="0"/>
+                        <a:t> horizon</a:t>
+                      </a:r>
+                      <a:endParaRPr lang="ru-RU" sz="2000" dirty="0"/>
+                    </a:p>
+                  </a:txBody>
+                  <a:tcPr marL="23521" marR="23521" marT="11760" marB="11760" anchor="ctr"/>
+                </a:tc>
+                <a:tc>
+                  <a:txBody>
+                    <a:bodyPr/>
+                    <a:lstStyle/>
+                    <a:p>
+                      <a:r>
+                        <a:rPr lang="en-US" sz="2000" dirty="0" smtClean="0"/>
+                        <a:t>2023</a:t>
+                      </a:r>
+                      <a:endParaRPr lang="ru-RU" sz="2000" dirty="0"/>
+                    </a:p>
+                  </a:txBody>
+                  <a:tcPr marL="23521" marR="23521" marT="11760" marB="11760" anchor="ctr"/>
+                </a:tc>
+                <a:extLst>
+                  <a:ext uri="{0D108BD9-81ED-4DB2-BD59-A6C34878D82A}">
+                    <a16:rowId xmlns:a16="http://schemas.microsoft.com/office/drawing/2014/main" val="115333207"/>
+                  </a:ext>
+                </a:extLst>
+              </a:tr>
+            </a:tbl>
+          </a:graphicData>
+        </a:graphic>
+      </p:graphicFrame>
+      <p:sp>
+        <p:nvSpPr>
+          <p:cNvPr id="3" name="Прямоугольник 2"/>
+          <p:cNvSpPr/>
+          <p:nvPr/>
+        </p:nvSpPr>
+        <p:spPr>
+          <a:xfrm>
+            <a:off x="110350" y="6519446"/>
+            <a:ext cx="9624664" cy="307777"/>
+          </a:xfrm>
+          <a:prstGeom prst="rect">
+            <a:avLst/>
+          </a:prstGeom>
+        </p:spPr>
+        <p:txBody>
+          <a:bodyPr wrap="square">
+            <a:spAutoFit/>
+          </a:bodyPr>
+          <a:lstStyle/>
+          <a:p>
+            <a:r>
+              <a:rPr lang="ru-RU" sz="1400" dirty="0"/>
+              <a:t>https://readmedium.com/a-brief-history-of-time-series-models-38455c2cd78d</a:t>
+            </a:r>
+          </a:p>
+        </p:txBody>
+      </p:sp>
+      <p:sp>
+        <p:nvSpPr>
+          <p:cNvPr id="5" name="Прямоугольник 4"/>
+          <p:cNvSpPr/>
+          <p:nvPr/>
+        </p:nvSpPr>
+        <p:spPr>
+          <a:xfrm>
+            <a:off x="6527180" y="6519446"/>
+            <a:ext cx="6096000" cy="307777"/>
+          </a:xfrm>
+          <a:prstGeom prst="rect">
+            <a:avLst/>
+          </a:prstGeom>
+        </p:spPr>
+        <p:txBody>
+          <a:bodyPr>
+            <a:spAutoFit/>
+          </a:bodyPr>
+          <a:lstStyle/>
+          <a:p>
+            <a:r>
+              <a:rPr lang="ru-RU" sz="1400" dirty="0"/>
+              <a:t>https://nixtlaverse.nixtla.io/neuralforecast/docs/capabilities/overview.html</a:t>
+            </a:r>
+          </a:p>
+        </p:txBody>
+      </p:sp>
+    </p:spTree>
+    <p:extLst>
+      <p:ext uri="{BB962C8B-B14F-4D97-AF65-F5344CB8AC3E}">
+        <p14:creationId xmlns:p14="http://schemas.microsoft.com/office/powerpoint/2010/main" val="3857978370"/>
+      </p:ext>
+    </p:extLst>
+  </p:cSld>
+  <p:clrMapOvr>
+    <a:masterClrMapping/>
+  </p:clrMapOvr>
+  <p:timing>
+    <p:tnLst>
+      <p:par>
+        <p:cTn id="1" dur="indefinite" restart="never" nodeType="tmRoot"/>
+      </p:par>
+    </p:tnLst>
+  </p:timing>
+</p:sld>
+</file>
+
+<file path=ppt/slides/slide19.xml><?xml version="1.0" encoding="utf-8"?>
+<p:sld xmlns:a="http://schemas.openxmlformats.org/drawingml/2006/main" xmlns:r="http://schemas.openxmlformats.org/officeDocument/2006/relationships" xmlns:p="http://schemas.openxmlformats.org/presentationml/2006/main">
+  <p:cSld>
+    <p:spTree>
+      <p:nvGrpSpPr>
+        <p:cNvPr id="1" name="">
+          <a:extLst>
+            <a:ext uri="{FF2B5EF4-FFF2-40B4-BE49-F238E27FC236}">
+              <a16:creationId xmlns:a16="http://schemas.microsoft.com/office/drawing/2014/main" id="{37F8FB28-F0A6-C205-12F2-94B5061BCC5A}"/>
+            </a:ext>
+          </a:extLst>
+        </p:cNvPr>
+        <p:cNvGrpSpPr/>
+        <p:nvPr/>
+      </p:nvGrpSpPr>
+      <p:grpSpPr>
+        <a:xfrm>
+          <a:off x="0" y="0"/>
+          <a:ext cx="0" cy="0"/>
+          <a:chOff x="0" y="0"/>
+          <a:chExt cx="0" cy="0"/>
+        </a:xfrm>
+      </p:grpSpPr>
+      <p:sp>
+        <p:nvSpPr>
+          <p:cNvPr id="2" name="Заголовок 1">
+            <a:extLst>
+              <a:ext uri="{FF2B5EF4-FFF2-40B4-BE49-F238E27FC236}">
+                <a16:creationId xmlns:a16="http://schemas.microsoft.com/office/drawing/2014/main" id="{07E88F0C-9F44-3159-36DC-87061338F23B}"/>
+              </a:ext>
+            </a:extLst>
+          </p:cNvPr>
+          <p:cNvSpPr>
+            <a:spLocks noGrp="1"/>
+          </p:cNvSpPr>
+          <p:nvPr>
+            <p:ph type="title"/>
+          </p:nvPr>
+        </p:nvSpPr>
+        <p:spPr>
+          <a:xfrm>
+            <a:off x="475989" y="365125"/>
+            <a:ext cx="10877811" cy="687061"/>
+          </a:xfrm>
+        </p:spPr>
+        <p:txBody>
+          <a:bodyPr>
+            <a:normAutofit fontScale="90000"/>
+          </a:bodyPr>
+          <a:lstStyle/>
+          <a:p>
+            <a:r>
+              <a:rPr lang="ru-RU" b="1" dirty="0"/>
+              <a:t>Гипотезы</a:t>
+            </a:r>
+            <a:r>
+              <a:rPr lang="ru-RU" dirty="0"/>
+              <a:t>: </a:t>
+            </a:r>
+            <a:br>
+              <a:rPr lang="ru-RU" dirty="0"/>
+            </a:br>
+            <a:endParaRPr lang="ru-RU" dirty="0"/>
+          </a:p>
+        </p:txBody>
+      </p:sp>
+      <p:sp>
+        <p:nvSpPr>
+          <p:cNvPr id="3" name="Объект 2">
+            <a:extLst>
+              <a:ext uri="{FF2B5EF4-FFF2-40B4-BE49-F238E27FC236}">
+                <a16:creationId xmlns:a16="http://schemas.microsoft.com/office/drawing/2014/main" id="{8F9BC521-45CF-B615-5578-EF7A592177E8}"/>
+              </a:ext>
+            </a:extLst>
+          </p:cNvPr>
+          <p:cNvSpPr>
+            <a:spLocks noGrp="1"/>
+          </p:cNvSpPr>
+          <p:nvPr>
+            <p:ph idx="1"/>
+          </p:nvPr>
+        </p:nvSpPr>
+        <p:spPr>
+          <a:xfrm>
+            <a:off x="300625" y="701458"/>
+            <a:ext cx="11461315" cy="5791417"/>
+          </a:xfrm>
+        </p:spPr>
+        <p:txBody>
+          <a:bodyPr>
+            <a:normAutofit/>
+          </a:bodyPr>
+          <a:lstStyle/>
+          <a:p>
+            <a:pPr marL="0" indent="0">
+              <a:buNone/>
+            </a:pPr>
+            <a:r>
+              <a:rPr lang="ru-RU" sz="2100" dirty="0"/>
+              <a:t>Использование гетерогенного набор датасетов позволяет модели выучить (обобщить) широкий набор представлений ВР.</a:t>
+            </a:r>
+          </a:p>
+          <a:p>
+            <a:pPr lvl="1"/>
+            <a:r>
+              <a:rPr lang="en-US" sz="2100" b="1" dirty="0"/>
+              <a:t>Scaling-low</a:t>
+            </a:r>
+            <a:r>
+              <a:rPr lang="en-US" sz="2100" dirty="0"/>
+              <a:t> </a:t>
+            </a:r>
+            <a:r>
+              <a:rPr lang="ru-RU" sz="2100" dirty="0"/>
+              <a:t>(обобщение достаточного количества наборов данных позволяет обобщать любые похожие (между ними) наборы данных если параметров достаточно</a:t>
+            </a:r>
+          </a:p>
+          <a:p>
+            <a:pPr lvl="2"/>
+            <a:r>
+              <a:rPr lang="ru-RU" sz="2100" dirty="0"/>
+              <a:t>В том числе на коротких данных</a:t>
+            </a:r>
+          </a:p>
+          <a:p>
+            <a:pPr lvl="2"/>
+            <a:r>
+              <a:rPr lang="en" sz="2100" b="1" dirty="0"/>
+              <a:t>zero-shot</a:t>
+            </a:r>
+            <a:r>
+              <a:rPr lang="en" sz="2100" dirty="0"/>
+              <a:t> </a:t>
+            </a:r>
+            <a:r>
+              <a:rPr lang="ru-RU" sz="2100" dirty="0"/>
+              <a:t>подход – модель может работать даже если не видела данных</a:t>
+            </a:r>
+          </a:p>
+          <a:p>
+            <a:r>
+              <a:rPr lang="en-US" sz="2100" b="1" dirty="0"/>
+              <a:t>In-context forecasting</a:t>
+            </a:r>
+            <a:r>
+              <a:rPr lang="ru-RU" sz="2100" b="1" dirty="0"/>
+              <a:t>  </a:t>
+            </a:r>
+            <a:r>
+              <a:rPr lang="ru-RU" sz="2100" dirty="0"/>
+              <a:t>– каждое предсказание есть наиболее вероятное значение своего контекста. </a:t>
+            </a:r>
+          </a:p>
+          <a:p>
+            <a:pPr lvl="1"/>
+            <a:r>
+              <a:rPr lang="ru-RU" sz="2100" dirty="0"/>
+              <a:t>Будем говорить о входных данных </a:t>
+            </a:r>
+            <a:r>
+              <a:rPr lang="ru-RU" sz="2100" dirty="0" err="1"/>
+              <a:t>промпте</a:t>
+            </a:r>
+            <a:r>
+              <a:rPr lang="ru-RU" sz="2100" dirty="0"/>
+              <a:t> – запрос предсказания. </a:t>
+            </a:r>
+            <a:r>
+              <a:rPr lang="ru-RU" sz="2100" dirty="0" err="1"/>
+              <a:t>Промпт</a:t>
+            </a:r>
+            <a:r>
+              <a:rPr lang="ru-RU" sz="2100" dirty="0"/>
+              <a:t> может быть любым: текст, ВР, видео и </a:t>
+            </a:r>
+            <a:r>
+              <a:rPr lang="ru-RU" sz="2100" dirty="0" err="1"/>
+              <a:t>тд</a:t>
+            </a:r>
+            <a:r>
+              <a:rPr lang="ru-RU" sz="2100" dirty="0"/>
+              <a:t>.</a:t>
+            </a:r>
+          </a:p>
+          <a:p>
+            <a:r>
+              <a:rPr lang="ru-RU" sz="2100" dirty="0"/>
+              <a:t>Предсказания можно выучить как результат представления </a:t>
+            </a:r>
+            <a:r>
+              <a:rPr lang="en-US" sz="2100" b="1" dirty="0"/>
+              <a:t>(representation learning)</a:t>
+            </a:r>
+            <a:endParaRPr lang="ru-RU" sz="2100" b="1" dirty="0"/>
+          </a:p>
+          <a:p>
+            <a:pPr lvl="1"/>
+            <a:r>
+              <a:rPr lang="ru-RU" sz="2100" dirty="0"/>
+              <a:t>можно выучивать без полноценной разметки например </a:t>
+            </a:r>
+            <a:r>
+              <a:rPr lang="ru-RU" sz="2100" dirty="0" err="1"/>
+              <a:t>авторегрессионно</a:t>
+            </a:r>
+            <a:r>
+              <a:rPr lang="ru-RU" sz="2100" dirty="0"/>
+              <a:t> или восстановлением частей зависимости</a:t>
+            </a:r>
+          </a:p>
+          <a:p>
+            <a:pPr lvl="1"/>
+            <a:r>
+              <a:rPr lang="ru-RU" sz="2100" dirty="0"/>
+              <a:t>Все еще доступно дообучение для отдельных задач</a:t>
+            </a:r>
+          </a:p>
+          <a:p>
+            <a:r>
+              <a:rPr lang="en-US" sz="2500" dirty="0" err="1"/>
+              <a:t>Для</a:t>
+            </a:r>
+            <a:r>
+              <a:rPr lang="ru-RU" sz="2500" dirty="0"/>
+              <a:t> </a:t>
+            </a:r>
+            <a:r>
+              <a:rPr lang="ru-RU" sz="2500" dirty="0" err="1"/>
+              <a:t>авторегрессионного</a:t>
+            </a:r>
+            <a:r>
+              <a:rPr lang="ru-RU" sz="2500" dirty="0"/>
+              <a:t> предсказания достаточно декодера и закодированный контекст</a:t>
+            </a:r>
+          </a:p>
+          <a:p>
+            <a:endParaRPr lang="ru-RU" sz="2100" dirty="0"/>
+          </a:p>
+        </p:txBody>
+      </p:sp>
+      <p:sp>
+        <p:nvSpPr>
+          <p:cNvPr id="5" name="TextBox 4">
+            <a:extLst>
+              <a:ext uri="{FF2B5EF4-FFF2-40B4-BE49-F238E27FC236}">
+                <a16:creationId xmlns:a16="http://schemas.microsoft.com/office/drawing/2014/main" id="{ACB63D47-E653-1B59-1915-0968E9136859}"/>
+              </a:ext>
+            </a:extLst>
+          </p:cNvPr>
+          <p:cNvSpPr txBox="1"/>
+          <p:nvPr/>
+        </p:nvSpPr>
+        <p:spPr>
+          <a:xfrm>
+            <a:off x="5914894" y="6123543"/>
+            <a:ext cx="6093912" cy="369332"/>
+          </a:xfrm>
+          <a:prstGeom prst="rect">
+            <a:avLst/>
+          </a:prstGeom>
+          <a:noFill/>
+        </p:spPr>
+        <p:txBody>
+          <a:bodyPr wrap="square">
+            <a:spAutoFit/>
+          </a:bodyPr>
+          <a:lstStyle/>
+          <a:p>
+            <a:r>
+              <a:rPr lang="ru-RU" dirty="0" err="1"/>
+              <a:t>https</a:t>
+            </a:r>
+            <a:r>
+              <a:rPr lang="ru-RU" dirty="0"/>
+              <a:t>://</a:t>
+            </a:r>
+            <a:r>
+              <a:rPr lang="ru-RU" dirty="0" err="1"/>
+              <a:t>otexts.com</a:t>
+            </a:r>
+            <a:r>
+              <a:rPr lang="ru-RU" dirty="0"/>
+              <a:t>/</a:t>
+            </a:r>
+            <a:r>
+              <a:rPr lang="ru-RU" dirty="0" err="1"/>
+              <a:t>fpppy</a:t>
+            </a:r>
+            <a:r>
+              <a:rPr lang="ru-RU" dirty="0"/>
+              <a:t>/</a:t>
+            </a:r>
+            <a:r>
+              <a:rPr lang="ru-RU" dirty="0" err="1"/>
+              <a:t>nbs</a:t>
+            </a:r>
+            <a:r>
+              <a:rPr lang="ru-RU" dirty="0"/>
+              <a:t>/15-foundation-models.html</a:t>
+            </a:r>
+          </a:p>
+        </p:txBody>
+      </p:sp>
+    </p:spTree>
+    <p:extLst>
+      <p:ext uri="{BB962C8B-B14F-4D97-AF65-F5344CB8AC3E}">
+        <p14:creationId xmlns:p14="http://schemas.microsoft.com/office/powerpoint/2010/main" val="297319318"/>
+      </p:ext>
+    </p:extLst>
+  </p:cSld>
+  <p:clrMapOvr>
+    <a:masterClrMapping/>
+  </p:clrMapOvr>
+  <p:timing>
+    <p:tnLst>
+      <p:par>
+        <p:cTn id="1" dur="indefinite" restart="never" nodeType="tmRoot"/>
+      </p:par>
+    </p:tnLst>
+  </p:timing>
+</p:sld>
+</file>
+
+<file path=ppt/slides/slide2.xml><?xml version="1.0" encoding="utf-8"?>
+<p:sld xmlns:a="http://schemas.openxmlformats.org/drawingml/2006/main" xmlns:r="http://schemas.openxmlformats.org/officeDocument/2006/relationships" xmlns:p="http://schemas.openxmlformats.org/presentationml/2006/main">
+  <p:cSld>
+    <p:spTree>
+      <p:nvGrpSpPr>
+        <p:cNvPr id="1" name="">
+          <a:extLst>
+            <a:ext uri="{FF2B5EF4-FFF2-40B4-BE49-F238E27FC236}">
+              <a16:creationId xmlns:a16="http://schemas.microsoft.com/office/drawing/2014/main" id="{B3004F54-9DA4-3637-B7F6-B2C151912744}"/>
+            </a:ext>
+          </a:extLst>
+        </p:cNvPr>
+        <p:cNvGrpSpPr/>
+        <p:nvPr/>
+      </p:nvGrpSpPr>
+      <p:grpSpPr>
+        <a:xfrm>
+          <a:off x="0" y="0"/>
+          <a:ext cx="0" cy="0"/>
+          <a:chOff x="0" y="0"/>
+          <a:chExt cx="0" cy="0"/>
+        </a:xfrm>
+      </p:grpSpPr>
+      <p:sp>
+        <p:nvSpPr>
+          <p:cNvPr id="2" name="Заголовок 1">
+            <a:extLst>
+              <a:ext uri="{FF2B5EF4-FFF2-40B4-BE49-F238E27FC236}">
+                <a16:creationId xmlns:a16="http://schemas.microsoft.com/office/drawing/2014/main" id="{A13DFAFD-0F73-242A-2215-9CF55804E9D3}"/>
+              </a:ext>
+            </a:extLst>
+          </p:cNvPr>
+          <p:cNvSpPr>
+            <a:spLocks noGrp="1"/>
+          </p:cNvSpPr>
+          <p:nvPr>
+            <p:ph type="title"/>
+          </p:nvPr>
+        </p:nvSpPr>
+        <p:spPr>
+          <a:xfrm>
+            <a:off x="258726" y="149031"/>
+            <a:ext cx="11166513" cy="571309"/>
+          </a:xfrm>
+        </p:spPr>
+        <p:txBody>
+          <a:bodyPr>
+            <a:normAutofit fontScale="90000"/>
+          </a:bodyPr>
+          <a:lstStyle/>
+          <a:p>
+            <a:pPr algn="ctr"/>
+            <a:r>
+              <a:rPr lang="en-US" b="1" dirty="0" err="1"/>
+              <a:t>Осо</a:t>
+            </a:r>
+            <a:r>
+              <a:rPr lang="ru-RU" b="1" dirty="0" err="1"/>
+              <a:t>бенности</a:t>
+            </a:r>
+            <a:r>
+              <a:rPr lang="ru-RU" b="1" dirty="0"/>
+              <a:t> </a:t>
+            </a:r>
+            <a:r>
+              <a:rPr lang="en-US" b="1" dirty="0"/>
+              <a:t>RNN</a:t>
+            </a:r>
+            <a:r>
+              <a:rPr lang="ru-RU" b="1" dirty="0"/>
+              <a:t> в режиме </a:t>
+            </a:r>
+            <a:r>
+              <a:rPr lang="ru-RU" dirty="0" err="1"/>
+              <a:t>Seq</a:t>
+            </a:r>
+            <a:r>
+              <a:rPr lang="en-US" dirty="0"/>
+              <a:t>2Seq</a:t>
+            </a:r>
+            <a:endParaRPr lang="ru-RU" b="1" dirty="0"/>
+          </a:p>
+        </p:txBody>
+      </p:sp>
+      <mc:AlternateContent xmlns:mc="http://schemas.openxmlformats.org/markup-compatibility/2006" xmlns:a14="http://schemas.microsoft.com/office/drawing/2010/main">
+        <mc:Choice Requires="a14">
+          <p:sp>
+            <p:nvSpPr>
+              <p:cNvPr id="3" name="Объект 2">
+                <a:extLst>
+                  <a:ext uri="{FF2B5EF4-FFF2-40B4-BE49-F238E27FC236}">
+                    <a16:creationId xmlns:a16="http://schemas.microsoft.com/office/drawing/2014/main" id="{F517ED8B-EC79-48E8-1D5D-73DBF8500212}"/>
+                  </a:ext>
+                </a:extLst>
+              </p:cNvPr>
+              <p:cNvSpPr>
+                <a:spLocks noGrp="1"/>
+              </p:cNvSpPr>
+              <p:nvPr>
+                <p:ph idx="1"/>
+              </p:nvPr>
+            </p:nvSpPr>
+            <p:spPr>
+              <a:xfrm>
+                <a:off x="162862" y="587086"/>
+                <a:ext cx="11942800" cy="5683828"/>
+              </a:xfrm>
+            </p:spPr>
+            <p:txBody>
+              <a:bodyPr>
+                <a:normAutofit/>
+              </a:bodyPr>
+              <a:lstStyle/>
+              <a:p>
+                <a:pPr marL="0" indent="0">
+                  <a:lnSpc>
+                    <a:spcPct val="100000"/>
+                  </a:lnSpc>
+                  <a:spcBef>
+                    <a:spcPts val="500"/>
+                  </a:spcBef>
+                  <a:buNone/>
+                </a:pPr>
+                <a:r>
+                  <a:rPr lang="ru-RU" sz="2200" dirty="0" smtClean="0"/>
+                  <a:t>Пусть требуется предсказать последовательность значений</a:t>
+                </a:r>
+                <a:r>
+                  <a:rPr lang="en-US" sz="2200" dirty="0" smtClean="0"/>
+                  <a:t> </a:t>
+                </a:r>
+                <a:r>
+                  <a:rPr lang="ru-RU" sz="2200" dirty="0" smtClean="0"/>
+                  <a:t>ВР </a:t>
+                </a:r>
+                <a:r>
+                  <a:rPr lang="ru-RU" sz="2200" dirty="0"/>
+                  <a:t>по входным данным</a:t>
+                </a:r>
+              </a:p>
+              <a:p>
+                <a:pPr lvl="1">
+                  <a:lnSpc>
+                    <a:spcPct val="100000"/>
+                  </a:lnSpc>
+                </a:pPr>
+                <a:r>
+                  <a:rPr lang="ru-RU" sz="2200" dirty="0"/>
+                  <a:t>горизонт </a:t>
+                </a:r>
+                <a:r>
+                  <a:rPr lang="en-US" sz="2200" dirty="0"/>
+                  <a:t>H</a:t>
+                </a:r>
+                <a:r>
+                  <a:rPr lang="ru-RU" sz="2200" dirty="0"/>
+                  <a:t> большой – предсказывается итеративно </a:t>
+                </a:r>
+              </a:p>
+              <a:p>
+                <a:pPr lvl="1">
+                  <a:lnSpc>
+                    <a:spcPct val="100000"/>
+                  </a:lnSpc>
+                </a:pPr>
+                <a:r>
+                  <a:rPr lang="ru-RU" sz="2200" dirty="0" smtClean="0"/>
+                  <a:t>Напомним: </a:t>
+                </a:r>
+                <a14:m>
+                  <m:oMath xmlns:m="http://schemas.openxmlformats.org/officeDocument/2006/math">
+                    <m:r>
+                      <m:rPr>
+                        <m:sty m:val="p"/>
+                      </m:rPr>
+                      <a:rPr lang="en-US" sz="2200" i="1" dirty="0">
+                        <a:latin typeface="Cambria Math" panose="02040503050406030204" pitchFamily="18" charset="0"/>
+                      </a:rPr>
+                      <m:t>R</m:t>
+                    </m:r>
+                    <m:r>
+                      <a:rPr lang="en-US" sz="2200" i="1" dirty="0">
+                        <a:latin typeface="Cambria Math" panose="02040503050406030204" pitchFamily="18" charset="0"/>
+                      </a:rPr>
+                      <m:t>𝑁𝑁</m:t>
+                    </m:r>
+                    <m:r>
+                      <a:rPr lang="en-US" sz="2200" i="1" dirty="0">
+                        <a:latin typeface="Cambria Math" panose="02040503050406030204" pitchFamily="18" charset="0"/>
+                      </a:rPr>
+                      <m:t>: </m:t>
+                    </m:r>
+                    <m:sSub>
+                      <m:sSubPr>
+                        <m:ctrlPr>
+                          <a:rPr lang="en-US" sz="2200" i="1" dirty="0">
+                            <a:latin typeface="Cambria Math" panose="02040503050406030204" pitchFamily="18" charset="0"/>
+                          </a:rPr>
+                        </m:ctrlPr>
+                      </m:sSubPr>
+                      <m:e>
+                        <m:r>
+                          <a:rPr lang="ru-RU" sz="2200" i="1" dirty="0">
+                            <a:latin typeface="Cambria Math" panose="02040503050406030204" pitchFamily="18" charset="0"/>
+                          </a:rPr>
+                          <m:t>h</m:t>
+                        </m:r>
+                      </m:e>
+                      <m:sub>
+                        <m:r>
+                          <a:rPr lang="en-US" sz="2200" i="1" dirty="0">
+                            <a:latin typeface="Cambria Math" panose="02040503050406030204" pitchFamily="18" charset="0"/>
+                          </a:rPr>
+                          <m:t>𝑛</m:t>
+                        </m:r>
+                        <m:r>
+                          <a:rPr lang="ru-RU" sz="2200" i="1" dirty="0">
+                            <a:latin typeface="Cambria Math" panose="02040503050406030204" pitchFamily="18" charset="0"/>
+                          </a:rPr>
+                          <m:t>+1</m:t>
+                        </m:r>
+                      </m:sub>
+                    </m:sSub>
+                    <m:r>
+                      <a:rPr lang="ru-RU" sz="2200" i="1" dirty="0">
+                        <a:latin typeface="Cambria Math" panose="02040503050406030204" pitchFamily="18" charset="0"/>
+                      </a:rPr>
+                      <m:t>=</m:t>
+                    </m:r>
+                    <m:r>
+                      <a:rPr lang="en-US" sz="2200" i="1" dirty="0">
+                        <a:latin typeface="Cambria Math" panose="02040503050406030204" pitchFamily="18" charset="0"/>
+                      </a:rPr>
+                      <m:t>𝑓</m:t>
+                    </m:r>
+                    <m:d>
+                      <m:dPr>
+                        <m:ctrlPr>
+                          <a:rPr lang="en-US" sz="2200" i="1" dirty="0">
+                            <a:latin typeface="Cambria Math" panose="02040503050406030204" pitchFamily="18" charset="0"/>
+                          </a:rPr>
+                        </m:ctrlPr>
+                      </m:dPr>
+                      <m:e>
+                        <m:r>
+                          <a:rPr lang="ru-RU" sz="2200" i="1" dirty="0">
+                            <a:latin typeface="Cambria Math" panose="02040503050406030204" pitchFamily="18" charset="0"/>
+                          </a:rPr>
+                          <m:t>𝐴</m:t>
+                        </m:r>
+                        <m:sSub>
+                          <m:sSubPr>
+                            <m:ctrlPr>
+                              <a:rPr lang="en-US" sz="2200" i="1" dirty="0">
+                                <a:latin typeface="Cambria Math" panose="02040503050406030204" pitchFamily="18" charset="0"/>
+                              </a:rPr>
+                            </m:ctrlPr>
+                          </m:sSubPr>
+                          <m:e>
+                            <m:r>
+                              <a:rPr lang="en-US" sz="2200" i="1" dirty="0">
+                                <a:latin typeface="Cambria Math" panose="02040503050406030204" pitchFamily="18" charset="0"/>
+                              </a:rPr>
+                              <m:t>𝑦</m:t>
+                            </m:r>
+                          </m:e>
+                          <m:sub>
+                            <m:r>
+                              <a:rPr lang="en-US" sz="2200" i="1" dirty="0">
+                                <a:latin typeface="Cambria Math" panose="02040503050406030204" pitchFamily="18" charset="0"/>
+                              </a:rPr>
+                              <m:t>𝑛</m:t>
+                            </m:r>
+                          </m:sub>
+                        </m:sSub>
+                        <m:r>
+                          <a:rPr lang="ru-RU" sz="2200" i="1" dirty="0">
+                            <a:latin typeface="Cambria Math" panose="02040503050406030204" pitchFamily="18" charset="0"/>
+                          </a:rPr>
+                          <m:t>+</m:t>
+                        </m:r>
+                        <m:r>
+                          <a:rPr lang="en-US" sz="2200" i="1" dirty="0">
+                            <a:latin typeface="Cambria Math" panose="02040503050406030204" pitchFamily="18" charset="0"/>
+                          </a:rPr>
+                          <m:t>𝐵</m:t>
+                        </m:r>
+                        <m:sSub>
+                          <m:sSubPr>
+                            <m:ctrlPr>
+                              <a:rPr lang="en-US" sz="2200" i="1" dirty="0">
+                                <a:latin typeface="Cambria Math" panose="02040503050406030204" pitchFamily="18" charset="0"/>
+                              </a:rPr>
+                            </m:ctrlPr>
+                          </m:sSubPr>
+                          <m:e>
+                            <m:r>
+                              <a:rPr lang="en-US" sz="2200" i="1" dirty="0">
+                                <a:latin typeface="Cambria Math" panose="02040503050406030204" pitchFamily="18" charset="0"/>
+                              </a:rPr>
+                              <m:t>h</m:t>
+                            </m:r>
+                          </m:e>
+                          <m:sub>
+                            <m:r>
+                              <a:rPr lang="en-US" sz="2200" i="1" dirty="0">
+                                <a:latin typeface="Cambria Math" panose="02040503050406030204" pitchFamily="18" charset="0"/>
+                              </a:rPr>
+                              <m:t>𝑛</m:t>
+                            </m:r>
+                          </m:sub>
+                        </m:sSub>
+                      </m:e>
+                    </m:d>
+                  </m:oMath>
+                </a14:m>
+                <a:r>
+                  <a:rPr lang="ru-RU" sz="2200" dirty="0"/>
+                  <a:t> </a:t>
+                </a:r>
+                <a:r>
+                  <a:rPr lang="en-US" sz="2200" dirty="0"/>
+                  <a:t>;</a:t>
+                </a:r>
+              </a:p>
+              <a:p>
+                <a:pPr lvl="1">
+                  <a:lnSpc>
+                    <a:spcPct val="100000"/>
+                  </a:lnSpc>
+                </a:pPr>
+                <a14:m>
+                  <m:oMath xmlns:m="http://schemas.openxmlformats.org/officeDocument/2006/math">
+                    <m:sSub>
+                      <m:sSubPr>
+                        <m:ctrlPr>
+                          <a:rPr lang="en-US" sz="2200" i="1" dirty="0">
+                            <a:latin typeface="Cambria Math" panose="02040503050406030204" pitchFamily="18" charset="0"/>
+                          </a:rPr>
+                        </m:ctrlPr>
+                      </m:sSubPr>
+                      <m:e>
+                        <m:r>
+                          <a:rPr lang="ru-RU" sz="2200" i="1" dirty="0">
+                            <a:latin typeface="Cambria Math" panose="02040503050406030204" pitchFamily="18" charset="0"/>
+                          </a:rPr>
+                          <m:t>h</m:t>
+                        </m:r>
+                      </m:e>
+                      <m:sub>
+                        <m:r>
+                          <a:rPr lang="en-US" sz="2200" i="1" dirty="0">
+                            <a:latin typeface="Cambria Math" panose="02040503050406030204" pitchFamily="18" charset="0"/>
+                          </a:rPr>
+                          <m:t>𝑛</m:t>
+                        </m:r>
+                        <m:r>
+                          <a:rPr lang="ru-RU" sz="2200" i="1" dirty="0">
+                            <a:latin typeface="Cambria Math" panose="02040503050406030204" pitchFamily="18" charset="0"/>
+                          </a:rPr>
+                          <m:t>+1</m:t>
+                        </m:r>
+                      </m:sub>
+                    </m:sSub>
+                  </m:oMath>
+                </a14:m>
+                <a:r>
+                  <a:rPr lang="en-US" sz="2200" dirty="0"/>
+                  <a:t> –</a:t>
+                </a:r>
+                <a:r>
+                  <a:rPr lang="ru-RU" sz="2200" dirty="0"/>
+                  <a:t> выход слоя (</a:t>
+                </a:r>
+                <a:r>
+                  <a:rPr lang="en-US" sz="2200" dirty="0" err="1"/>
+                  <a:t>ко</a:t>
+                </a:r>
+                <a:r>
+                  <a:rPr lang="ru-RU" sz="2200" dirty="0" err="1"/>
+                  <a:t>нтекст</a:t>
+                </a:r>
+                <a:r>
+                  <a:rPr lang="en-US" sz="2200" dirty="0"/>
+                  <a:t>)</a:t>
+                </a:r>
+                <a:r>
+                  <a:rPr lang="ru-RU" sz="2200" dirty="0"/>
+                  <a:t> для предсказания </a:t>
+                </a:r>
+                <a14:m>
+                  <m:oMath xmlns:m="http://schemas.openxmlformats.org/officeDocument/2006/math">
+                    <m:sSub>
+                      <m:sSubPr>
+                        <m:ctrlPr>
+                          <a:rPr lang="en-US" sz="2200" i="1" dirty="0">
+                            <a:latin typeface="Cambria Math" panose="02040503050406030204" pitchFamily="18" charset="0"/>
+                          </a:rPr>
+                        </m:ctrlPr>
+                      </m:sSubPr>
+                      <m:e>
+                        <m:acc>
+                          <m:accPr>
+                            <m:chr m:val="̂"/>
+                            <m:ctrlPr>
+                              <a:rPr lang="en-US" sz="2200" i="1" dirty="0">
+                                <a:latin typeface="Cambria Math" panose="02040503050406030204" pitchFamily="18" charset="0"/>
+                              </a:rPr>
+                            </m:ctrlPr>
+                          </m:accPr>
+                          <m:e>
+                            <m:r>
+                              <a:rPr lang="en-US" sz="2200" i="1" dirty="0">
+                                <a:latin typeface="Cambria Math" panose="02040503050406030204" pitchFamily="18" charset="0"/>
+                              </a:rPr>
+                              <m:t>𝑦</m:t>
+                            </m:r>
+                          </m:e>
+                        </m:acc>
+                      </m:e>
+                      <m:sub>
+                        <m:r>
+                          <a:rPr lang="en-US" sz="2200" i="1" dirty="0">
+                            <a:latin typeface="Cambria Math" panose="02040503050406030204" pitchFamily="18" charset="0"/>
+                          </a:rPr>
+                          <m:t>𝑛</m:t>
+                        </m:r>
+                        <m:r>
+                          <a:rPr lang="ru-RU" sz="2200" i="1" dirty="0">
+                            <a:latin typeface="Cambria Math" panose="02040503050406030204" pitchFamily="18" charset="0"/>
+                          </a:rPr>
+                          <m:t>+1</m:t>
+                        </m:r>
+                      </m:sub>
+                    </m:sSub>
+                  </m:oMath>
+                </a14:m>
+                <a:endParaRPr lang="en-US" sz="2200" dirty="0"/>
+              </a:p>
+              <a:p>
+                <a:pPr>
+                  <a:lnSpc>
+                    <a:spcPct val="100000"/>
+                  </a:lnSpc>
+                  <a:spcBef>
+                    <a:spcPts val="500"/>
+                  </a:spcBef>
+                </a:pPr>
+                <a:r>
+                  <a:rPr lang="en-US" sz="2200" dirty="0" err="1"/>
+                  <a:t>Если</a:t>
+                </a:r>
+                <a:r>
+                  <a:rPr lang="ru-RU" sz="2200" dirty="0"/>
+                  <a:t> </a:t>
+                </a:r>
+                <a14:m>
+                  <m:oMath xmlns:m="http://schemas.openxmlformats.org/officeDocument/2006/math">
+                    <m:r>
+                      <a:rPr lang="en-US" sz="2200" i="1" dirty="0" smtClean="0">
+                        <a:latin typeface="Cambria Math" panose="02040503050406030204" pitchFamily="18" charset="0"/>
+                      </a:rPr>
+                      <m:t>𝑛</m:t>
+                    </m:r>
+                  </m:oMath>
+                </a14:m>
+                <a:r>
+                  <a:rPr lang="en-US" sz="2200" dirty="0"/>
+                  <a:t> – </a:t>
+                </a:r>
+                <a:r>
+                  <a:rPr lang="ru-RU" sz="2200" dirty="0"/>
+                  <a:t>последнее известное состояние системы, </a:t>
+                </a:r>
+                <a:r>
+                  <a:rPr lang="ru-RU" sz="2200" dirty="0" smtClean="0"/>
+                  <a:t>то </a:t>
+                </a:r>
+                <a14:m>
+                  <m:oMath xmlns:m="http://schemas.openxmlformats.org/officeDocument/2006/math">
+                    <m:sSub>
+                      <m:sSubPr>
+                        <m:ctrlPr>
+                          <a:rPr lang="en-US" sz="2100" b="1" i="1" dirty="0">
+                            <a:latin typeface="Cambria Math" panose="02040503050406030204" pitchFamily="18" charset="0"/>
+                          </a:rPr>
+                        </m:ctrlPr>
+                      </m:sSubPr>
+                      <m:e>
+                        <m:r>
+                          <a:rPr lang="ru-RU" sz="2100" b="1" i="1" dirty="0">
+                            <a:latin typeface="Cambria Math" panose="02040503050406030204" pitchFamily="18" charset="0"/>
+                          </a:rPr>
+                          <m:t>𝒉</m:t>
+                        </m:r>
+                      </m:e>
+                      <m:sub>
+                        <m:r>
+                          <a:rPr lang="en-US" sz="2100" b="1" i="1" dirty="0">
+                            <a:latin typeface="Cambria Math" panose="02040503050406030204" pitchFamily="18" charset="0"/>
+                          </a:rPr>
+                          <m:t>𝒏</m:t>
+                        </m:r>
+                      </m:sub>
+                    </m:sSub>
+                    <m:r>
+                      <a:rPr lang="ru-RU" sz="2100" b="1" i="1" dirty="0" smtClean="0">
+                        <a:latin typeface="Cambria Math" panose="02040503050406030204" pitchFamily="18" charset="0"/>
+                      </a:rPr>
+                      <m:t>− </m:t>
+                    </m:r>
+                  </m:oMath>
+                </a14:m>
+                <a:r>
+                  <a:rPr lang="ru-RU" sz="2100" b="1" dirty="0"/>
+                  <a:t>компактное представление системы</a:t>
+                </a:r>
+                <a:r>
+                  <a:rPr lang="ru-RU" sz="2200" dirty="0"/>
+                  <a:t>.</a:t>
+                </a:r>
+              </a:p>
+              <a:p>
+                <a:pPr marL="0" indent="0">
+                  <a:lnSpc>
+                    <a:spcPct val="100000"/>
+                  </a:lnSpc>
+                  <a:spcBef>
+                    <a:spcPts val="200"/>
+                  </a:spcBef>
+                  <a:buNone/>
+                </a:pPr>
+                <a:r>
+                  <a:rPr lang="ru-RU" sz="2200" b="1" dirty="0"/>
+                  <a:t>Проблемы RNN</a:t>
+                </a:r>
+                <a:endParaRPr lang="en-US" sz="2200" b="1" dirty="0"/>
+              </a:p>
+              <a:p>
+                <a:pPr lvl="1">
+                  <a:lnSpc>
+                    <a:spcPct val="100000"/>
+                  </a:lnSpc>
+                  <a:spcBef>
+                    <a:spcPts val="200"/>
+                  </a:spcBef>
+                </a:pPr>
+                <a:r>
+                  <a:rPr lang="ru-RU" sz="2000" dirty="0"/>
+                  <a:t>Ограниченный контекст из-за </a:t>
+                </a:r>
+                <a:r>
+                  <a:rPr lang="ru-RU" sz="2000" dirty="0" err="1"/>
+                  <a:t>переиспользования</a:t>
+                </a:r>
+                <a:r>
+                  <a:rPr lang="ru-RU" sz="2000" dirty="0"/>
+                  <a:t> единого вектора </a:t>
+                </a:r>
+                <a:r>
+                  <a:rPr lang="ru-RU" sz="2000" dirty="0" smtClean="0"/>
+                  <a:t>скрытых состояний </a:t>
+                </a:r>
+                <a14:m>
+                  <m:oMath xmlns:m="http://schemas.openxmlformats.org/officeDocument/2006/math">
+                    <m:sSub>
+                      <m:sSubPr>
+                        <m:ctrlPr>
+                          <a:rPr lang="en-US" b="1" i="1" dirty="0">
+                            <a:latin typeface="Cambria Math" panose="02040503050406030204" pitchFamily="18" charset="0"/>
+                          </a:rPr>
+                        </m:ctrlPr>
+                      </m:sSubPr>
+                      <m:e>
+                        <m:r>
+                          <a:rPr lang="ru-RU" b="1" i="1" dirty="0">
+                            <a:latin typeface="Cambria Math" panose="02040503050406030204" pitchFamily="18" charset="0"/>
+                          </a:rPr>
+                          <m:t>𝒉</m:t>
+                        </m:r>
+                      </m:e>
+                      <m:sub>
+                        <m:r>
+                          <a:rPr lang="en-US" b="1" i="1" dirty="0">
+                            <a:latin typeface="Cambria Math" panose="02040503050406030204" pitchFamily="18" charset="0"/>
+                          </a:rPr>
+                          <m:t>𝒏</m:t>
+                        </m:r>
+                      </m:sub>
+                    </m:sSub>
+                  </m:oMath>
+                </a14:m>
+                <a:endParaRPr lang="ru-RU" sz="2000" dirty="0"/>
+              </a:p>
+              <a:p>
+                <a:pPr lvl="2">
+                  <a:lnSpc>
+                    <a:spcPct val="100000"/>
+                  </a:lnSpc>
+                  <a:spcBef>
+                    <a:spcPts val="200"/>
+                  </a:spcBef>
+                </a:pPr>
+                <a:r>
+                  <a:rPr lang="ru-RU" dirty="0" smtClean="0"/>
+                  <a:t>Последние</a:t>
+                </a:r>
+                <a:r>
+                  <a:rPr lang="en-US" dirty="0" smtClean="0"/>
+                  <a:t> </a:t>
+                </a:r>
+                <a:r>
+                  <a:rPr lang="ru-RU" dirty="0" smtClean="0"/>
+                  <a:t>известные </a:t>
+                </a:r>
+                <a:r>
+                  <a:rPr lang="ru-RU" dirty="0"/>
+                  <a:t>скрытое </a:t>
+                </a:r>
+                <a:r>
+                  <a:rPr lang="ru-RU" dirty="0" smtClean="0"/>
+                  <a:t>состояние </a:t>
+                </a:r>
+                <a14:m>
+                  <m:oMath xmlns:m="http://schemas.openxmlformats.org/officeDocument/2006/math">
+                    <m:sSub>
+                      <m:sSubPr>
+                        <m:ctrlPr>
+                          <a:rPr lang="en-US" sz="1800" b="1" i="1" dirty="0">
+                            <a:latin typeface="Cambria Math" panose="02040503050406030204" pitchFamily="18" charset="0"/>
+                          </a:rPr>
+                        </m:ctrlPr>
+                      </m:sSubPr>
+                      <m:e>
+                        <m:r>
+                          <a:rPr lang="ru-RU" sz="1800" b="1" i="1" dirty="0">
+                            <a:latin typeface="Cambria Math" panose="02040503050406030204" pitchFamily="18" charset="0"/>
+                          </a:rPr>
+                          <m:t>𝒉</m:t>
+                        </m:r>
+                      </m:e>
+                      <m:sub>
+                        <m:r>
+                          <a:rPr lang="en-US" sz="1800" b="1" i="1" dirty="0">
+                            <a:latin typeface="Cambria Math" panose="02040503050406030204" pitchFamily="18" charset="0"/>
+                          </a:rPr>
+                          <m:t>𝒏</m:t>
+                        </m:r>
+                      </m:sub>
+                    </m:sSub>
+                  </m:oMath>
+                </a14:m>
+                <a:r>
+                  <a:rPr lang="ru-RU" dirty="0" smtClean="0"/>
+                  <a:t> и </a:t>
+                </a:r>
+                <a14:m>
+                  <m:oMath xmlns:m="http://schemas.openxmlformats.org/officeDocument/2006/math">
+                    <m:sSub>
+                      <m:sSubPr>
+                        <m:ctrlPr>
+                          <a:rPr lang="en-US" b="0" i="1" dirty="0" smtClean="0">
+                            <a:latin typeface="Cambria Math" panose="02040503050406030204" pitchFamily="18" charset="0"/>
+                          </a:rPr>
+                        </m:ctrlPr>
+                      </m:sSubPr>
+                      <m:e>
+                        <m:r>
+                          <a:rPr lang="en-US" i="1" dirty="0" smtClean="0">
+                            <a:latin typeface="Cambria Math" panose="02040503050406030204" pitchFamily="18" charset="0"/>
+                          </a:rPr>
+                          <m:t>𝑦</m:t>
+                        </m:r>
+                      </m:e>
+                      <m:sub>
+                        <m:r>
+                          <a:rPr lang="en-US" b="0" i="1" dirty="0" smtClean="0">
+                            <a:latin typeface="Cambria Math" panose="02040503050406030204" pitchFamily="18" charset="0"/>
+                          </a:rPr>
+                          <m:t>𝑛</m:t>
+                        </m:r>
+                      </m:sub>
+                    </m:sSub>
+                  </m:oMath>
+                </a14:m>
+                <a:r>
+                  <a:rPr lang="ru-RU" dirty="0" smtClean="0"/>
+                  <a:t> задают </a:t>
+                </a:r>
+                <a:r>
+                  <a:rPr lang="ru-RU" dirty="0"/>
+                  <a:t>все состояния </a:t>
+                </a:r>
+                <a:r>
+                  <a:rPr lang="ru-RU" dirty="0" smtClean="0"/>
+                  <a:t>предсказания</a:t>
+                </a:r>
+              </a:p>
+              <a:p>
+                <a:pPr lvl="3">
+                  <a:lnSpc>
+                    <a:spcPct val="100000"/>
+                  </a:lnSpc>
+                  <a:spcBef>
+                    <a:spcPts val="200"/>
+                  </a:spcBef>
+                </a:pPr>
+                <a:r>
+                  <a:rPr lang="ru-RU" dirty="0"/>
+                  <a:t>Скрытое состояние – это "бутылочное горлышко": вся информация из прошлого сжимается в фиксированный вектор, что приводит к потере деталей</a:t>
+                </a:r>
+                <a:r>
+                  <a:rPr lang="ru-RU" dirty="0" smtClean="0"/>
+                  <a:t>.</a:t>
+                </a:r>
+                <a:endParaRPr lang="ru-RU" dirty="0"/>
+              </a:p>
+              <a:p>
+                <a:pPr lvl="2">
+                  <a:lnSpc>
+                    <a:spcPct val="100000"/>
+                  </a:lnSpc>
+                  <a:spcBef>
+                    <a:spcPts val="200"/>
+                  </a:spcBef>
+                </a:pPr>
+                <a:r>
+                  <a:rPr lang="ru-RU" dirty="0" smtClean="0"/>
+                  <a:t>Ограниченный </a:t>
+                </a:r>
+                <a:r>
+                  <a:rPr lang="ru-RU" dirty="0"/>
+                  <a:t>горизонт предсказаний</a:t>
+                </a:r>
+              </a:p>
+              <a:p>
+                <a:pPr lvl="1">
+                  <a:lnSpc>
+                    <a:spcPct val="100000"/>
+                  </a:lnSpc>
+                  <a:spcBef>
+                    <a:spcPts val="200"/>
+                  </a:spcBef>
+                </a:pPr>
+                <a:r>
+                  <a:rPr lang="ru-RU" sz="2000" dirty="0" smtClean="0"/>
+                  <a:t>Проблема </a:t>
+                </a:r>
+                <a:r>
+                  <a:rPr lang="ru-RU" sz="2000" dirty="0"/>
+                  <a:t>долгого обучения (веса или затухают или взрываются</a:t>
+                </a:r>
+                <a:r>
+                  <a:rPr lang="ru-RU" sz="2000" dirty="0" smtClean="0"/>
+                  <a:t>)</a:t>
+                </a:r>
+                <a:endParaRPr lang="ru-RU" sz="2000" dirty="0"/>
+              </a:p>
+            </p:txBody>
+          </p:sp>
+        </mc:Choice>
+        <mc:Fallback xmlns="">
+          <p:sp>
+            <p:nvSpPr>
+              <p:cNvPr id="3" name="Объект 2">
+                <a:extLst>
+                  <a:ext uri="{FF2B5EF4-FFF2-40B4-BE49-F238E27FC236}">
+                    <a16:creationId xmlns:a16="http://schemas.microsoft.com/office/drawing/2014/main" id="{F517ED8B-EC79-48E8-1D5D-73DBF8500212}"/>
+                  </a:ext>
+                </a:extLst>
+              </p:cNvPr>
+              <p:cNvSpPr>
+                <a:spLocks noGrp="1" noRot="1" noChangeAspect="1" noMove="1" noResize="1" noEditPoints="1" noAdjustHandles="1" noChangeArrowheads="1" noChangeShapeType="1" noTextEdit="1"/>
+              </p:cNvSpPr>
+              <p:nvPr>
+                <p:ph idx="1"/>
+              </p:nvPr>
+            </p:nvSpPr>
+            <p:spPr>
+              <a:xfrm>
+                <a:off x="162862" y="587086"/>
+                <a:ext cx="11942800" cy="5683828"/>
+              </a:xfrm>
+              <a:blipFill>
+                <a:blip r:embed="rId2"/>
+                <a:stretch>
+                  <a:fillRect l="-664" t="-643"/>
+                </a:stretch>
+              </a:blipFill>
+            </p:spPr>
+            <p:txBody>
+              <a:bodyPr/>
+              <a:lstStyle/>
+              <a:p>
+                <a:r>
+                  <a:rPr lang="ru-RU">
+                    <a:noFill/>
+                  </a:rPr>
+                  <a:t> </a:t>
+                </a:r>
+              </a:p>
+            </p:txBody>
+          </p:sp>
+        </mc:Fallback>
+      </mc:AlternateContent>
+      <p:sp>
+        <p:nvSpPr>
+          <p:cNvPr id="4" name="AutoShape 2">
+            <a:extLst>
+              <a:ext uri="{FF2B5EF4-FFF2-40B4-BE49-F238E27FC236}">
+                <a16:creationId xmlns:a16="http://schemas.microsoft.com/office/drawing/2014/main" id="{3CE0A56B-0917-A450-C416-08AAC828BE3C}"/>
+              </a:ext>
+            </a:extLst>
+          </p:cNvPr>
+          <p:cNvSpPr>
+            <a:spLocks noChangeAspect="1" noChangeArrowheads="1"/>
+          </p:cNvSpPr>
+          <p:nvPr/>
+        </p:nvSpPr>
+        <p:spPr bwMode="auto">
+          <a:xfrm>
+            <a:off x="5943600" y="3276600"/>
+            <a:ext cx="304800" cy="304800"/>
+          </a:xfrm>
+          <a:prstGeom prst="rect">
+            <a:avLst/>
+          </a:prstGeom>
+          <a:noFill/>
+          <a:extLst>
+            <a:ext uri="{909E8E84-426E-40DD-AFC4-6F175D3DCCD1}">
+              <a14:hiddenFill xmlns:a14="http://schemas.microsoft.com/office/drawing/2010/main">
+                <a:solidFill>
+                  <a:srgbClr val="FFFFFF"/>
+                </a:solidFill>
+              </a14:hiddenFill>
+            </a:ext>
+          </a:extLst>
+        </p:spPr>
+        <p:txBody>
+          <a:bodyPr vert="horz" wrap="square" lIns="91440" tIns="45720" rIns="91440" bIns="45720" numCol="1" anchor="t" anchorCtr="0" compatLnSpc="1">
+            <a:prstTxWarp prst="textNoShape">
+              <a:avLst/>
+            </a:prstTxWarp>
+          </a:bodyPr>
+          <a:lstStyle/>
+          <a:p>
+            <a:endParaRPr lang="ru-RU"/>
+          </a:p>
+        </p:txBody>
+      </p:sp>
+      <p:pic>
+        <p:nvPicPr>
+          <p:cNvPr id="6" name="Picture 2">
+            <a:extLst>
+              <a:ext uri="{FF2B5EF4-FFF2-40B4-BE49-F238E27FC236}">
+                <a16:creationId xmlns:a16="http://schemas.microsoft.com/office/drawing/2014/main" id="{97720C5C-7990-C77A-277B-D0F34C8589A2}"/>
+              </a:ext>
+            </a:extLst>
+          </p:cNvPr>
+          <p:cNvPicPr>
+            <a:picLocks noChangeAspect="1" noChangeArrowheads="1"/>
+          </p:cNvPicPr>
+          <p:nvPr/>
+        </p:nvPicPr>
+        <p:blipFill>
+          <a:blip r:embed="rId3">
+            <a:extLst>
+              <a:ext uri="{28A0092B-C50C-407E-A947-70E740481C1C}">
+                <a14:useLocalDpi xmlns:a14="http://schemas.microsoft.com/office/drawing/2010/main" val="0"/>
+              </a:ext>
+            </a:extLst>
+          </a:blip>
+          <a:srcRect/>
+          <a:stretch>
+            <a:fillRect/>
+          </a:stretch>
+        </p:blipFill>
+        <p:spPr bwMode="auto">
+          <a:xfrm>
+            <a:off x="6390367" y="4933454"/>
+            <a:ext cx="5528007" cy="1726011"/>
+          </a:xfrm>
+          <a:prstGeom prst="rect">
+            <a:avLst/>
+          </a:prstGeom>
+          <a:noFill/>
+          <a:extLst>
+            <a:ext uri="{909E8E84-426E-40DD-AFC4-6F175D3DCCD1}">
+              <a14:hiddenFill xmlns:a14="http://schemas.microsoft.com/office/drawing/2010/main">
+                <a:solidFill>
+                  <a:srgbClr val="FFFFFF"/>
+                </a:solidFill>
+              </a14:hiddenFill>
+            </a:ext>
+          </a:extLst>
+        </p:spPr>
+      </p:pic>
+      <p:pic>
+        <p:nvPicPr>
+          <p:cNvPr id="7" name="Picture 8">
+            <a:extLst>
+              <a:ext uri="{FF2B5EF4-FFF2-40B4-BE49-F238E27FC236}">
+                <a16:creationId xmlns:a16="http://schemas.microsoft.com/office/drawing/2014/main" id="{B06905D7-D972-1816-3D45-1AAC8CA8E158}"/>
+              </a:ext>
+            </a:extLst>
+          </p:cNvPr>
+          <p:cNvPicPr>
+            <a:picLocks noChangeAspect="1" noChangeArrowheads="1"/>
+          </p:cNvPicPr>
+          <p:nvPr/>
+        </p:nvPicPr>
+        <p:blipFill>
+          <a:blip r:embed="rId4">
+            <a:extLst>
+              <a:ext uri="{28A0092B-C50C-407E-A947-70E740481C1C}">
+                <a14:useLocalDpi xmlns:a14="http://schemas.microsoft.com/office/drawing/2010/main" val="0"/>
+              </a:ext>
+            </a:extLst>
+          </a:blip>
+          <a:srcRect/>
+          <a:stretch>
+            <a:fillRect/>
+          </a:stretch>
+        </p:blipFill>
+        <p:spPr bwMode="auto">
+          <a:xfrm>
+            <a:off x="6772452" y="4815131"/>
+            <a:ext cx="5333210" cy="1544633"/>
+          </a:xfrm>
+          <a:prstGeom prst="rect">
+            <a:avLst/>
+          </a:prstGeom>
+          <a:noFill/>
+          <a:extLst>
+            <a:ext uri="{909E8E84-426E-40DD-AFC4-6F175D3DCCD1}">
+              <a14:hiddenFill xmlns:a14="http://schemas.microsoft.com/office/drawing/2010/main">
+                <a:solidFill>
+                  <a:srgbClr val="FFFFFF"/>
+                </a:solidFill>
+              </a14:hiddenFill>
+            </a:ext>
+          </a:extLst>
+        </p:spPr>
+      </p:pic>
+    </p:spTree>
+    <p:extLst>
+      <p:ext uri="{BB962C8B-B14F-4D97-AF65-F5344CB8AC3E}">
+        <p14:creationId xmlns:p14="http://schemas.microsoft.com/office/powerpoint/2010/main" val="3922066897"/>
+      </p:ext>
+    </p:extLst>
+  </p:cSld>
+  <p:clrMapOvr>
+    <a:masterClrMapping/>
+  </p:clrMapOvr>
+  <p:timing>
+    <p:tnLst>
+      <p:par>
+        <p:cTn id="1" dur="indefinite" restart="never" nodeType="tmRoot"/>
+      </p:par>
+    </p:tnLst>
+  </p:timing>
+</p:sld>
+</file>
+
+<file path=ppt/slides/slide20.xml><?xml version="1.0" encoding="utf-8"?>
+<p:sld xmlns:a="http://schemas.openxmlformats.org/drawingml/2006/main" xmlns:r="http://schemas.openxmlformats.org/officeDocument/2006/relationships" xmlns:p="http://schemas.openxmlformats.org/presentationml/2006/main">
+  <p:cSld>
+    <p:spTree>
+      <p:nvGrpSpPr>
+        <p:cNvPr id="1" name=""/>
+        <p:cNvGrpSpPr/>
+        <p:nvPr/>
+      </p:nvGrpSpPr>
+      <p:grpSpPr>
+        <a:xfrm>
+          <a:off x="0" y="0"/>
+          <a:ext cx="0" cy="0"/>
+          <a:chOff x="0" y="0"/>
+          <a:chExt cx="0" cy="0"/>
+        </a:xfrm>
+      </p:grpSpPr>
+      <p:sp>
+        <p:nvSpPr>
           <p:cNvPr id="2" name="Заголовок 1"/>
           <p:cNvSpPr>
             <a:spLocks noGrp="1"/>
@@ -13689,1148 +16936,7 @@
 </p:sld>
 </file>
 
-<file path=ppt/slides/slide18.xml><?xml version="1.0" encoding="utf-8"?>
-<p:sld xmlns:a="http://schemas.openxmlformats.org/drawingml/2006/main" xmlns:r="http://schemas.openxmlformats.org/officeDocument/2006/relationships" xmlns:p="http://schemas.openxmlformats.org/presentationml/2006/main">
-  <p:cSld>
-    <p:spTree>
-      <p:nvGrpSpPr>
-        <p:cNvPr id="1" name=""/>
-        <p:cNvGrpSpPr/>
-        <p:nvPr/>
-      </p:nvGrpSpPr>
-      <p:grpSpPr>
-        <a:xfrm>
-          <a:off x="0" y="0"/>
-          <a:ext cx="0" cy="0"/>
-          <a:chOff x="0" y="0"/>
-          <a:chExt cx="0" cy="0"/>
-        </a:xfrm>
-      </p:grpSpPr>
-      <p:sp>
-        <p:nvSpPr>
-          <p:cNvPr id="2" name="Заголовок 1"/>
-          <p:cNvSpPr>
-            <a:spLocks noGrp="1"/>
-          </p:cNvSpPr>
-          <p:nvPr>
-            <p:ph type="title"/>
-          </p:nvPr>
-        </p:nvSpPr>
-        <p:spPr>
-          <a:xfrm>
-            <a:off x="189571" y="365125"/>
-            <a:ext cx="11164229" cy="749997"/>
-          </a:xfrm>
-        </p:spPr>
-        <p:txBody>
-          <a:bodyPr/>
-          <a:lstStyle/>
-          <a:p>
-            <a:r>
-              <a:rPr lang="ru-RU" dirty="0" smtClean="0"/>
-              <a:t>Некоторые модели </a:t>
-            </a:r>
-            <a:r>
-              <a:rPr lang="ru-RU" dirty="0" err="1" smtClean="0"/>
-              <a:t>трансформеры</a:t>
-            </a:r>
-            <a:endParaRPr lang="ru-RU" dirty="0"/>
-          </a:p>
-        </p:txBody>
-      </p:sp>
-      <p:graphicFrame>
-        <p:nvGraphicFramePr>
-          <p:cNvPr id="4" name="Объект 3"/>
-          <p:cNvGraphicFramePr>
-            <a:graphicFrameLocks noGrp="1"/>
-          </p:cNvGraphicFramePr>
-          <p:nvPr>
-            <p:ph idx="1"/>
-            <p:extLst>
-              <p:ext uri="{D42A27DB-BD31-4B8C-83A1-F6EECF244321}">
-                <p14:modId xmlns:p14="http://schemas.microsoft.com/office/powerpoint/2010/main" val="3763964128"/>
-              </p:ext>
-            </p:extLst>
-          </p:nvPr>
-        </p:nvGraphicFramePr>
-        <p:xfrm>
-          <a:off x="189571" y="1115122"/>
-          <a:ext cx="11654419" cy="5104162"/>
-        </p:xfrm>
-        <a:graphic>
-          <a:graphicData uri="http://schemas.openxmlformats.org/drawingml/2006/table">
-            <a:tbl>
-              <a:tblPr>
-                <a:tableStyleId>{5940675A-B579-460E-94D1-54222C63F5DA}</a:tableStyleId>
-              </a:tblPr>
-              <a:tblGrid>
-                <a:gridCol w="1438507">
-                  <a:extLst>
-                    <a:ext uri="{9D8B030D-6E8A-4147-A177-3AD203B41FA5}">
-                      <a16:colId xmlns:a16="http://schemas.microsoft.com/office/drawing/2014/main" val="3249311741"/>
-                    </a:ext>
-                  </a:extLst>
-                </a:gridCol>
-                <a:gridCol w="1282088">
-                  <a:extLst>
-                    <a:ext uri="{9D8B030D-6E8A-4147-A177-3AD203B41FA5}">
-                      <a16:colId xmlns:a16="http://schemas.microsoft.com/office/drawing/2014/main" val="1989492488"/>
-                    </a:ext>
-                  </a:extLst>
-                </a:gridCol>
-                <a:gridCol w="4661307">
-                  <a:extLst>
-                    <a:ext uri="{9D8B030D-6E8A-4147-A177-3AD203B41FA5}">
-                      <a16:colId xmlns:a16="http://schemas.microsoft.com/office/drawing/2014/main" val="4075952491"/>
-                    </a:ext>
-                  </a:extLst>
-                </a:gridCol>
-                <a:gridCol w="3420228">
-                  <a:extLst>
-                    <a:ext uri="{9D8B030D-6E8A-4147-A177-3AD203B41FA5}">
-                      <a16:colId xmlns:a16="http://schemas.microsoft.com/office/drawing/2014/main" val="1485279407"/>
-                    </a:ext>
-                  </a:extLst>
-                </a:gridCol>
-                <a:gridCol w="852289">
-                  <a:extLst>
-                    <a:ext uri="{9D8B030D-6E8A-4147-A177-3AD203B41FA5}">
-                      <a16:colId xmlns:a16="http://schemas.microsoft.com/office/drawing/2014/main" val="1073697996"/>
-                    </a:ext>
-                  </a:extLst>
-                </a:gridCol>
-              </a:tblGrid>
-              <a:tr h="148576">
-                <a:tc>
-                  <a:txBody>
-                    <a:bodyPr/>
-                    <a:lstStyle/>
-                    <a:p>
-                      <a:r>
-                        <a:rPr lang="ru-RU" sz="2000" dirty="0"/>
-                        <a:t>Модель</a:t>
-                      </a:r>
-                    </a:p>
-                  </a:txBody>
-                  <a:tcPr marL="39201" marR="39201" marT="19601" marB="19601" anchor="ctr"/>
-                </a:tc>
-                <a:tc>
-                  <a:txBody>
-                    <a:bodyPr/>
-                    <a:lstStyle/>
-                    <a:p>
-                      <a:r>
-                        <a:rPr lang="ru-RU" sz="2000" dirty="0" smtClean="0"/>
-                        <a:t>сложность</a:t>
-                      </a:r>
-                      <a:endParaRPr lang="ru-RU" sz="2000" dirty="0"/>
-                    </a:p>
-                  </a:txBody>
-                  <a:tcPr marL="39201" marR="39201" marT="19601" marB="19601" anchor="ctr"/>
-                </a:tc>
-                <a:tc>
-                  <a:txBody>
-                    <a:bodyPr/>
-                    <a:lstStyle/>
-                    <a:p>
-                      <a:r>
-                        <a:rPr lang="ru-RU" sz="2000" dirty="0"/>
-                        <a:t>Ключевые особенности</a:t>
-                      </a:r>
-                    </a:p>
-                  </a:txBody>
-                  <a:tcPr marL="39201" marR="39201" marT="19601" marB="19601" anchor="ctr"/>
-                </a:tc>
-                <a:tc>
-                  <a:txBody>
-                    <a:bodyPr/>
-                    <a:lstStyle/>
-                    <a:p>
-                      <a:r>
-                        <a:rPr lang="ru-RU" sz="2000" dirty="0"/>
-                        <a:t>Применение</a:t>
-                      </a:r>
-                    </a:p>
-                  </a:txBody>
-                  <a:tcPr marL="39201" marR="39201" marT="19601" marB="19601" anchor="ctr"/>
-                </a:tc>
-                <a:tc>
-                  <a:txBody>
-                    <a:bodyPr/>
-                    <a:lstStyle/>
-                    <a:p>
-                      <a:r>
-                        <a:rPr lang="ru-RU" sz="2000" dirty="0"/>
-                        <a:t>Год</a:t>
-                      </a:r>
-                    </a:p>
-                  </a:txBody>
-                  <a:tcPr marL="39201" marR="39201" marT="19601" marB="19601" anchor="ctr"/>
-                </a:tc>
-                <a:extLst>
-                  <a:ext uri="{0D108BD9-81ED-4DB2-BD59-A6C34878D82A}">
-                    <a16:rowId xmlns:a16="http://schemas.microsoft.com/office/drawing/2014/main" val="1286795480"/>
-                  </a:ext>
-                </a:extLst>
-              </a:tr>
-              <a:tr h="144612">
-                <a:tc>
-                  <a:txBody>
-                    <a:bodyPr/>
-                    <a:lstStyle/>
-                    <a:p>
-                      <a:r>
-                        <a:rPr lang="en-US" sz="2000" b="1" dirty="0"/>
-                        <a:t>Vanilla Transformer</a:t>
-                      </a:r>
-                      <a:endParaRPr lang="en-US" sz="2000" dirty="0"/>
-                    </a:p>
-                  </a:txBody>
-                  <a:tcPr marL="23521" marR="23521" marT="11760" marB="11760" anchor="ctr"/>
-                </a:tc>
-                <a:tc>
-                  <a:txBody>
-                    <a:bodyPr/>
-                    <a:lstStyle/>
-                    <a:p>
-                      <a:r>
-                        <a:rPr lang="en-US" sz="2000" dirty="0"/>
-                        <a:t>O(N²)</a:t>
-                      </a:r>
-                    </a:p>
-                  </a:txBody>
-                  <a:tcPr marL="23521" marR="23521" marT="11760" marB="11760" anchor="ctr"/>
-                </a:tc>
-                <a:tc>
-                  <a:txBody>
-                    <a:bodyPr/>
-                    <a:lstStyle/>
-                    <a:p>
-                      <a:r>
-                        <a:rPr lang="ru-RU" sz="2000" dirty="0"/>
-                        <a:t>Стандартная архитектура </a:t>
-                      </a:r>
-                      <a:r>
-                        <a:rPr lang="ru-RU" sz="2000" dirty="0" err="1"/>
-                        <a:t>трансформера</a:t>
-                      </a:r>
-                      <a:endParaRPr lang="ru-RU" sz="2000" dirty="0"/>
-                    </a:p>
-                  </a:txBody>
-                  <a:tcPr marL="23521" marR="23521" marT="11760" marB="11760" anchor="ctr"/>
-                </a:tc>
-                <a:tc>
-                  <a:txBody>
-                    <a:bodyPr/>
-                    <a:lstStyle/>
-                    <a:p>
-                      <a:r>
-                        <a:rPr lang="en-US" sz="2000" dirty="0" smtClean="0"/>
-                        <a:t>Base</a:t>
-                      </a:r>
-                      <a:r>
-                        <a:rPr lang="en-US" sz="2000" baseline="0" dirty="0" smtClean="0"/>
-                        <a:t> line</a:t>
-                      </a:r>
-                      <a:endParaRPr lang="ru-RU" sz="2000" dirty="0"/>
-                    </a:p>
-                  </a:txBody>
-                  <a:tcPr marL="23521" marR="23521" marT="11760" marB="11760" anchor="ctr"/>
-                </a:tc>
-                <a:tc>
-                  <a:txBody>
-                    <a:bodyPr/>
-                    <a:lstStyle/>
-                    <a:p>
-                      <a:r>
-                        <a:rPr lang="ru-RU" sz="2000" dirty="0"/>
-                        <a:t>2017</a:t>
-                      </a:r>
-                    </a:p>
-                  </a:txBody>
-                  <a:tcPr marL="23521" marR="23521" marT="11760" marB="11760" anchor="ctr"/>
-                </a:tc>
-                <a:extLst>
-                  <a:ext uri="{0D108BD9-81ED-4DB2-BD59-A6C34878D82A}">
-                    <a16:rowId xmlns:a16="http://schemas.microsoft.com/office/drawing/2014/main" val="520311545"/>
-                  </a:ext>
-                </a:extLst>
-              </a:tr>
-              <a:tr h="75278">
-                <a:tc>
-                  <a:txBody>
-                    <a:bodyPr/>
-                    <a:lstStyle/>
-                    <a:p>
-                      <a:r>
-                        <a:rPr lang="en-US" sz="2000" b="1" dirty="0" smtClean="0"/>
-                        <a:t>TFT</a:t>
-                      </a:r>
-                      <a:endParaRPr lang="en-US" sz="2000" b="1" dirty="0"/>
-                    </a:p>
-                  </a:txBody>
-                  <a:tcPr marL="23521" marR="23521" marT="11760" marB="11760" anchor="ctr"/>
-                </a:tc>
-                <a:tc>
-                  <a:txBody>
-                    <a:bodyPr/>
-                    <a:lstStyle/>
-                    <a:p>
-                      <a:pPr marL="0" marR="0" indent="0" algn="l" defTabSz="914400" rtl="0" eaLnBrk="1" fontAlgn="auto" latinLnBrk="0" hangingPunct="1">
-                        <a:lnSpc>
-                          <a:spcPct val="100000"/>
-                        </a:lnSpc>
-                        <a:spcBef>
-                          <a:spcPts val="0"/>
-                        </a:spcBef>
-                        <a:spcAft>
-                          <a:spcPts val="0"/>
-                        </a:spcAft>
-                        <a:buClrTx/>
-                        <a:buSzTx/>
-                        <a:buFontTx/>
-                        <a:buNone/>
-                        <a:tabLst/>
-                        <a:defRPr/>
-                      </a:pPr>
-                      <a:r>
-                        <a:rPr lang="en-US" sz="2000" dirty="0" smtClean="0"/>
-                        <a:t>O(N²)</a:t>
-                      </a:r>
-                    </a:p>
-                  </a:txBody>
-                  <a:tcPr marL="23521" marR="23521" marT="11760" marB="11760" anchor="ctr"/>
-                </a:tc>
-                <a:tc>
-                  <a:txBody>
-                    <a:bodyPr/>
-                    <a:lstStyle/>
-                    <a:p>
-                      <a:r>
-                        <a:rPr lang="ru-RU" sz="2000" b="0" i="0" kern="1200" dirty="0" smtClean="0">
-                          <a:solidFill>
-                            <a:schemeClr val="tx1"/>
-                          </a:solidFill>
-                          <a:effectLst/>
-                          <a:latin typeface="+mn-lt"/>
-                          <a:ea typeface="+mn-ea"/>
-                          <a:cs typeface="+mn-cs"/>
-                        </a:rPr>
-                        <a:t>рекуррентные сети + </a:t>
-                      </a:r>
-                      <a:r>
-                        <a:rPr lang="ru-RU" sz="2000" b="0" i="0" kern="1200" dirty="0" err="1" smtClean="0">
-                          <a:solidFill>
-                            <a:schemeClr val="tx1"/>
-                          </a:solidFill>
-                          <a:effectLst/>
-                          <a:latin typeface="+mn-lt"/>
-                          <a:ea typeface="+mn-ea"/>
-                          <a:cs typeface="+mn-cs"/>
-                        </a:rPr>
-                        <a:t>трансформер</a:t>
-                      </a:r>
-                      <a:r>
-                        <a:rPr lang="en-US" sz="2000" b="0" i="0" kern="1200" dirty="0" smtClean="0">
-                          <a:solidFill>
-                            <a:schemeClr val="tx1"/>
-                          </a:solidFill>
-                          <a:effectLst/>
-                          <a:latin typeface="+mn-lt"/>
-                          <a:ea typeface="+mn-ea"/>
-                          <a:cs typeface="+mn-cs"/>
-                        </a:rPr>
-                        <a:t>,</a:t>
-                      </a:r>
-                      <a:r>
-                        <a:rPr lang="en-US" sz="2000" b="0" i="0" kern="1200" baseline="0" dirty="0" smtClean="0">
-                          <a:solidFill>
-                            <a:schemeClr val="tx1"/>
-                          </a:solidFill>
-                          <a:effectLst/>
-                          <a:latin typeface="+mn-lt"/>
-                          <a:ea typeface="+mn-ea"/>
-                          <a:cs typeface="+mn-cs"/>
-                        </a:rPr>
-                        <a:t> </a:t>
-                      </a:r>
-                      <a:r>
-                        <a:rPr lang="ru-RU" sz="2000" b="0" i="0" kern="1200" baseline="0" dirty="0" err="1" smtClean="0">
-                          <a:solidFill>
-                            <a:schemeClr val="tx1"/>
-                          </a:solidFill>
-                          <a:effectLst/>
-                          <a:latin typeface="+mn-lt"/>
-                          <a:ea typeface="+mn-ea"/>
-                          <a:cs typeface="+mn-cs"/>
-                        </a:rPr>
-                        <a:t>интерпр</a:t>
-                      </a:r>
-                      <a:r>
-                        <a:rPr lang="ru-RU" sz="2000" b="0" i="0" kern="1200" baseline="0" dirty="0" smtClean="0">
-                          <a:solidFill>
-                            <a:schemeClr val="tx1"/>
-                          </a:solidFill>
-                          <a:effectLst/>
-                          <a:latin typeface="+mn-lt"/>
-                          <a:ea typeface="+mn-ea"/>
-                          <a:cs typeface="+mn-cs"/>
-                        </a:rPr>
-                        <a:t>.</a:t>
-                      </a:r>
-                      <a:endParaRPr lang="ru-RU" sz="2000" dirty="0"/>
-                    </a:p>
-                  </a:txBody>
-                  <a:tcPr marL="23521" marR="23521" marT="11760" marB="11760" anchor="ctr"/>
-                </a:tc>
-                <a:tc>
-                  <a:txBody>
-                    <a:bodyPr/>
-                    <a:lstStyle/>
-                    <a:p>
-                      <a:pPr marL="0" marR="0" indent="0" algn="l" defTabSz="914400" rtl="0" eaLnBrk="1" fontAlgn="auto" latinLnBrk="0" hangingPunct="1">
-                        <a:lnSpc>
-                          <a:spcPct val="100000"/>
-                        </a:lnSpc>
-                        <a:spcBef>
-                          <a:spcPts val="0"/>
-                        </a:spcBef>
-                        <a:spcAft>
-                          <a:spcPts val="0"/>
-                        </a:spcAft>
-                        <a:buClrTx/>
-                        <a:buSzTx/>
-                        <a:buFontTx/>
-                        <a:buNone/>
-                        <a:tabLst/>
-                        <a:defRPr/>
-                      </a:pPr>
-                      <a:r>
-                        <a:rPr lang="en-US" sz="2000" dirty="0" err="1" smtClean="0"/>
-                        <a:t>Heterogen</a:t>
-                      </a:r>
-                      <a:r>
-                        <a:rPr lang="en-US" sz="2000" dirty="0" smtClean="0"/>
-                        <a:t> data</a:t>
-                      </a:r>
-                      <a:r>
-                        <a:rPr lang="en-US" sz="2000" baseline="0" dirty="0" smtClean="0"/>
-                        <a:t>, </a:t>
-                      </a:r>
-                      <a:r>
-                        <a:rPr lang="en-US" sz="2000" baseline="0" dirty="0" err="1" smtClean="0"/>
-                        <a:t>exogen</a:t>
-                      </a:r>
-                      <a:endParaRPr lang="ru-RU" sz="2000" dirty="0" smtClean="0"/>
-                    </a:p>
-                  </a:txBody>
-                  <a:tcPr marL="23521" marR="23521" marT="11760" marB="11760" anchor="ctr"/>
-                </a:tc>
-                <a:tc>
-                  <a:txBody>
-                    <a:bodyPr/>
-                    <a:lstStyle/>
-                    <a:p>
-                      <a:r>
-                        <a:rPr lang="en-US" sz="2000" dirty="0" smtClean="0"/>
-                        <a:t>2022</a:t>
-                      </a:r>
-                      <a:endParaRPr lang="ru-RU" sz="2000" dirty="0"/>
-                    </a:p>
-                  </a:txBody>
-                  <a:tcPr marL="23521" marR="23521" marT="11760" marB="11760" anchor="ctr"/>
-                </a:tc>
-                <a:extLst>
-                  <a:ext uri="{0D108BD9-81ED-4DB2-BD59-A6C34878D82A}">
-                    <a16:rowId xmlns:a16="http://schemas.microsoft.com/office/drawing/2014/main" val="1960122855"/>
-                  </a:ext>
-                </a:extLst>
-              </a:tr>
-              <a:tr h="75278">
-                <a:tc>
-                  <a:txBody>
-                    <a:bodyPr/>
-                    <a:lstStyle/>
-                    <a:p>
-                      <a:r>
-                        <a:rPr lang="en-US" sz="2000" b="1" dirty="0"/>
-                        <a:t>Informer</a:t>
-                      </a:r>
-                      <a:endParaRPr lang="en-US" sz="2000" dirty="0"/>
-                    </a:p>
-                  </a:txBody>
-                  <a:tcPr marL="23521" marR="23521" marT="11760" marB="11760" anchor="ctr"/>
-                </a:tc>
-                <a:tc>
-                  <a:txBody>
-                    <a:bodyPr/>
-                    <a:lstStyle/>
-                    <a:p>
-                      <a:r>
-                        <a:rPr lang="en-US" sz="2000" dirty="0"/>
-                        <a:t>O(N log N)</a:t>
-                      </a:r>
-                    </a:p>
-                  </a:txBody>
-                  <a:tcPr marL="23521" marR="23521" marT="11760" marB="11760" anchor="ctr"/>
-                </a:tc>
-                <a:tc>
-                  <a:txBody>
-                    <a:bodyPr/>
-                    <a:lstStyle/>
-                    <a:p>
-                      <a:r>
-                        <a:rPr lang="en-US" sz="2000" dirty="0" err="1"/>
-                        <a:t>ProbSparse</a:t>
-                      </a:r>
-                      <a:r>
-                        <a:rPr lang="en-US" sz="2000" dirty="0"/>
-                        <a:t> </a:t>
-                      </a:r>
-                      <a:r>
-                        <a:rPr lang="ru-RU" sz="2000" dirty="0"/>
-                        <a:t>внимание, генеративный декодер</a:t>
-                      </a:r>
-                    </a:p>
-                  </a:txBody>
-                  <a:tcPr marL="23521" marR="23521" marT="11760" marB="11760" anchor="ctr"/>
-                </a:tc>
-                <a:tc>
-                  <a:txBody>
-                    <a:bodyPr/>
-                    <a:lstStyle/>
-                    <a:p>
-                      <a:pPr marL="0" marR="0" indent="0" algn="l" defTabSz="914400" rtl="0" eaLnBrk="1" fontAlgn="auto" latinLnBrk="0" hangingPunct="1">
-                        <a:lnSpc>
-                          <a:spcPct val="100000"/>
-                        </a:lnSpc>
-                        <a:spcBef>
-                          <a:spcPts val="0"/>
-                        </a:spcBef>
-                        <a:spcAft>
-                          <a:spcPts val="0"/>
-                        </a:spcAft>
-                        <a:buClrTx/>
-                        <a:buSzTx/>
-                        <a:buFontTx/>
-                        <a:buNone/>
-                        <a:tabLst/>
-                        <a:defRPr/>
-                      </a:pPr>
-                      <a:r>
-                        <a:rPr lang="en-US" sz="2000" dirty="0" smtClean="0"/>
-                        <a:t>Long</a:t>
-                      </a:r>
-                      <a:r>
-                        <a:rPr lang="en-US" sz="2000" baseline="0" dirty="0" smtClean="0"/>
-                        <a:t> horizon, low </a:t>
-                      </a:r>
-                      <a:r>
-                        <a:rPr lang="en-US" sz="2000" baseline="0" dirty="0" err="1" smtClean="0"/>
-                        <a:t>comput</a:t>
-                      </a:r>
-                      <a:r>
-                        <a:rPr lang="en-US" sz="2000" baseline="0" dirty="0" smtClean="0"/>
-                        <a:t>. require</a:t>
-                      </a:r>
-                      <a:endParaRPr lang="ru-RU" sz="2000" dirty="0" smtClean="0"/>
-                    </a:p>
-                  </a:txBody>
-                  <a:tcPr marL="23521" marR="23521" marT="11760" marB="11760" anchor="ctr"/>
-                </a:tc>
-                <a:tc>
-                  <a:txBody>
-                    <a:bodyPr/>
-                    <a:lstStyle/>
-                    <a:p>
-                      <a:r>
-                        <a:rPr lang="ru-RU" sz="2000" dirty="0"/>
-                        <a:t>2021</a:t>
-                      </a:r>
-                    </a:p>
-                  </a:txBody>
-                  <a:tcPr marL="23521" marR="23521" marT="11760" marB="11760" anchor="ctr"/>
-                </a:tc>
-                <a:extLst>
-                  <a:ext uri="{0D108BD9-81ED-4DB2-BD59-A6C34878D82A}">
-                    <a16:rowId xmlns:a16="http://schemas.microsoft.com/office/drawing/2014/main" val="308783238"/>
-                  </a:ext>
-                </a:extLst>
-              </a:tr>
-              <a:tr h="75278">
-                <a:tc>
-                  <a:txBody>
-                    <a:bodyPr/>
-                    <a:lstStyle/>
-                    <a:p>
-                      <a:r>
-                        <a:rPr lang="en-US" sz="2000" b="1" dirty="0" err="1"/>
-                        <a:t>Autoformer</a:t>
-                      </a:r>
-                      <a:endParaRPr lang="en-US" sz="2000" dirty="0"/>
-                    </a:p>
-                  </a:txBody>
-                  <a:tcPr marL="23521" marR="23521" marT="11760" marB="11760" anchor="ctr"/>
-                </a:tc>
-                <a:tc>
-                  <a:txBody>
-                    <a:bodyPr/>
-                    <a:lstStyle/>
-                    <a:p>
-                      <a:r>
-                        <a:rPr lang="en-US" sz="2000"/>
-                        <a:t>O(N log N)</a:t>
-                      </a:r>
-                    </a:p>
-                  </a:txBody>
-                  <a:tcPr marL="23521" marR="23521" marT="11760" marB="11760" anchor="ctr"/>
-                </a:tc>
-                <a:tc>
-                  <a:txBody>
-                    <a:bodyPr/>
-                    <a:lstStyle/>
-                    <a:p>
-                      <a:r>
-                        <a:rPr lang="ru-RU" sz="2000" dirty="0"/>
-                        <a:t>Авто-корреляция, декомпозиция сезон-тренд</a:t>
-                      </a:r>
-                    </a:p>
-                  </a:txBody>
-                  <a:tcPr marL="23521" marR="23521" marT="11760" marB="11760" anchor="ctr"/>
-                </a:tc>
-                <a:tc>
-                  <a:txBody>
-                    <a:bodyPr/>
-                    <a:lstStyle/>
-                    <a:p>
-                      <a:pPr marL="0" marR="0" indent="0" algn="l" defTabSz="914400" rtl="0" eaLnBrk="1" fontAlgn="auto" latinLnBrk="0" hangingPunct="1">
-                        <a:lnSpc>
-                          <a:spcPct val="100000"/>
-                        </a:lnSpc>
-                        <a:spcBef>
-                          <a:spcPts val="0"/>
-                        </a:spcBef>
-                        <a:spcAft>
-                          <a:spcPts val="0"/>
-                        </a:spcAft>
-                        <a:buClrTx/>
-                        <a:buSzTx/>
-                        <a:buFontTx/>
-                        <a:buNone/>
-                        <a:tabLst/>
-                        <a:defRPr/>
-                      </a:pPr>
-                      <a:r>
-                        <a:rPr lang="en-US" sz="2000" dirty="0" smtClean="0"/>
-                        <a:t>Long</a:t>
-                      </a:r>
-                      <a:r>
-                        <a:rPr lang="en-US" sz="2000" baseline="0" dirty="0" smtClean="0"/>
-                        <a:t> horizon, complex patterns</a:t>
-                      </a:r>
-                      <a:endParaRPr lang="ru-RU" sz="2000" dirty="0" smtClean="0"/>
-                    </a:p>
-                  </a:txBody>
-                  <a:tcPr marL="23521" marR="23521" marT="11760" marB="11760" anchor="ctr"/>
-                </a:tc>
-                <a:tc>
-                  <a:txBody>
-                    <a:bodyPr/>
-                    <a:lstStyle/>
-                    <a:p>
-                      <a:r>
-                        <a:rPr lang="ru-RU" sz="2000" dirty="0"/>
-                        <a:t>2021</a:t>
-                      </a:r>
-                    </a:p>
-                  </a:txBody>
-                  <a:tcPr marL="23521" marR="23521" marT="11760" marB="11760" anchor="ctr"/>
-                </a:tc>
-                <a:extLst>
-                  <a:ext uri="{0D108BD9-81ED-4DB2-BD59-A6C34878D82A}">
-                    <a16:rowId xmlns:a16="http://schemas.microsoft.com/office/drawing/2014/main" val="3704454812"/>
-                  </a:ext>
-                </a:extLst>
-              </a:tr>
-              <a:tr h="144612">
-                <a:tc>
-                  <a:txBody>
-                    <a:bodyPr/>
-                    <a:lstStyle/>
-                    <a:p>
-                      <a:r>
-                        <a:rPr lang="en-US" sz="2000" b="1" dirty="0" err="1"/>
-                        <a:t>PatchTST</a:t>
-                      </a:r>
-                      <a:endParaRPr lang="en-US" sz="2000" dirty="0"/>
-                    </a:p>
-                  </a:txBody>
-                  <a:tcPr marL="23521" marR="23521" marT="11760" marB="11760" anchor="ctr"/>
-                </a:tc>
-                <a:tc>
-                  <a:txBody>
-                    <a:bodyPr/>
-                    <a:lstStyle/>
-                    <a:p>
-                      <a:r>
-                        <a:rPr lang="en-US" sz="2000" dirty="0"/>
-                        <a:t>O(N)</a:t>
-                      </a:r>
-                    </a:p>
-                  </a:txBody>
-                  <a:tcPr marL="23521" marR="23521" marT="11760" marB="11760" anchor="ctr"/>
-                </a:tc>
-                <a:tc>
-                  <a:txBody>
-                    <a:bodyPr/>
-                    <a:lstStyle/>
-                    <a:p>
-                      <a:r>
-                        <a:rPr lang="ru-RU" sz="2000" dirty="0" err="1"/>
-                        <a:t>Патч</a:t>
-                      </a:r>
-                      <a:r>
-                        <a:rPr lang="ru-RU" sz="2000" dirty="0"/>
-                        <a:t>-сегментация, канально-независимое обучение</a:t>
-                      </a:r>
-                    </a:p>
-                  </a:txBody>
-                  <a:tcPr marL="23521" marR="23521" marT="11760" marB="11760" anchor="ctr"/>
-                </a:tc>
-                <a:tc>
-                  <a:txBody>
-                    <a:bodyPr/>
-                    <a:lstStyle/>
-                    <a:p>
-                      <a:pPr marL="0" marR="0" indent="0" algn="l" defTabSz="914400" rtl="0" eaLnBrk="1" fontAlgn="auto" latinLnBrk="0" hangingPunct="1">
-                        <a:lnSpc>
-                          <a:spcPct val="100000"/>
-                        </a:lnSpc>
-                        <a:spcBef>
-                          <a:spcPts val="0"/>
-                        </a:spcBef>
-                        <a:spcAft>
-                          <a:spcPts val="0"/>
-                        </a:spcAft>
-                        <a:buClrTx/>
-                        <a:buSzTx/>
-                        <a:buFontTx/>
-                        <a:buNone/>
-                        <a:tabLst/>
-                        <a:defRPr/>
-                      </a:pPr>
-                      <a:r>
-                        <a:rPr lang="en-US" sz="2000" dirty="0" smtClean="0"/>
-                        <a:t>Long</a:t>
-                      </a:r>
-                      <a:r>
-                        <a:rPr lang="en-US" sz="2000" baseline="0" dirty="0" smtClean="0"/>
-                        <a:t> horizon, multivariate</a:t>
-                      </a:r>
-                      <a:endParaRPr lang="ru-RU" sz="2000" dirty="0" smtClean="0"/>
-                    </a:p>
-                  </a:txBody>
-                  <a:tcPr marL="23521" marR="23521" marT="11760" marB="11760" anchor="ctr"/>
-                </a:tc>
-                <a:tc>
-                  <a:txBody>
-                    <a:bodyPr/>
-                    <a:lstStyle/>
-                    <a:p>
-                      <a:r>
-                        <a:rPr lang="ru-RU" sz="2000" dirty="0"/>
-                        <a:t>2023</a:t>
-                      </a:r>
-                    </a:p>
-                  </a:txBody>
-                  <a:tcPr marL="23521" marR="23521" marT="11760" marB="11760" anchor="ctr"/>
-                </a:tc>
-                <a:extLst>
-                  <a:ext uri="{0D108BD9-81ED-4DB2-BD59-A6C34878D82A}">
-                    <a16:rowId xmlns:a16="http://schemas.microsoft.com/office/drawing/2014/main" val="3302619383"/>
-                  </a:ext>
-                </a:extLst>
-              </a:tr>
-              <a:tr h="144612">
-                <a:tc>
-                  <a:txBody>
-                    <a:bodyPr/>
-                    <a:lstStyle/>
-                    <a:p>
-                      <a:r>
-                        <a:rPr lang="en-US" sz="2000" b="1" dirty="0" err="1"/>
-                        <a:t>iTransformer</a:t>
-                      </a:r>
-                      <a:endParaRPr lang="en-US" sz="2000" dirty="0"/>
-                    </a:p>
-                  </a:txBody>
-                  <a:tcPr marL="23521" marR="23521" marT="11760" marB="11760" anchor="ctr"/>
-                </a:tc>
-                <a:tc>
-                  <a:txBody>
-                    <a:bodyPr/>
-                    <a:lstStyle/>
-                    <a:p>
-                      <a:r>
-                        <a:rPr lang="en-US" sz="2000" dirty="0" smtClean="0"/>
-                        <a:t>O(N²)</a:t>
-                      </a:r>
-                      <a:endParaRPr lang="en-US" sz="2000" dirty="0"/>
-                    </a:p>
-                  </a:txBody>
-                  <a:tcPr marL="23521" marR="23521" marT="11760" marB="11760" anchor="ctr"/>
-                </a:tc>
-                <a:tc>
-                  <a:txBody>
-                    <a:bodyPr/>
-                    <a:lstStyle/>
-                    <a:p>
-                      <a:r>
-                        <a:rPr lang="ru-RU" sz="2000" dirty="0"/>
-                        <a:t>Инвертированная архитектура, переменные как </a:t>
-                      </a:r>
-                      <a:r>
-                        <a:rPr lang="ru-RU" sz="2000" dirty="0" err="1" smtClean="0"/>
-                        <a:t>патчи</a:t>
-                      </a:r>
-                      <a:endParaRPr lang="ru-RU" sz="2000" dirty="0"/>
-                    </a:p>
-                  </a:txBody>
-                  <a:tcPr marL="23521" marR="23521" marT="11760" marB="11760" anchor="ctr"/>
-                </a:tc>
-                <a:tc>
-                  <a:txBody>
-                    <a:bodyPr/>
-                    <a:lstStyle/>
-                    <a:p>
-                      <a:r>
-                        <a:rPr lang="ru-RU" sz="2000" dirty="0"/>
-                        <a:t>Многомерное прогнозирование</a:t>
-                      </a:r>
-                    </a:p>
-                  </a:txBody>
-                  <a:tcPr marL="23521" marR="23521" marT="11760" marB="11760" anchor="ctr"/>
-                </a:tc>
-                <a:tc>
-                  <a:txBody>
-                    <a:bodyPr/>
-                    <a:lstStyle/>
-                    <a:p>
-                      <a:r>
-                        <a:rPr lang="ru-RU" sz="2000" dirty="0"/>
-                        <a:t>2024</a:t>
-                      </a:r>
-                    </a:p>
-                  </a:txBody>
-                  <a:tcPr marL="23521" marR="23521" marT="11760" marB="11760" anchor="ctr"/>
-                </a:tc>
-                <a:extLst>
-                  <a:ext uri="{0D108BD9-81ED-4DB2-BD59-A6C34878D82A}">
-                    <a16:rowId xmlns:a16="http://schemas.microsoft.com/office/drawing/2014/main" val="3557155647"/>
-                  </a:ext>
-                </a:extLst>
-              </a:tr>
-              <a:tr h="144612">
-                <a:tc>
-                  <a:txBody>
-                    <a:bodyPr/>
-                    <a:lstStyle/>
-                    <a:p>
-                      <a:r>
-                        <a:rPr lang="en-US" sz="2000" b="1" dirty="0" err="1"/>
-                        <a:t>TimeMixer</a:t>
-                      </a:r>
-                      <a:endParaRPr lang="en-US" sz="2000" dirty="0"/>
-                    </a:p>
-                  </a:txBody>
-                  <a:tcPr marL="23521" marR="23521" marT="11760" marB="11760" anchor="ctr"/>
-                </a:tc>
-                <a:tc>
-                  <a:txBody>
-                    <a:bodyPr/>
-                    <a:lstStyle/>
-                    <a:p>
-                      <a:r>
-                        <a:rPr lang="en-US" sz="2000" dirty="0"/>
-                        <a:t>O(N)</a:t>
-                      </a:r>
-                    </a:p>
-                  </a:txBody>
-                  <a:tcPr marL="23521" marR="23521" marT="11760" marB="11760" anchor="ctr"/>
-                </a:tc>
-                <a:tc>
-                  <a:txBody>
-                    <a:bodyPr/>
-                    <a:lstStyle/>
-                    <a:p>
-                      <a:r>
-                        <a:rPr lang="ru-RU" sz="2000" dirty="0"/>
-                        <a:t>Декомпозируемое многомасштабное </a:t>
-                      </a:r>
-                      <a:r>
-                        <a:rPr lang="ru-RU" sz="2000" dirty="0" smtClean="0"/>
-                        <a:t>смешивание</a:t>
-                      </a:r>
-                      <a:r>
-                        <a:rPr lang="en-US" sz="2000" dirty="0" smtClean="0"/>
-                        <a:t> (</a:t>
-                      </a:r>
-                      <a:r>
-                        <a:rPr lang="ru-RU" sz="2000" b="1" dirty="0" smtClean="0"/>
-                        <a:t>Миксер</a:t>
-                      </a:r>
-                      <a:r>
-                        <a:rPr lang="ru-RU" sz="2000" b="1" baseline="0" dirty="0" smtClean="0"/>
-                        <a:t>, не </a:t>
-                      </a:r>
-                      <a:r>
-                        <a:rPr lang="ru-RU" sz="2000" b="1" baseline="0" dirty="0" err="1" smtClean="0"/>
-                        <a:t>трансформер</a:t>
-                      </a:r>
-                      <a:r>
-                        <a:rPr lang="ru-RU" sz="2000" baseline="0" dirty="0" smtClean="0"/>
-                        <a:t>!)</a:t>
-                      </a:r>
-                      <a:endParaRPr lang="ru-RU" sz="2000" dirty="0"/>
-                    </a:p>
-                  </a:txBody>
-                  <a:tcPr marL="23521" marR="23521" marT="11760" marB="11760" anchor="ctr"/>
-                </a:tc>
-                <a:tc>
-                  <a:txBody>
-                    <a:bodyPr/>
-                    <a:lstStyle/>
-                    <a:p>
-                      <a:r>
-                        <a:rPr lang="ru-RU" sz="2000" dirty="0"/>
-                        <a:t>Универсальный анализ временных рядов</a:t>
-                      </a:r>
-                    </a:p>
-                  </a:txBody>
-                  <a:tcPr marL="23521" marR="23521" marT="11760" marB="11760" anchor="ctr"/>
-                </a:tc>
-                <a:tc>
-                  <a:txBody>
-                    <a:bodyPr/>
-                    <a:lstStyle/>
-                    <a:p>
-                      <a:r>
-                        <a:rPr lang="ru-RU" sz="2000" dirty="0"/>
-                        <a:t>2024</a:t>
-                      </a:r>
-                    </a:p>
-                  </a:txBody>
-                  <a:tcPr marL="23521" marR="23521" marT="11760" marB="11760" anchor="ctr"/>
-                </a:tc>
-                <a:extLst>
-                  <a:ext uri="{0D108BD9-81ED-4DB2-BD59-A6C34878D82A}">
-                    <a16:rowId xmlns:a16="http://schemas.microsoft.com/office/drawing/2014/main" val="2621592546"/>
-                  </a:ext>
-                </a:extLst>
-              </a:tr>
-              <a:tr h="144612">
-                <a:tc>
-                  <a:txBody>
-                    <a:bodyPr/>
-                    <a:lstStyle/>
-                    <a:p>
-                      <a:r>
-                        <a:rPr lang="en-US" sz="2000" b="1" dirty="0" err="1" smtClean="0"/>
-                        <a:t>Dlinear</a:t>
-                      </a:r>
-                      <a:endParaRPr lang="en-US" sz="2000" b="1" dirty="0"/>
-                    </a:p>
-                  </a:txBody>
-                  <a:tcPr marL="23521" marR="23521" marT="11760" marB="11760" anchor="ctr"/>
-                </a:tc>
-                <a:tc>
-                  <a:txBody>
-                    <a:bodyPr/>
-                    <a:lstStyle/>
-                    <a:p>
-                      <a:r>
-                        <a:rPr lang="en-US" sz="2000" dirty="0" smtClean="0"/>
-                        <a:t>-</a:t>
-                      </a:r>
-                      <a:endParaRPr lang="en-US" sz="2000" dirty="0"/>
-                    </a:p>
-                  </a:txBody>
-                  <a:tcPr marL="23521" marR="23521" marT="11760" marB="11760" anchor="ctr"/>
-                </a:tc>
-                <a:tc>
-                  <a:txBody>
-                    <a:bodyPr/>
-                    <a:lstStyle/>
-                    <a:p>
-                      <a:r>
-                        <a:rPr lang="ru-RU" sz="2000" dirty="0" smtClean="0"/>
-                        <a:t>Не</a:t>
-                      </a:r>
-                      <a:r>
-                        <a:rPr lang="ru-RU" sz="2000" baseline="0" dirty="0" smtClean="0"/>
-                        <a:t> </a:t>
-                      </a:r>
-                      <a:r>
-                        <a:rPr lang="ru-RU" sz="2000" baseline="0" dirty="0" err="1" smtClean="0"/>
-                        <a:t>трансформер</a:t>
-                      </a:r>
-                      <a:endParaRPr lang="ru-RU" sz="2000" dirty="0"/>
-                    </a:p>
-                  </a:txBody>
-                  <a:tcPr marL="23521" marR="23521" marT="11760" marB="11760" anchor="ctr"/>
-                </a:tc>
-                <a:tc>
-                  <a:txBody>
-                    <a:bodyPr/>
-                    <a:lstStyle/>
-                    <a:p>
-                      <a:pPr marL="0" marR="0" indent="0" algn="l" defTabSz="914400" rtl="0" eaLnBrk="1" fontAlgn="auto" latinLnBrk="0" hangingPunct="1">
-                        <a:lnSpc>
-                          <a:spcPct val="100000"/>
-                        </a:lnSpc>
-                        <a:spcBef>
-                          <a:spcPts val="0"/>
-                        </a:spcBef>
-                        <a:spcAft>
-                          <a:spcPts val="0"/>
-                        </a:spcAft>
-                        <a:buClrTx/>
-                        <a:buSzTx/>
-                        <a:buFontTx/>
-                        <a:buNone/>
-                        <a:tabLst/>
-                        <a:defRPr/>
-                      </a:pPr>
-                      <a:r>
-                        <a:rPr lang="en-US" sz="2000" dirty="0" smtClean="0"/>
-                        <a:t>Base</a:t>
-                      </a:r>
-                      <a:r>
-                        <a:rPr lang="en-US" sz="2000" baseline="0" dirty="0" smtClean="0"/>
-                        <a:t> line</a:t>
-                      </a:r>
-                      <a:r>
-                        <a:rPr lang="ru-RU" sz="2000" baseline="0" dirty="0" smtClean="0"/>
-                        <a:t> </a:t>
-                      </a:r>
-                      <a:r>
-                        <a:rPr lang="en-US" sz="2000" baseline="0" dirty="0" smtClean="0"/>
-                        <a:t>for </a:t>
-                      </a:r>
-                      <a:r>
-                        <a:rPr lang="en-US" sz="2000" dirty="0" smtClean="0"/>
-                        <a:t>Long</a:t>
-                      </a:r>
-                      <a:r>
-                        <a:rPr lang="en-US" sz="2000" baseline="0" dirty="0" smtClean="0"/>
-                        <a:t> horizon</a:t>
-                      </a:r>
-                      <a:endParaRPr lang="ru-RU" sz="2000" dirty="0"/>
-                    </a:p>
-                  </a:txBody>
-                  <a:tcPr marL="23521" marR="23521" marT="11760" marB="11760" anchor="ctr"/>
-                </a:tc>
-                <a:tc>
-                  <a:txBody>
-                    <a:bodyPr/>
-                    <a:lstStyle/>
-                    <a:p>
-                      <a:r>
-                        <a:rPr lang="en-US" sz="2000" dirty="0" smtClean="0"/>
-                        <a:t>2023</a:t>
-                      </a:r>
-                      <a:endParaRPr lang="ru-RU" sz="2000" dirty="0"/>
-                    </a:p>
-                  </a:txBody>
-                  <a:tcPr marL="23521" marR="23521" marT="11760" marB="11760" anchor="ctr"/>
-                </a:tc>
-                <a:extLst>
-                  <a:ext uri="{0D108BD9-81ED-4DB2-BD59-A6C34878D82A}">
-                    <a16:rowId xmlns:a16="http://schemas.microsoft.com/office/drawing/2014/main" val="115333207"/>
-                  </a:ext>
-                </a:extLst>
-              </a:tr>
-            </a:tbl>
-          </a:graphicData>
-        </a:graphic>
-      </p:graphicFrame>
-      <p:sp>
-        <p:nvSpPr>
-          <p:cNvPr id="3" name="Прямоугольник 2"/>
-          <p:cNvSpPr/>
-          <p:nvPr/>
-        </p:nvSpPr>
-        <p:spPr>
-          <a:xfrm>
-            <a:off x="110350" y="6519446"/>
-            <a:ext cx="9624664" cy="307777"/>
-          </a:xfrm>
-          <a:prstGeom prst="rect">
-            <a:avLst/>
-          </a:prstGeom>
-        </p:spPr>
-        <p:txBody>
-          <a:bodyPr wrap="square">
-            <a:spAutoFit/>
-          </a:bodyPr>
-          <a:lstStyle/>
-          <a:p>
-            <a:r>
-              <a:rPr lang="ru-RU" sz="1400" dirty="0"/>
-              <a:t>https://readmedium.com/a-brief-history-of-time-series-models-38455c2cd78d</a:t>
-            </a:r>
-          </a:p>
-        </p:txBody>
-      </p:sp>
-      <p:sp>
-        <p:nvSpPr>
-          <p:cNvPr id="5" name="Прямоугольник 4"/>
-          <p:cNvSpPr/>
-          <p:nvPr/>
-        </p:nvSpPr>
-        <p:spPr>
-          <a:xfrm>
-            <a:off x="6527180" y="6519446"/>
-            <a:ext cx="6096000" cy="307777"/>
-          </a:xfrm>
-          <a:prstGeom prst="rect">
-            <a:avLst/>
-          </a:prstGeom>
-        </p:spPr>
-        <p:txBody>
-          <a:bodyPr>
-            <a:spAutoFit/>
-          </a:bodyPr>
-          <a:lstStyle/>
-          <a:p>
-            <a:r>
-              <a:rPr lang="ru-RU" sz="1400" dirty="0"/>
-              <a:t>https://nixtlaverse.nixtla.io/neuralforecast/docs/capabilities/overview.html</a:t>
-            </a:r>
-          </a:p>
-        </p:txBody>
-      </p:sp>
-    </p:spTree>
-    <p:extLst>
-      <p:ext uri="{BB962C8B-B14F-4D97-AF65-F5344CB8AC3E}">
-        <p14:creationId xmlns:p14="http://schemas.microsoft.com/office/powerpoint/2010/main" val="3857978370"/>
-      </p:ext>
-    </p:extLst>
-  </p:cSld>
-  <p:clrMapOvr>
-    <a:masterClrMapping/>
-  </p:clrMapOvr>
-  <p:timing>
-    <p:tnLst>
-      <p:par>
-        <p:cTn id="1" dur="indefinite" restart="never" nodeType="tmRoot"/>
-      </p:par>
-    </p:tnLst>
-  </p:timing>
-</p:sld>
-</file>
-
-<file path=ppt/slides/slide19.xml><?xml version="1.0" encoding="utf-8"?>
+<file path=ppt/slides/slide21.xml><?xml version="1.0" encoding="utf-8"?>
 <p:sld xmlns:a="http://schemas.openxmlformats.org/drawingml/2006/main" xmlns:r="http://schemas.openxmlformats.org/officeDocument/2006/relationships" xmlns:p="http://schemas.openxmlformats.org/presentationml/2006/main">
   <p:cSld>
     <p:spTree>
@@ -14916,13 +17022,13 @@
           <p:nvPr>
             <p:extLst>
               <p:ext uri="{D42A27DB-BD31-4B8C-83A1-F6EECF244321}">
-                <p14:modId xmlns:p14="http://schemas.microsoft.com/office/powerpoint/2010/main" val="921876592"/>
+                <p14:modId xmlns:p14="http://schemas.microsoft.com/office/powerpoint/2010/main" val="191957444"/>
               </p:ext>
             </p:extLst>
           </p:nvPr>
         </p:nvGraphicFramePr>
         <p:xfrm>
-          <a:off x="301083" y="1741345"/>
+          <a:off x="267629" y="1212808"/>
           <a:ext cx="11552663" cy="4203682"/>
         </p:xfrm>
         <a:graphic>
@@ -16091,6 +18197,90 @@
           </a:p>
         </p:txBody>
       </p:sp>
+      <p:sp>
+        <p:nvSpPr>
+          <p:cNvPr id="3" name="Прямоугольник 2"/>
+          <p:cNvSpPr/>
+          <p:nvPr/>
+        </p:nvSpPr>
+        <p:spPr>
+          <a:xfrm>
+            <a:off x="178420" y="6257835"/>
+            <a:ext cx="6096000" cy="276999"/>
+          </a:xfrm>
+          <a:prstGeom prst="rect">
+            <a:avLst/>
+          </a:prstGeom>
+        </p:spPr>
+        <p:txBody>
+          <a:bodyPr>
+            <a:spAutoFit/>
+          </a:bodyPr>
+          <a:lstStyle/>
+          <a:p>
+            <a:r>
+              <a:rPr lang="ru-RU" sz="1200" dirty="0"/>
+              <a:t>https://mingjin.dev/other/kdd24-jin-time-series-foundation-models.pdf</a:t>
+            </a:r>
+          </a:p>
+        </p:txBody>
+      </p:sp>
+      <p:sp>
+        <p:nvSpPr>
+          <p:cNvPr id="8" name="TextBox 7"/>
+          <p:cNvSpPr txBox="1"/>
+          <p:nvPr/>
+        </p:nvSpPr>
+        <p:spPr>
+          <a:xfrm>
+            <a:off x="267629" y="5535016"/>
+            <a:ext cx="8946488" cy="646331"/>
+          </a:xfrm>
+          <a:prstGeom prst="rect">
+            <a:avLst/>
+          </a:prstGeom>
+          <a:noFill/>
+        </p:spPr>
+        <p:txBody>
+          <a:bodyPr wrap="none" rtlCol="0">
+            <a:spAutoFit/>
+          </a:bodyPr>
+          <a:lstStyle/>
+          <a:p>
+            <a:r>
+              <a:rPr lang="en-US" dirty="0"/>
+              <a:t> </a:t>
+            </a:r>
+            <a:r>
+              <a:rPr lang="ru-RU" dirty="0" smtClean="0"/>
+              <a:t>бывают также диффузионные, </a:t>
+            </a:r>
+            <a:r>
+              <a:rPr lang="en-US" dirty="0" smtClean="0"/>
+              <a:t>state-space-, </a:t>
+            </a:r>
+            <a:r>
+              <a:rPr lang="ru-RU" dirty="0" smtClean="0"/>
+              <a:t>и другие типы экспериментальных моделей,</a:t>
+            </a:r>
+          </a:p>
+          <a:p>
+            <a:r>
+              <a:rPr lang="ru-RU" dirty="0" smtClean="0"/>
+              <a:t>Также </a:t>
+            </a:r>
+            <a:r>
+              <a:rPr lang="ru-RU" dirty="0" err="1" smtClean="0"/>
+              <a:t>мультимодальные</a:t>
+            </a:r>
+            <a:r>
+              <a:rPr lang="ru-RU" dirty="0" smtClean="0"/>
+              <a:t>, и другие модели. </a:t>
+            </a:r>
+            <a:endParaRPr lang="ru-RU" dirty="0"/>
+          </a:p>
+        </p:txBody>
+      </p:sp>
     </p:spTree>
     <p:extLst>
       <p:ext uri="{BB962C8B-B14F-4D97-AF65-F5344CB8AC3E}">
@@ -16104,971 +18294,7 @@
 </p:sld>
 </file>
 
-<file path=ppt/slides/slide2.xml><?xml version="1.0" encoding="utf-8"?>
-<p:sld xmlns:a="http://schemas.openxmlformats.org/drawingml/2006/main" xmlns:r="http://schemas.openxmlformats.org/officeDocument/2006/relationships" xmlns:p="http://schemas.openxmlformats.org/presentationml/2006/main">
-  <p:cSld>
-    <p:spTree>
-      <p:nvGrpSpPr>
-        <p:cNvPr id="1" name="">
-          <a:extLst>
-            <a:ext uri="{FF2B5EF4-FFF2-40B4-BE49-F238E27FC236}">
-              <a16:creationId xmlns:a16="http://schemas.microsoft.com/office/drawing/2014/main" id="{B3004F54-9DA4-3637-B7F6-B2C151912744}"/>
-            </a:ext>
-          </a:extLst>
-        </p:cNvPr>
-        <p:cNvGrpSpPr/>
-        <p:nvPr/>
-      </p:nvGrpSpPr>
-      <p:grpSpPr>
-        <a:xfrm>
-          <a:off x="0" y="0"/>
-          <a:ext cx="0" cy="0"/>
-          <a:chOff x="0" y="0"/>
-          <a:chExt cx="0" cy="0"/>
-        </a:xfrm>
-      </p:grpSpPr>
-      <p:sp>
-        <p:nvSpPr>
-          <p:cNvPr id="2" name="Заголовок 1">
-            <a:extLst>
-              <a:ext uri="{FF2B5EF4-FFF2-40B4-BE49-F238E27FC236}">
-                <a16:creationId xmlns:a16="http://schemas.microsoft.com/office/drawing/2014/main" id="{A13DFAFD-0F73-242A-2215-9CF55804E9D3}"/>
-              </a:ext>
-            </a:extLst>
-          </p:cNvPr>
-          <p:cNvSpPr>
-            <a:spLocks noGrp="1"/>
-          </p:cNvSpPr>
-          <p:nvPr>
-            <p:ph type="title"/>
-          </p:nvPr>
-        </p:nvSpPr>
-        <p:spPr>
-          <a:xfrm>
-            <a:off x="258726" y="149031"/>
-            <a:ext cx="11166513" cy="571309"/>
-          </a:xfrm>
-        </p:spPr>
-        <p:txBody>
-          <a:bodyPr>
-            <a:normAutofit fontScale="90000"/>
-          </a:bodyPr>
-          <a:lstStyle/>
-          <a:p>
-            <a:pPr algn="ctr"/>
-            <a:r>
-              <a:rPr lang="en-US" b="1" dirty="0" err="1"/>
-              <a:t>Осо</a:t>
-            </a:r>
-            <a:r>
-              <a:rPr lang="ru-RU" b="1" dirty="0" err="1"/>
-              <a:t>бенности</a:t>
-            </a:r>
-            <a:r>
-              <a:rPr lang="ru-RU" b="1" dirty="0"/>
-              <a:t> </a:t>
-            </a:r>
-            <a:r>
-              <a:rPr lang="en-US" b="1" dirty="0"/>
-              <a:t>RNN</a:t>
-            </a:r>
-            <a:r>
-              <a:rPr lang="ru-RU" b="1" dirty="0"/>
-              <a:t> в режиме </a:t>
-            </a:r>
-            <a:r>
-              <a:rPr lang="ru-RU" dirty="0" err="1"/>
-              <a:t>Seq</a:t>
-            </a:r>
-            <a:r>
-              <a:rPr lang="en-US" dirty="0"/>
-              <a:t>2Seq</a:t>
-            </a:r>
-            <a:endParaRPr lang="ru-RU" b="1" dirty="0"/>
-          </a:p>
-        </p:txBody>
-      </p:sp>
-      <mc:AlternateContent xmlns:mc="http://schemas.openxmlformats.org/markup-compatibility/2006" xmlns:a14="http://schemas.microsoft.com/office/drawing/2010/main">
-        <mc:Choice Requires="a14">
-          <p:sp>
-            <p:nvSpPr>
-              <p:cNvPr id="3" name="Объект 2">
-                <a:extLst>
-                  <a:ext uri="{FF2B5EF4-FFF2-40B4-BE49-F238E27FC236}">
-                    <a16:creationId xmlns:a16="http://schemas.microsoft.com/office/drawing/2014/main" id="{F517ED8B-EC79-48E8-1D5D-73DBF8500212}"/>
-                  </a:ext>
-                </a:extLst>
-              </p:cNvPr>
-              <p:cNvSpPr>
-                <a:spLocks noGrp="1"/>
-              </p:cNvSpPr>
-              <p:nvPr>
-                <p:ph idx="1"/>
-              </p:nvPr>
-            </p:nvSpPr>
-            <p:spPr>
-              <a:xfrm>
-                <a:off x="162862" y="587086"/>
-                <a:ext cx="11942800" cy="5683828"/>
-              </a:xfrm>
-            </p:spPr>
-            <p:txBody>
-              <a:bodyPr>
-                <a:normAutofit/>
-              </a:bodyPr>
-              <a:lstStyle/>
-              <a:p>
-                <a:pPr marL="0" indent="0">
-                  <a:lnSpc>
-                    <a:spcPct val="100000"/>
-                  </a:lnSpc>
-                  <a:spcBef>
-                    <a:spcPts val="500"/>
-                  </a:spcBef>
-                  <a:buNone/>
-                </a:pPr>
-                <a:r>
-                  <a:rPr lang="ru-RU" sz="2200" dirty="0" smtClean="0"/>
-                  <a:t>Пусть требуется предсказать последовательность значений</a:t>
-                </a:r>
-                <a:r>
-                  <a:rPr lang="en-US" sz="2200" dirty="0" smtClean="0"/>
-                  <a:t> </a:t>
-                </a:r>
-                <a:r>
-                  <a:rPr lang="ru-RU" sz="2200" dirty="0" smtClean="0"/>
-                  <a:t>ВР </a:t>
-                </a:r>
-                <a:r>
-                  <a:rPr lang="ru-RU" sz="2200" dirty="0"/>
-                  <a:t>по входным данным</a:t>
-                </a:r>
-              </a:p>
-              <a:p>
-                <a:pPr lvl="1">
-                  <a:lnSpc>
-                    <a:spcPct val="100000"/>
-                  </a:lnSpc>
-                </a:pPr>
-                <a:r>
-                  <a:rPr lang="ru-RU" sz="2200" dirty="0"/>
-                  <a:t>горизонт </a:t>
-                </a:r>
-                <a:r>
-                  <a:rPr lang="en-US" sz="2200" dirty="0"/>
-                  <a:t>H</a:t>
-                </a:r>
-                <a:r>
-                  <a:rPr lang="ru-RU" sz="2200" dirty="0"/>
-                  <a:t> большой – предсказывается итеративно </a:t>
-                </a:r>
-              </a:p>
-              <a:p>
-                <a:pPr lvl="1">
-                  <a:lnSpc>
-                    <a:spcPct val="100000"/>
-                  </a:lnSpc>
-                </a:pPr>
-                <a:r>
-                  <a:rPr lang="ru-RU" sz="2200" dirty="0" smtClean="0"/>
-                  <a:t>Напомним: </a:t>
-                </a:r>
-                <a14:m>
-                  <m:oMath xmlns:m="http://schemas.openxmlformats.org/officeDocument/2006/math">
-                    <m:r>
-                      <m:rPr>
-                        <m:sty m:val="p"/>
-                      </m:rPr>
-                      <a:rPr lang="en-US" sz="2200" i="1" dirty="0">
-                        <a:latin typeface="Cambria Math" panose="02040503050406030204" pitchFamily="18" charset="0"/>
-                      </a:rPr>
-                      <m:t>R</m:t>
-                    </m:r>
-                    <m:r>
-                      <a:rPr lang="en-US" sz="2200" i="1" dirty="0">
-                        <a:latin typeface="Cambria Math" panose="02040503050406030204" pitchFamily="18" charset="0"/>
-                      </a:rPr>
-                      <m:t>𝑁𝑁</m:t>
-                    </m:r>
-                    <m:r>
-                      <a:rPr lang="en-US" sz="2200" i="1" dirty="0">
-                        <a:latin typeface="Cambria Math" panose="02040503050406030204" pitchFamily="18" charset="0"/>
-                      </a:rPr>
-                      <m:t>: </m:t>
-                    </m:r>
-                    <m:sSub>
-                      <m:sSubPr>
-                        <m:ctrlPr>
-                          <a:rPr lang="en-US" sz="2200" i="1" dirty="0">
-                            <a:latin typeface="Cambria Math" panose="02040503050406030204" pitchFamily="18" charset="0"/>
-                          </a:rPr>
-                        </m:ctrlPr>
-                      </m:sSubPr>
-                      <m:e>
-                        <m:r>
-                          <a:rPr lang="ru-RU" sz="2200" i="1" dirty="0">
-                            <a:latin typeface="Cambria Math" panose="02040503050406030204" pitchFamily="18" charset="0"/>
-                          </a:rPr>
-                          <m:t>h</m:t>
-                        </m:r>
-                      </m:e>
-                      <m:sub>
-                        <m:r>
-                          <a:rPr lang="en-US" sz="2200" i="1" dirty="0">
-                            <a:latin typeface="Cambria Math" panose="02040503050406030204" pitchFamily="18" charset="0"/>
-                          </a:rPr>
-                          <m:t>𝑛</m:t>
-                        </m:r>
-                        <m:r>
-                          <a:rPr lang="ru-RU" sz="2200" i="1" dirty="0">
-                            <a:latin typeface="Cambria Math" panose="02040503050406030204" pitchFamily="18" charset="0"/>
-                          </a:rPr>
-                          <m:t>+1</m:t>
-                        </m:r>
-                      </m:sub>
-                    </m:sSub>
-                    <m:r>
-                      <a:rPr lang="ru-RU" sz="2200" i="1" dirty="0">
-                        <a:latin typeface="Cambria Math" panose="02040503050406030204" pitchFamily="18" charset="0"/>
-                      </a:rPr>
-                      <m:t>=</m:t>
-                    </m:r>
-                    <m:r>
-                      <a:rPr lang="en-US" sz="2200" i="1" dirty="0">
-                        <a:latin typeface="Cambria Math" panose="02040503050406030204" pitchFamily="18" charset="0"/>
-                      </a:rPr>
-                      <m:t>𝑓</m:t>
-                    </m:r>
-                    <m:d>
-                      <m:dPr>
-                        <m:ctrlPr>
-                          <a:rPr lang="en-US" sz="2200" i="1" dirty="0">
-                            <a:latin typeface="Cambria Math" panose="02040503050406030204" pitchFamily="18" charset="0"/>
-                          </a:rPr>
-                        </m:ctrlPr>
-                      </m:dPr>
-                      <m:e>
-                        <m:r>
-                          <a:rPr lang="ru-RU" sz="2200" i="1" dirty="0">
-                            <a:latin typeface="Cambria Math" panose="02040503050406030204" pitchFamily="18" charset="0"/>
-                          </a:rPr>
-                          <m:t>𝐴</m:t>
-                        </m:r>
-                        <m:sSub>
-                          <m:sSubPr>
-                            <m:ctrlPr>
-                              <a:rPr lang="en-US" sz="2200" i="1" dirty="0">
-                                <a:latin typeface="Cambria Math" panose="02040503050406030204" pitchFamily="18" charset="0"/>
-                              </a:rPr>
-                            </m:ctrlPr>
-                          </m:sSubPr>
-                          <m:e>
-                            <m:r>
-                              <a:rPr lang="en-US" sz="2200" i="1" dirty="0">
-                                <a:latin typeface="Cambria Math" panose="02040503050406030204" pitchFamily="18" charset="0"/>
-                              </a:rPr>
-                              <m:t>𝑦</m:t>
-                            </m:r>
-                          </m:e>
-                          <m:sub>
-                            <m:r>
-                              <a:rPr lang="en-US" sz="2200" i="1" dirty="0">
-                                <a:latin typeface="Cambria Math" panose="02040503050406030204" pitchFamily="18" charset="0"/>
-                              </a:rPr>
-                              <m:t>𝑛</m:t>
-                            </m:r>
-                          </m:sub>
-                        </m:sSub>
-                        <m:r>
-                          <a:rPr lang="ru-RU" sz="2200" i="1" dirty="0">
-                            <a:latin typeface="Cambria Math" panose="02040503050406030204" pitchFamily="18" charset="0"/>
-                          </a:rPr>
-                          <m:t>+</m:t>
-                        </m:r>
-                        <m:r>
-                          <a:rPr lang="en-US" sz="2200" i="1" dirty="0">
-                            <a:latin typeface="Cambria Math" panose="02040503050406030204" pitchFamily="18" charset="0"/>
-                          </a:rPr>
-                          <m:t>𝐵</m:t>
-                        </m:r>
-                        <m:sSub>
-                          <m:sSubPr>
-                            <m:ctrlPr>
-                              <a:rPr lang="en-US" sz="2200" i="1" dirty="0">
-                                <a:latin typeface="Cambria Math" panose="02040503050406030204" pitchFamily="18" charset="0"/>
-                              </a:rPr>
-                            </m:ctrlPr>
-                          </m:sSubPr>
-                          <m:e>
-                            <m:r>
-                              <a:rPr lang="en-US" sz="2200" i="1" dirty="0">
-                                <a:latin typeface="Cambria Math" panose="02040503050406030204" pitchFamily="18" charset="0"/>
-                              </a:rPr>
-                              <m:t>h</m:t>
-                            </m:r>
-                          </m:e>
-                          <m:sub>
-                            <m:r>
-                              <a:rPr lang="en-US" sz="2200" i="1" dirty="0">
-                                <a:latin typeface="Cambria Math" panose="02040503050406030204" pitchFamily="18" charset="0"/>
-                              </a:rPr>
-                              <m:t>𝑛</m:t>
-                            </m:r>
-                          </m:sub>
-                        </m:sSub>
-                      </m:e>
-                    </m:d>
-                  </m:oMath>
-                </a14:m>
-                <a:r>
-                  <a:rPr lang="ru-RU" sz="2200" dirty="0"/>
-                  <a:t> </a:t>
-                </a:r>
-                <a:r>
-                  <a:rPr lang="en-US" sz="2200" dirty="0"/>
-                  <a:t>;</a:t>
-                </a:r>
-              </a:p>
-              <a:p>
-                <a:pPr lvl="1">
-                  <a:lnSpc>
-                    <a:spcPct val="100000"/>
-                  </a:lnSpc>
-                </a:pPr>
-                <a14:m>
-                  <m:oMath xmlns:m="http://schemas.openxmlformats.org/officeDocument/2006/math">
-                    <m:sSub>
-                      <m:sSubPr>
-                        <m:ctrlPr>
-                          <a:rPr lang="en-US" sz="2200" i="1" dirty="0">
-                            <a:latin typeface="Cambria Math" panose="02040503050406030204" pitchFamily="18" charset="0"/>
-                          </a:rPr>
-                        </m:ctrlPr>
-                      </m:sSubPr>
-                      <m:e>
-                        <m:r>
-                          <a:rPr lang="ru-RU" sz="2200" i="1" dirty="0">
-                            <a:latin typeface="Cambria Math" panose="02040503050406030204" pitchFamily="18" charset="0"/>
-                          </a:rPr>
-                          <m:t>h</m:t>
-                        </m:r>
-                      </m:e>
-                      <m:sub>
-                        <m:r>
-                          <a:rPr lang="en-US" sz="2200" i="1" dirty="0">
-                            <a:latin typeface="Cambria Math" panose="02040503050406030204" pitchFamily="18" charset="0"/>
-                          </a:rPr>
-                          <m:t>𝑛</m:t>
-                        </m:r>
-                        <m:r>
-                          <a:rPr lang="ru-RU" sz="2200" i="1" dirty="0">
-                            <a:latin typeface="Cambria Math" panose="02040503050406030204" pitchFamily="18" charset="0"/>
-                          </a:rPr>
-                          <m:t>+1</m:t>
-                        </m:r>
-                      </m:sub>
-                    </m:sSub>
-                  </m:oMath>
-                </a14:m>
-                <a:r>
-                  <a:rPr lang="en-US" sz="2200" dirty="0"/>
-                  <a:t> –</a:t>
-                </a:r>
-                <a:r>
-                  <a:rPr lang="ru-RU" sz="2200" dirty="0"/>
-                  <a:t> выход слоя (</a:t>
-                </a:r>
-                <a:r>
-                  <a:rPr lang="en-US" sz="2200" dirty="0" err="1"/>
-                  <a:t>ко</a:t>
-                </a:r>
-                <a:r>
-                  <a:rPr lang="ru-RU" sz="2200" dirty="0" err="1"/>
-                  <a:t>нтекст</a:t>
-                </a:r>
-                <a:r>
-                  <a:rPr lang="en-US" sz="2200" dirty="0"/>
-                  <a:t>)</a:t>
-                </a:r>
-                <a:r>
-                  <a:rPr lang="ru-RU" sz="2200" dirty="0"/>
-                  <a:t> для предсказания </a:t>
-                </a:r>
-                <a14:m>
-                  <m:oMath xmlns:m="http://schemas.openxmlformats.org/officeDocument/2006/math">
-                    <m:sSub>
-                      <m:sSubPr>
-                        <m:ctrlPr>
-                          <a:rPr lang="en-US" sz="2200" i="1" dirty="0">
-                            <a:latin typeface="Cambria Math" panose="02040503050406030204" pitchFamily="18" charset="0"/>
-                          </a:rPr>
-                        </m:ctrlPr>
-                      </m:sSubPr>
-                      <m:e>
-                        <m:acc>
-                          <m:accPr>
-                            <m:chr m:val="̂"/>
-                            <m:ctrlPr>
-                              <a:rPr lang="en-US" sz="2200" i="1" dirty="0">
-                                <a:latin typeface="Cambria Math" panose="02040503050406030204" pitchFamily="18" charset="0"/>
-                              </a:rPr>
-                            </m:ctrlPr>
-                          </m:accPr>
-                          <m:e>
-                            <m:r>
-                              <a:rPr lang="en-US" sz="2200" i="1" dirty="0">
-                                <a:latin typeface="Cambria Math" panose="02040503050406030204" pitchFamily="18" charset="0"/>
-                              </a:rPr>
-                              <m:t>𝑦</m:t>
-                            </m:r>
-                          </m:e>
-                        </m:acc>
-                      </m:e>
-                      <m:sub>
-                        <m:r>
-                          <a:rPr lang="en-US" sz="2200" i="1" dirty="0">
-                            <a:latin typeface="Cambria Math" panose="02040503050406030204" pitchFamily="18" charset="0"/>
-                          </a:rPr>
-                          <m:t>𝑛</m:t>
-                        </m:r>
-                        <m:r>
-                          <a:rPr lang="ru-RU" sz="2200" i="1" dirty="0">
-                            <a:latin typeface="Cambria Math" panose="02040503050406030204" pitchFamily="18" charset="0"/>
-                          </a:rPr>
-                          <m:t>+1</m:t>
-                        </m:r>
-                      </m:sub>
-                    </m:sSub>
-                  </m:oMath>
-                </a14:m>
-                <a:endParaRPr lang="en-US" sz="2200" dirty="0"/>
-              </a:p>
-              <a:p>
-                <a:pPr>
-                  <a:lnSpc>
-                    <a:spcPct val="100000"/>
-                  </a:lnSpc>
-                  <a:spcBef>
-                    <a:spcPts val="500"/>
-                  </a:spcBef>
-                </a:pPr>
-                <a:r>
-                  <a:rPr lang="en-US" sz="2200" dirty="0" err="1"/>
-                  <a:t>Если</a:t>
-                </a:r>
-                <a:r>
-                  <a:rPr lang="ru-RU" sz="2200" dirty="0"/>
-                  <a:t> </a:t>
-                </a:r>
-                <a14:m>
-                  <m:oMath xmlns:m="http://schemas.openxmlformats.org/officeDocument/2006/math">
-                    <m:r>
-                      <a:rPr lang="en-US" sz="2200" i="1" dirty="0" smtClean="0">
-                        <a:latin typeface="Cambria Math" panose="02040503050406030204" pitchFamily="18" charset="0"/>
-                      </a:rPr>
-                      <m:t>𝑛</m:t>
-                    </m:r>
-                  </m:oMath>
-                </a14:m>
-                <a:r>
-                  <a:rPr lang="en-US" sz="2200" dirty="0"/>
-                  <a:t> – </a:t>
-                </a:r>
-                <a:r>
-                  <a:rPr lang="ru-RU" sz="2200" dirty="0"/>
-                  <a:t>последнее известное состояние системы, </a:t>
-                </a:r>
-                <a:r>
-                  <a:rPr lang="ru-RU" sz="2200" dirty="0" smtClean="0"/>
-                  <a:t>то </a:t>
-                </a:r>
-                <a14:m>
-                  <m:oMath xmlns:m="http://schemas.openxmlformats.org/officeDocument/2006/math">
-                    <m:sSub>
-                      <m:sSubPr>
-                        <m:ctrlPr>
-                          <a:rPr lang="en-US" sz="2100" b="1" i="1" dirty="0">
-                            <a:latin typeface="Cambria Math" panose="02040503050406030204" pitchFamily="18" charset="0"/>
-                          </a:rPr>
-                        </m:ctrlPr>
-                      </m:sSubPr>
-                      <m:e>
-                        <m:r>
-                          <a:rPr lang="ru-RU" sz="2100" b="1" i="1" dirty="0">
-                            <a:latin typeface="Cambria Math" panose="02040503050406030204" pitchFamily="18" charset="0"/>
-                          </a:rPr>
-                          <m:t>𝒉</m:t>
-                        </m:r>
-                      </m:e>
-                      <m:sub>
-                        <m:r>
-                          <a:rPr lang="en-US" sz="2100" b="1" i="1" dirty="0">
-                            <a:latin typeface="Cambria Math" panose="02040503050406030204" pitchFamily="18" charset="0"/>
-                          </a:rPr>
-                          <m:t>𝒏</m:t>
-                        </m:r>
-                      </m:sub>
-                    </m:sSub>
-                    <m:r>
-                      <a:rPr lang="ru-RU" sz="2100" b="1" i="1" dirty="0" smtClean="0">
-                        <a:latin typeface="Cambria Math" panose="02040503050406030204" pitchFamily="18" charset="0"/>
-                      </a:rPr>
-                      <m:t>− </m:t>
-                    </m:r>
-                  </m:oMath>
-                </a14:m>
-                <a:r>
-                  <a:rPr lang="ru-RU" sz="2100" b="1" dirty="0"/>
-                  <a:t>компактное представление системы</a:t>
-                </a:r>
-                <a:r>
-                  <a:rPr lang="ru-RU" sz="2200" dirty="0"/>
-                  <a:t>.</a:t>
-                </a:r>
-              </a:p>
-              <a:p>
-                <a:pPr marL="0" indent="0">
-                  <a:lnSpc>
-                    <a:spcPct val="100000"/>
-                  </a:lnSpc>
-                  <a:spcBef>
-                    <a:spcPts val="200"/>
-                  </a:spcBef>
-                  <a:buNone/>
-                </a:pPr>
-                <a:r>
-                  <a:rPr lang="ru-RU" sz="2200" b="1" dirty="0"/>
-                  <a:t>Проблемы RNN</a:t>
-                </a:r>
-                <a:endParaRPr lang="en-US" sz="2200" b="1" dirty="0"/>
-              </a:p>
-              <a:p>
-                <a:pPr lvl="1">
-                  <a:lnSpc>
-                    <a:spcPct val="100000"/>
-                  </a:lnSpc>
-                  <a:spcBef>
-                    <a:spcPts val="200"/>
-                  </a:spcBef>
-                </a:pPr>
-                <a:r>
-                  <a:rPr lang="ru-RU" sz="2000" dirty="0"/>
-                  <a:t>Ограниченный контекст из-за </a:t>
-                </a:r>
-                <a:r>
-                  <a:rPr lang="ru-RU" sz="2000" dirty="0" err="1"/>
-                  <a:t>переиспользования</a:t>
-                </a:r>
-                <a:r>
-                  <a:rPr lang="ru-RU" sz="2000" dirty="0"/>
-                  <a:t> единого вектора </a:t>
-                </a:r>
-                <a:r>
-                  <a:rPr lang="ru-RU" sz="2000" dirty="0" smtClean="0"/>
-                  <a:t>скрытых состояний </a:t>
-                </a:r>
-                <a14:m>
-                  <m:oMath xmlns:m="http://schemas.openxmlformats.org/officeDocument/2006/math">
-                    <m:sSub>
-                      <m:sSubPr>
-                        <m:ctrlPr>
-                          <a:rPr lang="en-US" b="1" i="1" dirty="0">
-                            <a:latin typeface="Cambria Math" panose="02040503050406030204" pitchFamily="18" charset="0"/>
-                          </a:rPr>
-                        </m:ctrlPr>
-                      </m:sSubPr>
-                      <m:e>
-                        <m:r>
-                          <a:rPr lang="ru-RU" b="1" i="1" dirty="0">
-                            <a:latin typeface="Cambria Math" panose="02040503050406030204" pitchFamily="18" charset="0"/>
-                          </a:rPr>
-                          <m:t>𝒉</m:t>
-                        </m:r>
-                      </m:e>
-                      <m:sub>
-                        <m:r>
-                          <a:rPr lang="en-US" b="1" i="1" dirty="0">
-                            <a:latin typeface="Cambria Math" panose="02040503050406030204" pitchFamily="18" charset="0"/>
-                          </a:rPr>
-                          <m:t>𝒏</m:t>
-                        </m:r>
-                      </m:sub>
-                    </m:sSub>
-                  </m:oMath>
-                </a14:m>
-                <a:endParaRPr lang="ru-RU" sz="2000" dirty="0"/>
-              </a:p>
-              <a:p>
-                <a:pPr lvl="2">
-                  <a:lnSpc>
-                    <a:spcPct val="100000"/>
-                  </a:lnSpc>
-                  <a:spcBef>
-                    <a:spcPts val="200"/>
-                  </a:spcBef>
-                </a:pPr>
-                <a:r>
-                  <a:rPr lang="ru-RU" dirty="0" smtClean="0"/>
-                  <a:t>Последние</a:t>
-                </a:r>
-                <a:r>
-                  <a:rPr lang="en-US" dirty="0" smtClean="0"/>
-                  <a:t> </a:t>
-                </a:r>
-                <a:r>
-                  <a:rPr lang="ru-RU" dirty="0" smtClean="0"/>
-                  <a:t>известные </a:t>
-                </a:r>
-                <a:r>
-                  <a:rPr lang="ru-RU" dirty="0"/>
-                  <a:t>скрытое </a:t>
-                </a:r>
-                <a:r>
-                  <a:rPr lang="ru-RU" dirty="0" smtClean="0"/>
-                  <a:t>состояние </a:t>
-                </a:r>
-                <a14:m>
-                  <m:oMath xmlns:m="http://schemas.openxmlformats.org/officeDocument/2006/math">
-                    <m:sSub>
-                      <m:sSubPr>
-                        <m:ctrlPr>
-                          <a:rPr lang="en-US" sz="1800" b="1" i="1" dirty="0">
-                            <a:latin typeface="Cambria Math" panose="02040503050406030204" pitchFamily="18" charset="0"/>
-                          </a:rPr>
-                        </m:ctrlPr>
-                      </m:sSubPr>
-                      <m:e>
-                        <m:r>
-                          <a:rPr lang="ru-RU" sz="1800" b="1" i="1" dirty="0">
-                            <a:latin typeface="Cambria Math" panose="02040503050406030204" pitchFamily="18" charset="0"/>
-                          </a:rPr>
-                          <m:t>𝒉</m:t>
-                        </m:r>
-                      </m:e>
-                      <m:sub>
-                        <m:r>
-                          <a:rPr lang="en-US" sz="1800" b="1" i="1" dirty="0">
-                            <a:latin typeface="Cambria Math" panose="02040503050406030204" pitchFamily="18" charset="0"/>
-                          </a:rPr>
-                          <m:t>𝒏</m:t>
-                        </m:r>
-                      </m:sub>
-                    </m:sSub>
-                  </m:oMath>
-                </a14:m>
-                <a:r>
-                  <a:rPr lang="ru-RU" dirty="0" smtClean="0"/>
-                  <a:t> и </a:t>
-                </a:r>
-                <a14:m>
-                  <m:oMath xmlns:m="http://schemas.openxmlformats.org/officeDocument/2006/math">
-                    <m:sSub>
-                      <m:sSubPr>
-                        <m:ctrlPr>
-                          <a:rPr lang="en-US" b="0" i="1" dirty="0" smtClean="0">
-                            <a:latin typeface="Cambria Math" panose="02040503050406030204" pitchFamily="18" charset="0"/>
-                          </a:rPr>
-                        </m:ctrlPr>
-                      </m:sSubPr>
-                      <m:e>
-                        <m:r>
-                          <a:rPr lang="en-US" i="1" dirty="0" smtClean="0">
-                            <a:latin typeface="Cambria Math" panose="02040503050406030204" pitchFamily="18" charset="0"/>
-                          </a:rPr>
-                          <m:t>𝑦</m:t>
-                        </m:r>
-                      </m:e>
-                      <m:sub>
-                        <m:r>
-                          <a:rPr lang="en-US" b="0" i="1" dirty="0" smtClean="0">
-                            <a:latin typeface="Cambria Math" panose="02040503050406030204" pitchFamily="18" charset="0"/>
-                          </a:rPr>
-                          <m:t>𝑛</m:t>
-                        </m:r>
-                      </m:sub>
-                    </m:sSub>
-                  </m:oMath>
-                </a14:m>
-                <a:r>
-                  <a:rPr lang="ru-RU" dirty="0" smtClean="0"/>
-                  <a:t> задают </a:t>
-                </a:r>
-                <a:r>
-                  <a:rPr lang="ru-RU" dirty="0"/>
-                  <a:t>все состояния </a:t>
-                </a:r>
-                <a:r>
-                  <a:rPr lang="ru-RU" dirty="0" smtClean="0"/>
-                  <a:t>предсказания</a:t>
-                </a:r>
-              </a:p>
-              <a:p>
-                <a:pPr lvl="3">
-                  <a:lnSpc>
-                    <a:spcPct val="100000"/>
-                  </a:lnSpc>
-                  <a:spcBef>
-                    <a:spcPts val="200"/>
-                  </a:spcBef>
-                </a:pPr>
-                <a:r>
-                  <a:rPr lang="ru-RU" dirty="0"/>
-                  <a:t>Скрытое состояние – это "бутылочное горлышко": вся информация из прошлого сжимается в фиксированный вектор, что приводит к потере деталей</a:t>
-                </a:r>
-                <a:r>
-                  <a:rPr lang="ru-RU" dirty="0" smtClean="0"/>
-                  <a:t>.</a:t>
-                </a:r>
-                <a:endParaRPr lang="ru-RU" dirty="0"/>
-              </a:p>
-              <a:p>
-                <a:pPr lvl="2">
-                  <a:lnSpc>
-                    <a:spcPct val="100000"/>
-                  </a:lnSpc>
-                  <a:spcBef>
-                    <a:spcPts val="200"/>
-                  </a:spcBef>
-                </a:pPr>
-                <a:r>
-                  <a:rPr lang="ru-RU" dirty="0" smtClean="0"/>
-                  <a:t>Ограниченный </a:t>
-                </a:r>
-                <a:r>
-                  <a:rPr lang="ru-RU" dirty="0"/>
-                  <a:t>горизонт предсказаний</a:t>
-                </a:r>
-              </a:p>
-              <a:p>
-                <a:pPr lvl="1">
-                  <a:lnSpc>
-                    <a:spcPct val="100000"/>
-                  </a:lnSpc>
-                  <a:spcBef>
-                    <a:spcPts val="200"/>
-                  </a:spcBef>
-                </a:pPr>
-                <a:r>
-                  <a:rPr lang="ru-RU" sz="2000" dirty="0" smtClean="0"/>
-                  <a:t>Проблема </a:t>
-                </a:r>
-                <a:r>
-                  <a:rPr lang="ru-RU" sz="2000" dirty="0"/>
-                  <a:t>долгого обучения (веса или затухают или взрываются</a:t>
-                </a:r>
-                <a:r>
-                  <a:rPr lang="ru-RU" sz="2000" dirty="0" smtClean="0"/>
-                  <a:t>)</a:t>
-                </a:r>
-                <a:endParaRPr lang="ru-RU" sz="2000" dirty="0"/>
-              </a:p>
-            </p:txBody>
-          </p:sp>
-        </mc:Choice>
-        <mc:Fallback xmlns="">
-          <p:sp>
-            <p:nvSpPr>
-              <p:cNvPr id="3" name="Объект 2">
-                <a:extLst>
-                  <a:ext uri="{FF2B5EF4-FFF2-40B4-BE49-F238E27FC236}">
-                    <a16:creationId xmlns:a16="http://schemas.microsoft.com/office/drawing/2014/main" id="{F517ED8B-EC79-48E8-1D5D-73DBF8500212}"/>
-                  </a:ext>
-                </a:extLst>
-              </p:cNvPr>
-              <p:cNvSpPr>
-                <a:spLocks noGrp="1" noRot="1" noChangeAspect="1" noMove="1" noResize="1" noEditPoints="1" noAdjustHandles="1" noChangeArrowheads="1" noChangeShapeType="1" noTextEdit="1"/>
-              </p:cNvSpPr>
-              <p:nvPr>
-                <p:ph idx="1"/>
-              </p:nvPr>
-            </p:nvSpPr>
-            <p:spPr>
-              <a:xfrm>
-                <a:off x="162862" y="587086"/>
-                <a:ext cx="11942800" cy="5683828"/>
-              </a:xfrm>
-              <a:blipFill>
-                <a:blip r:embed="rId2"/>
-                <a:stretch>
-                  <a:fillRect l="-664" t="-643"/>
-                </a:stretch>
-              </a:blipFill>
-            </p:spPr>
-            <p:txBody>
-              <a:bodyPr/>
-              <a:lstStyle/>
-              <a:p>
-                <a:r>
-                  <a:rPr lang="ru-RU">
-                    <a:noFill/>
-                  </a:rPr>
-                  <a:t> </a:t>
-                </a:r>
-              </a:p>
-            </p:txBody>
-          </p:sp>
-        </mc:Fallback>
-      </mc:AlternateContent>
-      <p:sp>
-        <p:nvSpPr>
-          <p:cNvPr id="4" name="AutoShape 2">
-            <a:extLst>
-              <a:ext uri="{FF2B5EF4-FFF2-40B4-BE49-F238E27FC236}">
-                <a16:creationId xmlns:a16="http://schemas.microsoft.com/office/drawing/2014/main" id="{3CE0A56B-0917-A450-C416-08AAC828BE3C}"/>
-              </a:ext>
-            </a:extLst>
-          </p:cNvPr>
-          <p:cNvSpPr>
-            <a:spLocks noChangeAspect="1" noChangeArrowheads="1"/>
-          </p:cNvSpPr>
-          <p:nvPr/>
-        </p:nvSpPr>
-        <p:spPr bwMode="auto">
-          <a:xfrm>
-            <a:off x="5943600" y="3276600"/>
-            <a:ext cx="304800" cy="304800"/>
-          </a:xfrm>
-          <a:prstGeom prst="rect">
-            <a:avLst/>
-          </a:prstGeom>
-          <a:noFill/>
-          <a:extLst>
-            <a:ext uri="{909E8E84-426E-40DD-AFC4-6F175D3DCCD1}">
-              <a14:hiddenFill xmlns:a14="http://schemas.microsoft.com/office/drawing/2010/main">
-                <a:solidFill>
-                  <a:srgbClr val="FFFFFF"/>
-                </a:solidFill>
-              </a14:hiddenFill>
-            </a:ext>
-          </a:extLst>
-        </p:spPr>
-        <p:txBody>
-          <a:bodyPr vert="horz" wrap="square" lIns="91440" tIns="45720" rIns="91440" bIns="45720" numCol="1" anchor="t" anchorCtr="0" compatLnSpc="1">
-            <a:prstTxWarp prst="textNoShape">
-              <a:avLst/>
-            </a:prstTxWarp>
-          </a:bodyPr>
-          <a:lstStyle/>
-          <a:p>
-            <a:endParaRPr lang="ru-RU"/>
-          </a:p>
-        </p:txBody>
-      </p:sp>
-      <p:pic>
-        <p:nvPicPr>
-          <p:cNvPr id="6" name="Picture 2">
-            <a:extLst>
-              <a:ext uri="{FF2B5EF4-FFF2-40B4-BE49-F238E27FC236}">
-                <a16:creationId xmlns:a16="http://schemas.microsoft.com/office/drawing/2014/main" id="{97720C5C-7990-C77A-277B-D0F34C8589A2}"/>
-              </a:ext>
-            </a:extLst>
-          </p:cNvPr>
-          <p:cNvPicPr>
-            <a:picLocks noChangeAspect="1" noChangeArrowheads="1"/>
-          </p:cNvPicPr>
-          <p:nvPr/>
-        </p:nvPicPr>
-        <p:blipFill>
-          <a:blip r:embed="rId3">
-            <a:extLst>
-              <a:ext uri="{28A0092B-C50C-407E-A947-70E740481C1C}">
-                <a14:useLocalDpi xmlns:a14="http://schemas.microsoft.com/office/drawing/2010/main" val="0"/>
-              </a:ext>
-            </a:extLst>
-          </a:blip>
-          <a:srcRect/>
-          <a:stretch>
-            <a:fillRect/>
-          </a:stretch>
-        </p:blipFill>
-        <p:spPr bwMode="auto">
-          <a:xfrm>
-            <a:off x="6390367" y="4933454"/>
-            <a:ext cx="5528007" cy="1726011"/>
-          </a:xfrm>
-          <a:prstGeom prst="rect">
-            <a:avLst/>
-          </a:prstGeom>
-          <a:noFill/>
-          <a:extLst>
-            <a:ext uri="{909E8E84-426E-40DD-AFC4-6F175D3DCCD1}">
-              <a14:hiddenFill xmlns:a14="http://schemas.microsoft.com/office/drawing/2010/main">
-                <a:solidFill>
-                  <a:srgbClr val="FFFFFF"/>
-                </a:solidFill>
-              </a14:hiddenFill>
-            </a:ext>
-          </a:extLst>
-        </p:spPr>
-      </p:pic>
-      <p:pic>
-        <p:nvPicPr>
-          <p:cNvPr id="7" name="Picture 8">
-            <a:extLst>
-              <a:ext uri="{FF2B5EF4-FFF2-40B4-BE49-F238E27FC236}">
-                <a16:creationId xmlns:a16="http://schemas.microsoft.com/office/drawing/2014/main" id="{B06905D7-D972-1816-3D45-1AAC8CA8E158}"/>
-              </a:ext>
-            </a:extLst>
-          </p:cNvPr>
-          <p:cNvPicPr>
-            <a:picLocks noChangeAspect="1" noChangeArrowheads="1"/>
-          </p:cNvPicPr>
-          <p:nvPr/>
-        </p:nvPicPr>
-        <p:blipFill>
-          <a:blip r:embed="rId4">
-            <a:extLst>
-              <a:ext uri="{28A0092B-C50C-407E-A947-70E740481C1C}">
-                <a14:useLocalDpi xmlns:a14="http://schemas.microsoft.com/office/drawing/2010/main" val="0"/>
-              </a:ext>
-            </a:extLst>
-          </a:blip>
-          <a:srcRect/>
-          <a:stretch>
-            <a:fillRect/>
-          </a:stretch>
-        </p:blipFill>
-        <p:spPr bwMode="auto">
-          <a:xfrm>
-            <a:off x="6772452" y="4815131"/>
-            <a:ext cx="5333210" cy="1544633"/>
-          </a:xfrm>
-          <a:prstGeom prst="rect">
-            <a:avLst/>
-          </a:prstGeom>
-          <a:noFill/>
-          <a:extLst>
-            <a:ext uri="{909E8E84-426E-40DD-AFC4-6F175D3DCCD1}">
-              <a14:hiddenFill xmlns:a14="http://schemas.microsoft.com/office/drawing/2010/main">
-                <a:solidFill>
-                  <a:srgbClr val="FFFFFF"/>
-                </a:solidFill>
-              </a14:hiddenFill>
-            </a:ext>
-          </a:extLst>
-        </p:spPr>
-      </p:pic>
-    </p:spTree>
-    <p:extLst>
-      <p:ext uri="{BB962C8B-B14F-4D97-AF65-F5344CB8AC3E}">
-        <p14:creationId xmlns:p14="http://schemas.microsoft.com/office/powerpoint/2010/main" val="3922066897"/>
-      </p:ext>
-    </p:extLst>
-  </p:cSld>
-  <p:clrMapOvr>
-    <a:masterClrMapping/>
-  </p:clrMapOvr>
-  <p:timing>
-    <p:tnLst>
-      <p:par>
-        <p:cTn id="1" dur="indefinite" restart="never" nodeType="tmRoot"/>
-      </p:par>
-    </p:tnLst>
-  </p:timing>
-</p:sld>
-</file>
-
-<file path=ppt/slides/slide20.xml><?xml version="1.0" encoding="utf-8"?>
+<file path=ppt/slides/slide22.xml><?xml version="1.0" encoding="utf-8"?>
 <p:sld xmlns:a="http://schemas.openxmlformats.org/drawingml/2006/main" xmlns:r="http://schemas.openxmlformats.org/officeDocument/2006/relationships" xmlns:p="http://schemas.openxmlformats.org/presentationml/2006/main">
   <p:cSld>
     <p:spTree>
@@ -17364,7 +18590,7 @@
 </p:sld>
 </file>
 
-<file path=ppt/slides/slide21.xml><?xml version="1.0" encoding="utf-8"?>
+<file path=ppt/slides/slide23.xml><?xml version="1.0" encoding="utf-8"?>
 <p:sld xmlns:a="http://schemas.openxmlformats.org/drawingml/2006/main" xmlns:r="http://schemas.openxmlformats.org/officeDocument/2006/relationships" xmlns:p="http://schemas.openxmlformats.org/presentationml/2006/main" show="0">
   <p:cSld>
     <p:spTree>
@@ -17816,11 +19042,11 @@
   <p:clrMapOvr>
     <a:masterClrMapping/>
   </p:clrMapOvr>
-  <mc:AlternateContent xmlns:mc="http://schemas.openxmlformats.org/markup-compatibility/2006">
-    <mc:Choice xmlns:p14="http://schemas.microsoft.com/office/powerpoint/2010/main" Requires="p14">
+  <mc:AlternateContent xmlns:mc="http://schemas.openxmlformats.org/markup-compatibility/2006" xmlns:p14="http://schemas.microsoft.com/office/powerpoint/2010/main">
+    <mc:Choice Requires="p14">
       <p:transition spd="slow" p14:dur="2000"/>
     </mc:Choice>
-    <mc:Fallback>
+    <mc:Fallback xmlns="">
       <p:transition spd="slow"/>
     </mc:Fallback>
   </mc:AlternateContent>
@@ -17834,7 +19060,7 @@
 </p:sld>
 </file>
 
-<file path=ppt/slides/slide22.xml><?xml version="1.0" encoding="utf-8"?>
+<file path=ppt/slides/slide24.xml><?xml version="1.0" encoding="utf-8"?>
 <p:sld xmlns:a="http://schemas.openxmlformats.org/drawingml/2006/main" xmlns:r="http://schemas.openxmlformats.org/officeDocument/2006/relationships" xmlns:p="http://schemas.openxmlformats.org/presentationml/2006/main" show="0">
   <p:cSld>
     <p:spTree>
@@ -18605,7 +19831,6 @@
               <a:rPr lang="ru-RU" dirty="0"/>
               <a:t>Автоматизация выбора моделей</a:t>
             </a:r>
-            <a:endParaRPr lang="ru-RU" dirty="0"/>
           </a:p>
         </p:txBody>
       </p:sp>
@@ -18619,11 +19844,11 @@
   <p:clrMapOvr>
     <a:masterClrMapping/>
   </p:clrMapOvr>
-  <mc:AlternateContent xmlns:mc="http://schemas.openxmlformats.org/markup-compatibility/2006">
-    <mc:Choice xmlns:p14="http://schemas.microsoft.com/office/powerpoint/2010/main" Requires="p14">
+  <mc:AlternateContent xmlns:mc="http://schemas.openxmlformats.org/markup-compatibility/2006" xmlns:p14="http://schemas.microsoft.com/office/powerpoint/2010/main">
+    <mc:Choice Requires="p14">
       <p:transition spd="slow" p14:dur="2000"/>
     </mc:Choice>
-    <mc:Fallback>
+    <mc:Fallback xmlns="">
       <p:transition spd="slow"/>
     </mc:Fallback>
   </mc:AlternateContent>
@@ -19679,13 +20904,7 @@
                       <a:rPr lang="en-US" sz="2200" b="0" i="1" dirty="0" smtClean="0">
                         <a:latin typeface="Cambria Math" panose="02040503050406030204" pitchFamily="18" charset="0"/>
                       </a:rPr>
-                      <m:t>+</m:t>
-                    </m:r>
-                    <m:r>
-                      <a:rPr lang="en-US" sz="2200" b="0" i="1" dirty="0" smtClean="0">
-                        <a:latin typeface="Cambria Math" panose="02040503050406030204" pitchFamily="18" charset="0"/>
-                      </a:rPr>
-                      <m:t>1</m:t>
+                      <m:t>+1</m:t>
                     </m:r>
                   </m:oMath>
                 </a14:m>
@@ -19764,13 +20983,7 @@
                             <a:rPr lang="en-US" sz="2200" b="0" i="1" dirty="0" smtClean="0">
                               <a:latin typeface="Cambria Math" panose="02040503050406030204" pitchFamily="18" charset="0"/>
                             </a:rPr>
-                            <m:t>+</m:t>
-                          </m:r>
-                          <m:r>
-                            <a:rPr lang="en-US" sz="2200" b="0" i="1" dirty="0" smtClean="0">
-                              <a:latin typeface="Cambria Math" panose="02040503050406030204" pitchFamily="18" charset="0"/>
-                            </a:rPr>
-                            <m:t>1</m:t>
+                            <m:t>+1</m:t>
                           </m:r>
                         </m:sub>
                       </m:sSub>
@@ -20003,13 +21216,7 @@
                                     <a:rPr lang="en-US" sz="2200" b="0" i="1" dirty="0" smtClean="0">
                                       <a:latin typeface="Cambria Math" panose="02040503050406030204" pitchFamily="18" charset="0"/>
                                     </a:rPr>
-                                    <m:t>+</m:t>
-                                  </m:r>
-                                  <m:r>
-                                    <a:rPr lang="en-US" sz="2200" b="0" i="1" dirty="0" smtClean="0">
-                                      <a:latin typeface="Cambria Math" panose="02040503050406030204" pitchFamily="18" charset="0"/>
-                                    </a:rPr>
-                                    <m:t>1</m:t>
+                                    <m:t>+1</m:t>
                                   </m:r>
                                 </m:sub>
                               </m:sSub>
@@ -20285,13 +21492,7 @@
                               <a:rPr lang="en-US" sz="2200" i="1" dirty="0">
                                 <a:latin typeface="Cambria Math" panose="02040503050406030204" pitchFamily="18" charset="0"/>
                               </a:rPr>
-                              <m:t>+</m:t>
-                            </m:r>
-                            <m:r>
-                              <a:rPr lang="en-US" sz="2200" i="1" dirty="0">
-                                <a:latin typeface="Cambria Math" panose="02040503050406030204" pitchFamily="18" charset="0"/>
-                              </a:rPr>
-                              <m:t>1</m:t>
+                              <m:t>+1</m:t>
                             </m:r>
                           </m:sub>
                         </m:sSub>
